--- a/sunumlar/5-sinif-unite6-scratch-DETAYLI.pptx
+++ b/sunumlar/5-sinif-unite6-scratch-DETAYLI.pptx
@@ -533,6 +533,103 @@
               <a:t>Video: 'Scratch ile Tanışalım' - Giriş videosu</a:t>
             </a:r>
           </a:p>
+          <a:p/>
+          <a:p>
+            <a:r>
+              <a:t>🎨 GÖRSELLEŞTİRME ÖNERİLERİ:</a:t>
+            </a:r>
+          </a:p>
+          <a:p/>
+          <a:p>
+            <a:r>
+              <a:t>📸 Görsel: CPU, RAM ve anakart fotoğrafları</a:t>
+            </a:r>
+          </a:p>
+          <a:p>
+            <a:r>
+              <a:t>🎬 Video: Bilgisayar donanımı tanıtım videosu (1-2 dk)</a:t>
+            </a:r>
+          </a:p>
+          <a:p>
+            <a:r>
+              <a:t>💡 İnfografik: Bilgisayar bileşenleri şeması</a:t>
+            </a:r>
+          </a:p>
+          <a:p>
+            <a:r>
+              <a:t>📸 Görsel: LAN ve WAN ağ topolojileri şeması</a:t>
+            </a:r>
+          </a:p>
+          <a:p>
+            <a:r>
+              <a:t>🎬 Video: İnternet nasıl çalışır? Animasyonlu anlatım</a:t>
+            </a:r>
+          </a:p>
+          <a:p>
+            <a:r>
+              <a:t>💡 İnfografik: Ev ağı kurulumu diyagramı</a:t>
+            </a:r>
+          </a:p>
+          <a:p>
+            <a:r>
+              <a:t>📸 Görsel: Scratch arayüzü ekran görüntüsü</a:t>
+            </a:r>
+          </a:p>
+          <a:p>
+            <a:r>
+              <a:t>🎬 Video: Scratch ile basit oyun yapımı (3-5 dk)</a:t>
+            </a:r>
+          </a:p>
+          <a:p>
+            <a:r>
+              <a:t>💡 Ekran kaydı: Adım adım Scratch projesi</a:t>
+            </a:r>
+          </a:p>
+          <a:p>
+            <a:r>
+              <a:t>📸 Görsel: Döngü mantığı şeması</a:t>
+            </a:r>
+          </a:p>
+          <a:p>
+            <a:r>
+              <a:t>🎬 Video: Döngüler Scratch'te nasıl kullanılır?</a:t>
+            </a:r>
+          </a:p>
+          <a:p>
+            <a:r>
+              <a:t>📸 Görsel: Koşullu yapılar akış diyagramı</a:t>
+            </a:r>
+          </a:p>
+          <a:p>
+            <a:r>
+              <a:t>🎬 Video: Koşullu ifadeler Scratch'te</a:t>
+            </a:r>
+          </a:p>
+          <a:p>
+            <a:r>
+              <a:t>📸 Görsel: Değişken kavramı görselleştirmesi</a:t>
+            </a:r>
+          </a:p>
+          <a:p>
+            <a:r>
+              <a:t>🎬 Video: Scratch'te değişken kullanımı</a:t>
+            </a:r>
+          </a:p>
+          <a:p>
+            <a:r>
+              <a:t>📸 Görsel: Temel tasarım prensipleri</a:t>
+            </a:r>
+          </a:p>
+          <a:p>
+            <a:r>
+              <a:t>🎬 Video: Dijital tasarıma giriş</a:t>
+            </a:r>
+          </a:p>
+          <a:p>
+            <a:r>
+              <a:t>💡 İnfografik: Renk teorisi ve uyumu</a:t>
+            </a:r>
+          </a:p>
         </p:txBody>
       </p:sp>
       <p:sp>
@@ -603,6 +700,93 @@
               <a:t>Etkinlik: Farklı şekiller çizdirin (üçgen, beşgen, altıgen)</a:t>
             </a:r>
           </a:p>
+          <a:p/>
+          <a:p>
+            <a:r>
+              <a:t>🎨 GÖRSELLEŞTİRME ÖNERİLERİ:</a:t>
+            </a:r>
+          </a:p>
+          <a:p/>
+          <a:p>
+            <a:r>
+              <a:t>📸 Görsel: CPU, RAM ve anakart fotoğrafları</a:t>
+            </a:r>
+          </a:p>
+          <a:p>
+            <a:r>
+              <a:t>🎬 Video: Bilgisayar donanımı tanıtım videosu (1-2 dk)</a:t>
+            </a:r>
+          </a:p>
+          <a:p>
+            <a:r>
+              <a:t>💡 İnfografik: Bilgisayar bileşenleri şeması</a:t>
+            </a:r>
+          </a:p>
+          <a:p>
+            <a:r>
+              <a:t>📸 Görsel: LAN ve WAN ağ topolojileri şeması</a:t>
+            </a:r>
+          </a:p>
+          <a:p>
+            <a:r>
+              <a:t>🎬 Video: İnternet nasıl çalışır? Animasyonlu anlatım</a:t>
+            </a:r>
+          </a:p>
+          <a:p>
+            <a:r>
+              <a:t>💡 İnfografik: Ev ağı kurulumu diyagramı</a:t>
+            </a:r>
+          </a:p>
+          <a:p>
+            <a:r>
+              <a:t>📸 Görsel: Scratch arayüzü ekran görüntüsü</a:t>
+            </a:r>
+          </a:p>
+          <a:p>
+            <a:r>
+              <a:t>🎬 Video: Scratch ile basit oyun yapımı (3-5 dk)</a:t>
+            </a:r>
+          </a:p>
+          <a:p>
+            <a:r>
+              <a:t>💡 Ekran kaydı: Adım adım Scratch projesi</a:t>
+            </a:r>
+          </a:p>
+          <a:p>
+            <a:r>
+              <a:t>📸 Görsel: Akış şeması örnekleri</a:t>
+            </a:r>
+          </a:p>
+          <a:p>
+            <a:r>
+              <a:t>🎬 Video: Algoritma nedir? Günlük hayattan örnekler</a:t>
+            </a:r>
+          </a:p>
+          <a:p>
+            <a:r>
+              <a:t>💡 İnfografik: Akış şeması sembolleri</a:t>
+            </a:r>
+          </a:p>
+          <a:p>
+            <a:r>
+              <a:t>📸 Görsel: Döngü mantığı şeması</a:t>
+            </a:r>
+          </a:p>
+          <a:p>
+            <a:r>
+              <a:t>🎬 Video: Döngüler Scratch'te nasıl kullanılır?</a:t>
+            </a:r>
+          </a:p>
+          <a:p>
+            <a:r>
+              <a:t>📸 Görsel: Koşullu yapılar akış diyagramı</a:t>
+            </a:r>
+          </a:p>
+          <a:p>
+            <a:r>
+              <a:t>🎬 Video: Koşullu ifadeler Scratch'te</a:t>
+            </a:r>
+          </a:p>
         </p:txBody>
       </p:sp>
       <p:sp>
@@ -673,6 +857,78 @@
               <a:t>Etkinlik: 'Kenara çarparsa sek' programı yazın</a:t>
             </a:r>
           </a:p>
+          <a:p/>
+          <a:p>
+            <a:r>
+              <a:t>🎨 GÖRSELLEŞTİRME ÖNERİLERİ:</a:t>
+            </a:r>
+          </a:p>
+          <a:p/>
+          <a:p>
+            <a:r>
+              <a:t>📸 Görsel: Çeşitli giriş aygıtları (klavye, fare, mikrofon, kamera)</a:t>
+            </a:r>
+          </a:p>
+          <a:p>
+            <a:r>
+              <a:t>🎬 Video: Giriş aygıtlarının nasıl çalıştığını gösteren animasyon</a:t>
+            </a:r>
+          </a:p>
+          <a:p>
+            <a:r>
+              <a:t>📸 Görsel: LAN ve WAN ağ topolojileri şeması</a:t>
+            </a:r>
+          </a:p>
+          <a:p>
+            <a:r>
+              <a:t>🎬 Video: İnternet nasıl çalışır? Animasyonlu anlatım</a:t>
+            </a:r>
+          </a:p>
+          <a:p>
+            <a:r>
+              <a:t>💡 İnfografik: Ev ağı kurulumu diyagramı</a:t>
+            </a:r>
+          </a:p>
+          <a:p>
+            <a:r>
+              <a:t>📸 Görsel: Scratch arayüzü ekran görüntüsü</a:t>
+            </a:r>
+          </a:p>
+          <a:p>
+            <a:r>
+              <a:t>🎬 Video: Scratch ile basit oyun yapımı (3-5 dk)</a:t>
+            </a:r>
+          </a:p>
+          <a:p>
+            <a:r>
+              <a:t>💡 Ekran kaydı: Adım adım Scratch projesi</a:t>
+            </a:r>
+          </a:p>
+          <a:p>
+            <a:r>
+              <a:t>📸 Görsel: Koşullu yapılar akış diyagramı</a:t>
+            </a:r>
+          </a:p>
+          <a:p>
+            <a:r>
+              <a:t>🎬 Video: Koşullu ifadeler Scratch'te</a:t>
+            </a:r>
+          </a:p>
+          <a:p>
+            <a:r>
+              <a:t>📸 Görsel: Temel tasarım prensipleri</a:t>
+            </a:r>
+          </a:p>
+          <a:p>
+            <a:r>
+              <a:t>🎬 Video: Dijital tasarıma giriş</a:t>
+            </a:r>
+          </a:p>
+          <a:p>
+            <a:r>
+              <a:t>💡 İnfografik: Renk teorisi ve uyumu</a:t>
+            </a:r>
+          </a:p>
         </p:txBody>
       </p:sp>
       <p:sp>
@@ -743,6 +999,63 @@
               <a:t>Etkinlik: 'Puan' değişkeni oluşturun, tıklayınca artsın</a:t>
             </a:r>
           </a:p>
+          <a:p/>
+          <a:p>
+            <a:r>
+              <a:t>🎨 GÖRSELLEŞTİRME ÖNERİLERİ:</a:t>
+            </a:r>
+          </a:p>
+          <a:p/>
+          <a:p>
+            <a:r>
+              <a:t>📸 Görsel: LAN ve WAN ağ topolojileri şeması</a:t>
+            </a:r>
+          </a:p>
+          <a:p>
+            <a:r>
+              <a:t>🎬 Video: İnternet nasıl çalışır? Animasyonlu anlatım</a:t>
+            </a:r>
+          </a:p>
+          <a:p>
+            <a:r>
+              <a:t>💡 İnfografik: Ev ağı kurulumu diyagramı</a:t>
+            </a:r>
+          </a:p>
+          <a:p>
+            <a:r>
+              <a:t>📸 Görsel: Scratch arayüzü ekran görüntüsü</a:t>
+            </a:r>
+          </a:p>
+          <a:p>
+            <a:r>
+              <a:t>🎬 Video: Scratch ile basit oyun yapımı (3-5 dk)</a:t>
+            </a:r>
+          </a:p>
+          <a:p>
+            <a:r>
+              <a:t>💡 Ekran kaydı: Adım adım Scratch projesi</a:t>
+            </a:r>
+          </a:p>
+          <a:p>
+            <a:r>
+              <a:t>📸 Görsel: Döngü mantığı şeması</a:t>
+            </a:r>
+          </a:p>
+          <a:p>
+            <a:r>
+              <a:t>🎬 Video: Döngüler Scratch'te nasıl kullanılır?</a:t>
+            </a:r>
+          </a:p>
+          <a:p>
+            <a:r>
+              <a:t>📸 Görsel: Değişken kavramı görselleştirmesi</a:t>
+            </a:r>
+          </a:p>
+          <a:p>
+            <a:r>
+              <a:t>🎬 Video: Scratch'te değişken kullanımı</a:t>
+            </a:r>
+          </a:p>
         </p:txBody>
       </p:sp>
       <p:sp>
@@ -813,6 +1126,83 @@
               <a:t>Örnek: Basit bir quiz yapın, sorular listede saklansın</a:t>
             </a:r>
           </a:p>
+          <a:p/>
+          <a:p>
+            <a:r>
+              <a:t>🎨 GÖRSELLEŞTİRME ÖNERİLERİ:</a:t>
+            </a:r>
+          </a:p>
+          <a:p/>
+          <a:p>
+            <a:r>
+              <a:t>📸 Görsel: CPU, RAM ve anakart fotoğrafları</a:t>
+            </a:r>
+          </a:p>
+          <a:p>
+            <a:r>
+              <a:t>🎬 Video: Bilgisayar donanımı tanıtım videosu (1-2 dk)</a:t>
+            </a:r>
+          </a:p>
+          <a:p>
+            <a:r>
+              <a:t>💡 İnfografik: Bilgisayar bileşenleri şeması</a:t>
+            </a:r>
+          </a:p>
+          <a:p>
+            <a:r>
+              <a:t>📸 Görsel: LAN ve WAN ağ topolojileri şeması</a:t>
+            </a:r>
+          </a:p>
+          <a:p>
+            <a:r>
+              <a:t>🎬 Video: İnternet nasıl çalışır? Animasyonlu anlatım</a:t>
+            </a:r>
+          </a:p>
+          <a:p>
+            <a:r>
+              <a:t>💡 İnfografik: Ev ağı kurulumu diyagramı</a:t>
+            </a:r>
+          </a:p>
+          <a:p>
+            <a:r>
+              <a:t>📸 Görsel: Scratch arayüzü ekran görüntüsü</a:t>
+            </a:r>
+          </a:p>
+          <a:p>
+            <a:r>
+              <a:t>🎬 Video: Scratch ile basit oyun yapımı (3-5 dk)</a:t>
+            </a:r>
+          </a:p>
+          <a:p>
+            <a:r>
+              <a:t>💡 Ekran kaydı: Adım adım Scratch projesi</a:t>
+            </a:r>
+          </a:p>
+          <a:p>
+            <a:r>
+              <a:t>📸 Görsel: Değişken kavramı görselleştirmesi</a:t>
+            </a:r>
+          </a:p>
+          <a:p>
+            <a:r>
+              <a:t>🎬 Video: Scratch'te değişken kullanımı</a:t>
+            </a:r>
+          </a:p>
+          <a:p>
+            <a:r>
+              <a:t>📸 Görsel: Farklı grafik türleri örnekleri</a:t>
+            </a:r>
+          </a:p>
+          <a:p>
+            <a:r>
+              <a:t>🎬 Video: Veri görselleştirme önemi</a:t>
+            </a:r>
+          </a:p>
+          <a:p>
+            <a:r>
+              <a:t>💡 İnfografik: Grafik türleri ve kullanım alanları</a:t>
+            </a:r>
+          </a:p>
         </p:txBody>
       </p:sp>
       <p:sp>
@@ -883,6 +1273,23 @@
               <a:t>Etkinlik: Basit hesap makinesi yapın</a:t>
             </a:r>
           </a:p>
+          <a:p/>
+          <a:p>
+            <a:r>
+              <a:t>🎨 GÖRSELLEŞTİRME ÖNERİLERİ:</a:t>
+            </a:r>
+          </a:p>
+          <a:p/>
+          <a:p>
+            <a:r>
+              <a:t>📸 Görsel: Konuyla ilgili görsel içerik eklenebilir</a:t>
+            </a:r>
+          </a:p>
+          <a:p>
+            <a:r>
+              <a:t>💡 İlgili ekran görüntüleri veya şemalar eklenebilir</a:t>
+            </a:r>
+          </a:p>
         </p:txBody>
       </p:sp>
       <p:sp>
@@ -953,6 +1360,78 @@
               <a:t>Etkinlik: Sprite'a dokunulunca ses çıkarsın</a:t>
             </a:r>
           </a:p>
+          <a:p/>
+          <a:p>
+            <a:r>
+              <a:t>🎨 GÖRSELLEŞTİRME ÖNERİLERİ:</a:t>
+            </a:r>
+          </a:p>
+          <a:p/>
+          <a:p>
+            <a:r>
+              <a:t>📸 Görsel: Çeşitli giriş aygıtları (klavye, fare, mikrofon, kamera)</a:t>
+            </a:r>
+          </a:p>
+          <a:p>
+            <a:r>
+              <a:t>🎬 Video: Giriş aygıtlarının nasıl çalıştığını gösteren animasyon</a:t>
+            </a:r>
+          </a:p>
+          <a:p>
+            <a:r>
+              <a:t>📸 Görsel: LAN ve WAN ağ topolojileri şeması</a:t>
+            </a:r>
+          </a:p>
+          <a:p>
+            <a:r>
+              <a:t>🎬 Video: İnternet nasıl çalışır? Animasyonlu anlatım</a:t>
+            </a:r>
+          </a:p>
+          <a:p>
+            <a:r>
+              <a:t>💡 İnfografik: Ev ağı kurulumu diyagramı</a:t>
+            </a:r>
+          </a:p>
+          <a:p>
+            <a:r>
+              <a:t>📸 Görsel: Scratch arayüzü ekran görüntüsü</a:t>
+            </a:r>
+          </a:p>
+          <a:p>
+            <a:r>
+              <a:t>🎬 Video: Scratch ile basit oyun yapımı (3-5 dk)</a:t>
+            </a:r>
+          </a:p>
+          <a:p>
+            <a:r>
+              <a:t>💡 Ekran kaydı: Adım adım Scratch projesi</a:t>
+            </a:r>
+          </a:p>
+          <a:p>
+            <a:r>
+              <a:t>📸 Görsel: Döngü mantığı şeması</a:t>
+            </a:r>
+          </a:p>
+          <a:p>
+            <a:r>
+              <a:t>🎬 Video: Döngüler Scratch'te nasıl kullanılır?</a:t>
+            </a:r>
+          </a:p>
+          <a:p>
+            <a:r>
+              <a:t>📸 Görsel: Temel tasarım prensipleri</a:t>
+            </a:r>
+          </a:p>
+          <a:p>
+            <a:r>
+              <a:t>🎬 Video: Dijital tasarıma giriş</a:t>
+            </a:r>
+          </a:p>
+          <a:p>
+            <a:r>
+              <a:t>💡 İnfografik: Renk teorisi ve uyumu</a:t>
+            </a:r>
+          </a:p>
         </p:txBody>
       </p:sp>
       <p:sp>
@@ -1023,6 +1502,83 @@
               <a:t>Etkinlik: 'Yıldız çiz' fonksiyonu oluşturun</a:t>
             </a:r>
           </a:p>
+          <a:p/>
+          <a:p>
+            <a:r>
+              <a:t>🎨 GÖRSELLEŞTİRME ÖNERİLERİ:</a:t>
+            </a:r>
+          </a:p>
+          <a:p/>
+          <a:p>
+            <a:r>
+              <a:t>📸 Görsel: CPU, RAM ve anakart fotoğrafları</a:t>
+            </a:r>
+          </a:p>
+          <a:p>
+            <a:r>
+              <a:t>🎬 Video: Bilgisayar donanımı tanıtım videosu (1-2 dk)</a:t>
+            </a:r>
+          </a:p>
+          <a:p>
+            <a:r>
+              <a:t>💡 İnfografik: Bilgisayar bileşenleri şeması</a:t>
+            </a:r>
+          </a:p>
+          <a:p>
+            <a:r>
+              <a:t>📸 Görsel: LAN ve WAN ağ topolojileri şeması</a:t>
+            </a:r>
+          </a:p>
+          <a:p>
+            <a:r>
+              <a:t>🎬 Video: İnternet nasıl çalışır? Animasyonlu anlatım</a:t>
+            </a:r>
+          </a:p>
+          <a:p>
+            <a:r>
+              <a:t>💡 İnfografik: Ev ağı kurulumu diyagramı</a:t>
+            </a:r>
+          </a:p>
+          <a:p>
+            <a:r>
+              <a:t>📸 Görsel: Scratch arayüzü ekran görüntüsü</a:t>
+            </a:r>
+          </a:p>
+          <a:p>
+            <a:r>
+              <a:t>🎬 Video: Scratch ile basit oyun yapımı (3-5 dk)</a:t>
+            </a:r>
+          </a:p>
+          <a:p>
+            <a:r>
+              <a:t>💡 Ekran kaydı: Adım adım Scratch projesi</a:t>
+            </a:r>
+          </a:p>
+          <a:p>
+            <a:r>
+              <a:t>📸 Görsel: Akış şeması örnekleri</a:t>
+            </a:r>
+          </a:p>
+          <a:p>
+            <a:r>
+              <a:t>🎬 Video: Algoritma nedir? Günlük hayattan örnekler</a:t>
+            </a:r>
+          </a:p>
+          <a:p>
+            <a:r>
+              <a:t>💡 İnfografik: Akış şeması sembolleri</a:t>
+            </a:r>
+          </a:p>
+          <a:p>
+            <a:r>
+              <a:t>📸 Görsel: Döngü mantığı şeması</a:t>
+            </a:r>
+          </a:p>
+          <a:p>
+            <a:r>
+              <a:t>🎬 Video: Döngüler Scratch'te nasıl kullanılır?</a:t>
+            </a:r>
+          </a:p>
         </p:txBody>
       </p:sp>
       <p:sp>
@@ -1093,6 +1649,68 @@
               <a:t>Proje: Öğrenciler kendi labirentlerini tasarlasın</a:t>
             </a:r>
           </a:p>
+          <a:p/>
+          <a:p>
+            <a:r>
+              <a:t>🎨 GÖRSELLEŞTİRME ÖNERİLERİ:</a:t>
+            </a:r>
+          </a:p>
+          <a:p/>
+          <a:p>
+            <a:r>
+              <a:t>📸 Görsel: LAN ve WAN ağ topolojileri şeması</a:t>
+            </a:r>
+          </a:p>
+          <a:p>
+            <a:r>
+              <a:t>🎬 Video: İnternet nasıl çalışır? Animasyonlu anlatım</a:t>
+            </a:r>
+          </a:p>
+          <a:p>
+            <a:r>
+              <a:t>💡 İnfografik: Ev ağı kurulumu diyagramı</a:t>
+            </a:r>
+          </a:p>
+          <a:p>
+            <a:r>
+              <a:t>📸 Görsel: Scratch arayüzü ekran görüntüsü</a:t>
+            </a:r>
+          </a:p>
+          <a:p>
+            <a:r>
+              <a:t>🎬 Video: Scratch ile basit oyun yapımı (3-5 dk)</a:t>
+            </a:r>
+          </a:p>
+          <a:p>
+            <a:r>
+              <a:t>💡 Ekran kaydı: Adım adım Scratch projesi</a:t>
+            </a:r>
+          </a:p>
+          <a:p>
+            <a:r>
+              <a:t>📸 Görsel: Akış şeması örnekleri</a:t>
+            </a:r>
+          </a:p>
+          <a:p>
+            <a:r>
+              <a:t>🎬 Video: Algoritma nedir? Günlük hayattan örnekler</a:t>
+            </a:r>
+          </a:p>
+          <a:p>
+            <a:r>
+              <a:t>💡 İnfografik: Akış şeması sembolleri</a:t>
+            </a:r>
+          </a:p>
+          <a:p>
+            <a:r>
+              <a:t>📸 Görsel: Koşullu yapılar akış diyagramı</a:t>
+            </a:r>
+          </a:p>
+          <a:p>
+            <a:r>
+              <a:t>🎬 Video: Koşullu ifadeler Scratch'te</a:t>
+            </a:r>
+          </a:p>
         </p:txBody>
       </p:sp>
       <p:sp>
@@ -1163,6 +1781,78 @@
               <a:t>Proje: Öğrenciler oyunu geliştirsin (tuğlalar, seviyeler)</a:t>
             </a:r>
           </a:p>
+          <a:p/>
+          <a:p>
+            <a:r>
+              <a:t>🎨 GÖRSELLEŞTİRME ÖNERİLERİ:</a:t>
+            </a:r>
+          </a:p>
+          <a:p/>
+          <a:p>
+            <a:r>
+              <a:t>📸 Görsel: Çeşitli giriş aygıtları (klavye, fare, mikrofon, kamera)</a:t>
+            </a:r>
+          </a:p>
+          <a:p>
+            <a:r>
+              <a:t>🎬 Video: Giriş aygıtlarının nasıl çalıştığını gösteren animasyon</a:t>
+            </a:r>
+          </a:p>
+          <a:p>
+            <a:r>
+              <a:t>📸 Görsel: LAN ve WAN ağ topolojileri şeması</a:t>
+            </a:r>
+          </a:p>
+          <a:p>
+            <a:r>
+              <a:t>🎬 Video: İnternet nasıl çalışır? Animasyonlu anlatım</a:t>
+            </a:r>
+          </a:p>
+          <a:p>
+            <a:r>
+              <a:t>💡 İnfografik: Ev ağı kurulumu diyagramı</a:t>
+            </a:r>
+          </a:p>
+          <a:p>
+            <a:r>
+              <a:t>📸 Görsel: Scratch arayüzü ekran görüntüsü</a:t>
+            </a:r>
+          </a:p>
+          <a:p>
+            <a:r>
+              <a:t>🎬 Video: Scratch ile basit oyun yapımı (3-5 dk)</a:t>
+            </a:r>
+          </a:p>
+          <a:p>
+            <a:r>
+              <a:t>💡 Ekran kaydı: Adım adım Scratch projesi</a:t>
+            </a:r>
+          </a:p>
+          <a:p>
+            <a:r>
+              <a:t>📸 Görsel: Akış şeması örnekleri</a:t>
+            </a:r>
+          </a:p>
+          <a:p>
+            <a:r>
+              <a:t>🎬 Video: Algoritma nedir? Günlük hayattan örnekler</a:t>
+            </a:r>
+          </a:p>
+          <a:p>
+            <a:r>
+              <a:t>💡 İnfografik: Akış şeması sembolleri</a:t>
+            </a:r>
+          </a:p>
+          <a:p>
+            <a:r>
+              <a:t>📸 Görsel: Döngü mantığı şeması</a:t>
+            </a:r>
+          </a:p>
+          <a:p>
+            <a:r>
+              <a:t>🎬 Video: Döngüler Scratch'te nasıl kullanılır?</a:t>
+            </a:r>
+          </a:p>
         </p:txBody>
       </p:sp>
       <p:sp>
@@ -1233,6 +1923,73 @@
               <a:t>Proje: Öğrenciler tema değiştirsin (uzay, deniz altı, vs.)</a:t>
             </a:r>
           </a:p>
+          <a:p/>
+          <a:p>
+            <a:r>
+              <a:t>🎨 GÖRSELLEŞTİRME ÖNERİLERİ:</a:t>
+            </a:r>
+          </a:p>
+          <a:p/>
+          <a:p>
+            <a:r>
+              <a:t>📸 Görsel: Çeşitli giriş aygıtları (klavye, fare, mikrofon, kamera)</a:t>
+            </a:r>
+          </a:p>
+          <a:p>
+            <a:r>
+              <a:t>🎬 Video: Giriş aygıtlarının nasıl çalıştığını gösteren animasyon</a:t>
+            </a:r>
+          </a:p>
+          <a:p>
+            <a:r>
+              <a:t>📸 Görsel: LAN ve WAN ağ topolojileri şeması</a:t>
+            </a:r>
+          </a:p>
+          <a:p>
+            <a:r>
+              <a:t>🎬 Video: İnternet nasıl çalışır? Animasyonlu anlatım</a:t>
+            </a:r>
+          </a:p>
+          <a:p>
+            <a:r>
+              <a:t>💡 İnfografik: Ev ağı kurulumu diyagramı</a:t>
+            </a:r>
+          </a:p>
+          <a:p>
+            <a:r>
+              <a:t>📸 Görsel: Scratch arayüzü ekran görüntüsü</a:t>
+            </a:r>
+          </a:p>
+          <a:p>
+            <a:r>
+              <a:t>🎬 Video: Scratch ile basit oyun yapımı (3-5 dk)</a:t>
+            </a:r>
+          </a:p>
+          <a:p>
+            <a:r>
+              <a:t>💡 Ekran kaydı: Adım adım Scratch projesi</a:t>
+            </a:r>
+          </a:p>
+          <a:p>
+            <a:r>
+              <a:t>📸 Görsel: Döngü mantığı şeması</a:t>
+            </a:r>
+          </a:p>
+          <a:p>
+            <a:r>
+              <a:t>🎬 Video: Döngüler Scratch'te nasıl kullanılır?</a:t>
+            </a:r>
+          </a:p>
+          <a:p>
+            <a:r>
+              <a:t>📸 Görsel: Değişken kavramı görselleştirmesi</a:t>
+            </a:r>
+          </a:p>
+          <a:p>
+            <a:r>
+              <a:t>🎬 Video: Scratch'te değişken kullanımı</a:t>
+            </a:r>
+          </a:p>
         </p:txBody>
       </p:sp>
       <p:sp>
@@ -1303,6 +2060,73 @@
               <a:t>Gösterim: scratch.mit.edu sitesine girin, anasayfayı tanıtın</a:t>
             </a:r>
           </a:p>
+          <a:p/>
+          <a:p>
+            <a:r>
+              <a:t>🎨 GÖRSELLEŞTİRME ÖNERİLERİ:</a:t>
+            </a:r>
+          </a:p>
+          <a:p/>
+          <a:p>
+            <a:r>
+              <a:t>📸 Görsel: CPU, RAM ve anakart fotoğrafları</a:t>
+            </a:r>
+          </a:p>
+          <a:p>
+            <a:r>
+              <a:t>🎬 Video: Bilgisayar donanımı tanıtım videosu (1-2 dk)</a:t>
+            </a:r>
+          </a:p>
+          <a:p>
+            <a:r>
+              <a:t>💡 İnfografik: Bilgisayar bileşenleri şeması</a:t>
+            </a:r>
+          </a:p>
+          <a:p>
+            <a:r>
+              <a:t>📸 Görsel: LAN ve WAN ağ topolojileri şeması</a:t>
+            </a:r>
+          </a:p>
+          <a:p>
+            <a:r>
+              <a:t>🎬 Video: İnternet nasıl çalışır? Animasyonlu anlatım</a:t>
+            </a:r>
+          </a:p>
+          <a:p>
+            <a:r>
+              <a:t>💡 İnfografik: Ev ağı kurulumu diyagramı</a:t>
+            </a:r>
+          </a:p>
+          <a:p>
+            <a:r>
+              <a:t>📸 Görsel: Scratch arayüzü ekran görüntüsü</a:t>
+            </a:r>
+          </a:p>
+          <a:p>
+            <a:r>
+              <a:t>🎬 Video: Scratch ile basit oyun yapımı (3-5 dk)</a:t>
+            </a:r>
+          </a:p>
+          <a:p>
+            <a:r>
+              <a:t>💡 Ekran kaydı: Adım adım Scratch projesi</a:t>
+            </a:r>
+          </a:p>
+          <a:p>
+            <a:r>
+              <a:t>📸 Görsel: Akış şeması örnekleri</a:t>
+            </a:r>
+          </a:p>
+          <a:p>
+            <a:r>
+              <a:t>🎬 Video: Algoritma nedir? Günlük hayattan örnekler</a:t>
+            </a:r>
+          </a:p>
+          <a:p>
+            <a:r>
+              <a:t>💡 İnfografik: Akış şeması sembolleri</a:t>
+            </a:r>
+          </a:p>
         </p:txBody>
       </p:sp>
       <p:sp>
@@ -1373,6 +2197,53 @@
               <a:t>Proje: Öğrencilere yardım edin, birlikte kodlayın</a:t>
             </a:r>
           </a:p>
+          <a:p/>
+          <a:p>
+            <a:r>
+              <a:t>🎨 GÖRSELLEŞTİRME ÖNERİLERİ:</a:t>
+            </a:r>
+          </a:p>
+          <a:p/>
+          <a:p>
+            <a:r>
+              <a:t>📸 Görsel: LAN ve WAN ağ topolojileri şeması</a:t>
+            </a:r>
+          </a:p>
+          <a:p>
+            <a:r>
+              <a:t>🎬 Video: İnternet nasıl çalışır? Animasyonlu anlatım</a:t>
+            </a:r>
+          </a:p>
+          <a:p>
+            <a:r>
+              <a:t>💡 İnfografik: Ev ağı kurulumu diyagramı</a:t>
+            </a:r>
+          </a:p>
+          <a:p>
+            <a:r>
+              <a:t>📸 Görsel: Akış şeması örnekleri</a:t>
+            </a:r>
+          </a:p>
+          <a:p>
+            <a:r>
+              <a:t>🎬 Video: Algoritma nedir? Günlük hayattan örnekler</a:t>
+            </a:r>
+          </a:p>
+          <a:p>
+            <a:r>
+              <a:t>💡 İnfografik: Akış şeması sembolleri</a:t>
+            </a:r>
+          </a:p>
+          <a:p>
+            <a:r>
+              <a:t>📸 Görsel: Koşullu yapılar akış diyagramı</a:t>
+            </a:r>
+          </a:p>
+          <a:p>
+            <a:r>
+              <a:t>🎬 Video: Koşullu ifadeler Scratch'te</a:t>
+            </a:r>
+          </a:p>
         </p:txBody>
       </p:sp>
       <p:sp>
@@ -1443,6 +2314,103 @@
               <a:t>Proje: Damga, şekil çizme ekleyin</a:t>
             </a:r>
           </a:p>
+          <a:p/>
+          <a:p>
+            <a:r>
+              <a:t>🎨 GÖRSELLEŞTİRME ÖNERİLERİ:</a:t>
+            </a:r>
+          </a:p>
+          <a:p/>
+          <a:p>
+            <a:r>
+              <a:t>📸 Görsel: Çeşitli giriş aygıtları (klavye, fare, mikrofon, kamera)</a:t>
+            </a:r>
+          </a:p>
+          <a:p>
+            <a:r>
+              <a:t>🎬 Video: Giriş aygıtlarının nasıl çalıştığını gösteren animasyon</a:t>
+            </a:r>
+          </a:p>
+          <a:p>
+            <a:r>
+              <a:t>📸 Görsel: LAN ve WAN ağ topolojileri şeması</a:t>
+            </a:r>
+          </a:p>
+          <a:p>
+            <a:r>
+              <a:t>🎬 Video: İnternet nasıl çalışır? Animasyonlu anlatım</a:t>
+            </a:r>
+          </a:p>
+          <a:p>
+            <a:r>
+              <a:t>💡 İnfografik: Ev ağı kurulumu diyagramı</a:t>
+            </a:r>
+          </a:p>
+          <a:p>
+            <a:r>
+              <a:t>📸 Görsel: Yapay zeka uygulama örnekleri (Siri, Alexa, ChatGPT)</a:t>
+            </a:r>
+          </a:p>
+          <a:p>
+            <a:r>
+              <a:t>🎬 Video: Yapay zeka nedir? Çocuklar için anlatım</a:t>
+            </a:r>
+          </a:p>
+          <a:p>
+            <a:r>
+              <a:t>💡 İnfografik: AI kullanım alanları</a:t>
+            </a:r>
+          </a:p>
+          <a:p>
+            <a:r>
+              <a:t>📸 Görsel: Scratch arayüzü ekran görüntüsü</a:t>
+            </a:r>
+          </a:p>
+          <a:p>
+            <a:r>
+              <a:t>🎬 Video: Scratch ile basit oyun yapımı (3-5 dk)</a:t>
+            </a:r>
+          </a:p>
+          <a:p>
+            <a:r>
+              <a:t>💡 Ekran kaydı: Adım adım Scratch projesi</a:t>
+            </a:r>
+          </a:p>
+          <a:p>
+            <a:r>
+              <a:t>📸 Görsel: Döngü mantığı şeması</a:t>
+            </a:r>
+          </a:p>
+          <a:p>
+            <a:r>
+              <a:t>🎬 Video: Döngüler Scratch'te nasıl kullanılır?</a:t>
+            </a:r>
+          </a:p>
+          <a:p>
+            <a:r>
+              <a:t>📸 Görsel: Paint araçları ekran görüntüsü</a:t>
+            </a:r>
+          </a:p>
+          <a:p>
+            <a:r>
+              <a:t>🎬 Video: Paint ile basit çizim teknikleri</a:t>
+            </a:r>
+          </a:p>
+          <a:p>
+            <a:r>
+              <a:t>📸 Görsel: Temel tasarım prensipleri</a:t>
+            </a:r>
+          </a:p>
+          <a:p>
+            <a:r>
+              <a:t>🎬 Video: Dijital tasarıma giriş</a:t>
+            </a:r>
+          </a:p>
+          <a:p>
+            <a:r>
+              <a:t>💡 İnfografik: Renk teorisi ve uyumu</a:t>
+            </a:r>
+          </a:p>
         </p:txBody>
       </p:sp>
       <p:sp>
@@ -1513,6 +2481,38 @@
               <a:t>Proje: 10 soruluk bilgi yarışması yapın</a:t>
             </a:r>
           </a:p>
+          <a:p/>
+          <a:p>
+            <a:r>
+              <a:t>🎨 GÖRSELLEŞTİRME ÖNERİLERİ:</a:t>
+            </a:r>
+          </a:p>
+          <a:p/>
+          <a:p>
+            <a:r>
+              <a:t>📸 Görsel: Scratch arayüzü ekran görüntüsü</a:t>
+            </a:r>
+          </a:p>
+          <a:p>
+            <a:r>
+              <a:t>🎬 Video: Scratch ile basit oyun yapımı (3-5 dk)</a:t>
+            </a:r>
+          </a:p>
+          <a:p>
+            <a:r>
+              <a:t>💡 Ekran kaydı: Adım adım Scratch projesi</a:t>
+            </a:r>
+          </a:p>
+          <a:p>
+            <a:r>
+              <a:t>📸 Görsel: Koşullu yapılar akış diyagramı</a:t>
+            </a:r>
+          </a:p>
+          <a:p>
+            <a:r>
+              <a:t>🎬 Video: Koşullu ifadeler Scratch'te</a:t>
+            </a:r>
+          </a:p>
         </p:txBody>
       </p:sp>
       <p:sp>
@@ -1583,6 +2583,38 @@
               <a:t>Etkinlik: Her projeye uygun müzik ve ses ekleyin</a:t>
             </a:r>
           </a:p>
+          <a:p/>
+          <a:p>
+            <a:r>
+              <a:t>🎨 GÖRSELLEŞTİRME ÖNERİLERİ:</a:t>
+            </a:r>
+          </a:p>
+          <a:p/>
+          <a:p>
+            <a:r>
+              <a:t>📸 Görsel: LAN ve WAN ağ topolojileri şeması</a:t>
+            </a:r>
+          </a:p>
+          <a:p>
+            <a:r>
+              <a:t>🎬 Video: İnternet nasıl çalışır? Animasyonlu anlatım</a:t>
+            </a:r>
+          </a:p>
+          <a:p>
+            <a:r>
+              <a:t>💡 İnfografik: Ev ağı kurulumu diyagramı</a:t>
+            </a:r>
+          </a:p>
+          <a:p>
+            <a:r>
+              <a:t>📸 Görsel: Döngü mantığı şeması</a:t>
+            </a:r>
+          </a:p>
+          <a:p>
+            <a:r>
+              <a:t>🎬 Video: Döngüler Scratch'te nasıl kullanılır?</a:t>
+            </a:r>
+          </a:p>
         </p:txBody>
       </p:sp>
       <p:sp>
@@ -1653,6 +2685,43 @@
               <a:t>Etkinlik: Öğrencilerin projelerini Scratch'te paylaşın</a:t>
             </a:r>
           </a:p>
+          <a:p/>
+          <a:p>
+            <a:r>
+              <a:t>🎨 GÖRSELLEŞTİRME ÖNERİLERİ:</a:t>
+            </a:r>
+          </a:p>
+          <a:p/>
+          <a:p>
+            <a:r>
+              <a:t>📸 Görsel: LAN ve WAN ağ topolojileri şeması</a:t>
+            </a:r>
+          </a:p>
+          <a:p>
+            <a:r>
+              <a:t>🎬 Video: İnternet nasıl çalışır? Animasyonlu anlatım</a:t>
+            </a:r>
+          </a:p>
+          <a:p>
+            <a:r>
+              <a:t>💡 İnfografik: Ev ağı kurulumu diyagramı</a:t>
+            </a:r>
+          </a:p>
+          <a:p>
+            <a:r>
+              <a:t>📸 Görsel: Scratch arayüzü ekran görüntüsü</a:t>
+            </a:r>
+          </a:p>
+          <a:p>
+            <a:r>
+              <a:t>🎬 Video: Scratch ile basit oyun yapımı (3-5 dk)</a:t>
+            </a:r>
+          </a:p>
+          <a:p>
+            <a:r>
+              <a:t>💡 Ekran kaydı: Adım adım Scratch projesi</a:t>
+            </a:r>
+          </a:p>
         </p:txBody>
       </p:sp>
       <p:sp>
@@ -1723,6 +2792,98 @@
               <a:t>Her öğrenci kendi projesini planlasın, onaylayın, sonra kodlamaya başlasın</a:t>
             </a:r>
           </a:p>
+          <a:p/>
+          <a:p>
+            <a:r>
+              <a:t>🎨 GÖRSELLEŞTİRME ÖNERİLERİ:</a:t>
+            </a:r>
+          </a:p>
+          <a:p/>
+          <a:p>
+            <a:r>
+              <a:t>📸 Görsel: Çeşitli giriş aygıtları (klavye, fare, mikrofon, kamera)</a:t>
+            </a:r>
+          </a:p>
+          <a:p>
+            <a:r>
+              <a:t>🎬 Video: Giriş aygıtlarının nasıl çalıştığını gösteren animasyon</a:t>
+            </a:r>
+          </a:p>
+          <a:p>
+            <a:r>
+              <a:t>📸 Görsel: LAN ve WAN ağ topolojileri şeması</a:t>
+            </a:r>
+          </a:p>
+          <a:p>
+            <a:r>
+              <a:t>🎬 Video: İnternet nasıl çalışır? Animasyonlu anlatım</a:t>
+            </a:r>
+          </a:p>
+          <a:p>
+            <a:r>
+              <a:t>💡 İnfografik: Ev ağı kurulumu diyagramı</a:t>
+            </a:r>
+          </a:p>
+          <a:p>
+            <a:r>
+              <a:t>📸 Görsel: Scratch arayüzü ekran görüntüsü</a:t>
+            </a:r>
+          </a:p>
+          <a:p>
+            <a:r>
+              <a:t>🎬 Video: Scratch ile basit oyun yapımı (3-5 dk)</a:t>
+            </a:r>
+          </a:p>
+          <a:p>
+            <a:r>
+              <a:t>💡 Ekran kaydı: Adım adım Scratch projesi</a:t>
+            </a:r>
+          </a:p>
+          <a:p>
+            <a:r>
+              <a:t>📸 Görsel: Döngü mantığı şeması</a:t>
+            </a:r>
+          </a:p>
+          <a:p>
+            <a:r>
+              <a:t>🎬 Video: Döngüler Scratch'te nasıl kullanılır?</a:t>
+            </a:r>
+          </a:p>
+          <a:p>
+            <a:r>
+              <a:t>📸 Görsel: Koşullu yapılar akış diyagramı</a:t>
+            </a:r>
+          </a:p>
+          <a:p>
+            <a:r>
+              <a:t>🎬 Video: Koşullu ifadeler Scratch'te</a:t>
+            </a:r>
+          </a:p>
+          <a:p>
+            <a:r>
+              <a:t>📸 Görsel: Değişken kavramı görselleştirmesi</a:t>
+            </a:r>
+          </a:p>
+          <a:p>
+            <a:r>
+              <a:t>🎬 Video: Scratch'te değişken kullanımı</a:t>
+            </a:r>
+          </a:p>
+          <a:p>
+            <a:r>
+              <a:t>📸 Görsel: PowerPoint arayüzü ve araçları</a:t>
+            </a:r>
+          </a:p>
+          <a:p>
+            <a:r>
+              <a:t>🎬 Video: Etkili sunum hazırlama ipuçları</a:t>
+            </a:r>
+          </a:p>
+          <a:p>
+            <a:r>
+              <a:t>💡 Ekran kaydı: PowerPoint temel özellikler</a:t>
+            </a:r>
+          </a:p>
         </p:txBody>
       </p:sp>
       <p:sp>
@@ -1793,6 +2954,98 @@
               <a:t>Quiz yapın ve tüm üniteyi değerlendirin</a:t>
             </a:r>
           </a:p>
+          <a:p/>
+          <a:p>
+            <a:r>
+              <a:t>🎨 GÖRSELLEŞTİRME ÖNERİLERİ:</a:t>
+            </a:r>
+          </a:p>
+          <a:p/>
+          <a:p>
+            <a:r>
+              <a:t>📸 Görsel: CPU, RAM ve anakart fotoğrafları</a:t>
+            </a:r>
+          </a:p>
+          <a:p>
+            <a:r>
+              <a:t>🎬 Video: Bilgisayar donanımı tanıtım videosu (1-2 dk)</a:t>
+            </a:r>
+          </a:p>
+          <a:p>
+            <a:r>
+              <a:t>💡 İnfografik: Bilgisayar bileşenleri şeması</a:t>
+            </a:r>
+          </a:p>
+          <a:p>
+            <a:r>
+              <a:t>📸 Görsel: LAN ve WAN ağ topolojileri şeması</a:t>
+            </a:r>
+          </a:p>
+          <a:p>
+            <a:r>
+              <a:t>🎬 Video: İnternet nasıl çalışır? Animasyonlu anlatım</a:t>
+            </a:r>
+          </a:p>
+          <a:p>
+            <a:r>
+              <a:t>💡 İnfografik: Ev ağı kurulumu diyagramı</a:t>
+            </a:r>
+          </a:p>
+          <a:p>
+            <a:r>
+              <a:t>📸 Görsel: Scratch arayüzü ekran görüntüsü</a:t>
+            </a:r>
+          </a:p>
+          <a:p>
+            <a:r>
+              <a:t>🎬 Video: Scratch ile basit oyun yapımı (3-5 dk)</a:t>
+            </a:r>
+          </a:p>
+          <a:p>
+            <a:r>
+              <a:t>💡 Ekran kaydı: Adım adım Scratch projesi</a:t>
+            </a:r>
+          </a:p>
+          <a:p>
+            <a:r>
+              <a:t>📸 Görsel: Döngü mantığı şeması</a:t>
+            </a:r>
+          </a:p>
+          <a:p>
+            <a:r>
+              <a:t>🎬 Video: Döngüler Scratch'te nasıl kullanılır?</a:t>
+            </a:r>
+          </a:p>
+          <a:p>
+            <a:r>
+              <a:t>📸 Görsel: Koşullu yapılar akış diyagramı</a:t>
+            </a:r>
+          </a:p>
+          <a:p>
+            <a:r>
+              <a:t>🎬 Video: Koşullu ifadeler Scratch'te</a:t>
+            </a:r>
+          </a:p>
+          <a:p>
+            <a:r>
+              <a:t>📸 Görsel: Değişken kavramı görselleştirmesi</a:t>
+            </a:r>
+          </a:p>
+          <a:p>
+            <a:r>
+              <a:t>🎬 Video: Scratch'te değişken kullanımı</a:t>
+            </a:r>
+          </a:p>
+          <a:p>
+            <a:r>
+              <a:t>📸 Görsel: Paint araçları ekran görüntüsü</a:t>
+            </a:r>
+          </a:p>
+          <a:p>
+            <a:r>
+              <a:t>🎬 Video: Paint ile basit çizim teknikleri</a:t>
+            </a:r>
+          </a:p>
         </p:txBody>
       </p:sp>
       <p:sp>
@@ -1863,6 +3116,265 @@
               <a:t>Tüm kaynakları önceden inceleyin ve öğrencilere yol gösterin</a:t>
             </a:r>
           </a:p>
+          <a:p/>
+          <a:p>
+            <a:r>
+              <a:t>🎨 GÖRSELLEŞTİRME ÖNERİLERİ:</a:t>
+            </a:r>
+          </a:p>
+          <a:p/>
+          <a:p>
+            <a:r>
+              <a:t>📸 Görsel: CPU, RAM ve anakart fotoğrafları</a:t>
+            </a:r>
+          </a:p>
+          <a:p>
+            <a:r>
+              <a:t>🎬 Video: Bilgisayar donanımı tanıtım videosu (1-2 dk)</a:t>
+            </a:r>
+          </a:p>
+          <a:p>
+            <a:r>
+              <a:t>💡 İnfografik: Bilgisayar bileşenleri şeması</a:t>
+            </a:r>
+          </a:p>
+          <a:p>
+            <a:r>
+              <a:t>📸 Görsel: Scratch arayüzü ekran görüntüsü</a:t>
+            </a:r>
+          </a:p>
+          <a:p>
+            <a:r>
+              <a:t>🎬 Video: Scratch ile basit oyun yapımı (3-5 dk)</a:t>
+            </a:r>
+          </a:p>
+          <a:p>
+            <a:r>
+              <a:t>💡 Ekran kaydı: Adım adım Scratch projesi</a:t>
+            </a:r>
+          </a:p>
+          <a:p>
+            <a:r>
+              <a:t>📸 Görsel: Koşullu yapılar akış diyagramı</a:t>
+            </a:r>
+          </a:p>
+          <a:p>
+            <a:r>
+              <a:t>🎬 Video: Koşullu ifadeler Scratch'te</a:t>
+            </a:r>
+          </a:p>
+          <a:p>
+            <a:r>
+              <a:t>📸 Görsel: Değişken kavramı görselleştirmesi</a:t>
+            </a:r>
+          </a:p>
+          <a:p>
+            <a:r>
+              <a:t>🎬 Video: Scratch'te değişken kullanımı</a:t>
+            </a:r>
+          </a:p>
+        </p:txBody>
+      </p:sp>
+      <p:sp>
+        <p:nvSpPr>
+          <p:cNvPr id="4" name="Slide Number Placeholder 3"/>
+          <p:cNvSpPr>
+            <a:spLocks noGrp="1"/>
+          </p:cNvSpPr>
+          <p:nvPr>
+            <p:ph type="sldNum" idx="5" sz="quarter"/>
+          </p:nvPr>
+        </p:nvSpPr>
+        <p:spPr/>
+      </p:sp>
+    </p:spTree>
+  </p:cSld>
+  <p:clrMapOvr>
+    <a:masterClrMapping/>
+  </p:clrMapOvr>
+</p:notes>
+</file>
+
+<file path=ppt/notesSlides/notesSlide28.xml><?xml version="1.0" encoding="utf-8"?>
+<p:notes xmlns:a="http://schemas.openxmlformats.org/drawingml/2006/main" xmlns:p="http://schemas.openxmlformats.org/presentationml/2006/main" xmlns:r="http://schemas.openxmlformats.org/officeDocument/2006/relationships">
+  <p:cSld>
+    <p:spTree>
+      <p:nvGrpSpPr>
+        <p:cNvPr id="1" name=""/>
+        <p:cNvGrpSpPr/>
+        <p:nvPr/>
+      </p:nvGrpSpPr>
+      <p:grpSpPr>
+        <a:xfrm>
+          <a:off x="0" y="0"/>
+          <a:ext cx="0" cy="0"/>
+          <a:chOff x="0" y="0"/>
+          <a:chExt cx="0" cy="0"/>
+        </a:xfrm>
+      </p:grpSpPr>
+      <p:sp>
+        <p:nvSpPr>
+          <p:cNvPr id="2" name="Slide Image Placeholder 1"/>
+          <p:cNvSpPr>
+            <a:spLocks noGrp="1"/>
+          </p:cNvSpPr>
+          <p:nvPr>
+            <p:ph type="sldImg" idx="2"/>
+          </p:nvPr>
+        </p:nvSpPr>
+        <p:spPr/>
+      </p:sp>
+      <p:sp>
+        <p:nvSpPr>
+          <p:cNvPr id="3" name="Notes Placeholder 2"/>
+          <p:cNvSpPr>
+            <a:spLocks noGrp="1"/>
+          </p:cNvSpPr>
+          <p:nvPr>
+            <p:ph type="body" idx="3" sz="quarter"/>
+          </p:nvPr>
+        </p:nvSpPr>
+        <p:spPr/>
+        <p:txBody>
+          <a:bodyPr/>
+          <a:lstStyle/>
+          <a:p>
+            <a:r>
+              <a:t>🎨 GÖRSELLEŞTİRME ÖNERİLERİ:</a:t>
+            </a:r>
+          </a:p>
+          <a:p/>
+          <a:p>
+            <a:r>
+              <a:t>📸 Görsel: CPU, RAM ve anakart fotoğrafları</a:t>
+            </a:r>
+          </a:p>
+          <a:p>
+            <a:r>
+              <a:t>🎬 Video: Bilgisayar donanımı tanıtım videosu (1-2 dk)</a:t>
+            </a:r>
+          </a:p>
+          <a:p>
+            <a:r>
+              <a:t>💡 İnfografik: Bilgisayar bileşenleri şeması</a:t>
+            </a:r>
+          </a:p>
+          <a:p>
+            <a:r>
+              <a:t>📸 Görsel: Scratch arayüzü ekran görüntüsü</a:t>
+            </a:r>
+          </a:p>
+          <a:p>
+            <a:r>
+              <a:t>🎬 Video: Scratch ile basit oyun yapımı (3-5 dk)</a:t>
+            </a:r>
+          </a:p>
+          <a:p>
+            <a:r>
+              <a:t>💡 Ekran kaydı: Adım adım Scratch projesi</a:t>
+            </a:r>
+          </a:p>
+        </p:txBody>
+      </p:sp>
+      <p:sp>
+        <p:nvSpPr>
+          <p:cNvPr id="4" name="Slide Number Placeholder 3"/>
+          <p:cNvSpPr>
+            <a:spLocks noGrp="1"/>
+          </p:cNvSpPr>
+          <p:nvPr>
+            <p:ph type="sldNum" idx="5" sz="quarter"/>
+          </p:nvPr>
+        </p:nvSpPr>
+        <p:spPr/>
+      </p:sp>
+    </p:spTree>
+  </p:cSld>
+  <p:clrMapOvr>
+    <a:masterClrMapping/>
+  </p:clrMapOvr>
+</p:notes>
+</file>
+
+<file path=ppt/notesSlides/notesSlide29.xml><?xml version="1.0" encoding="utf-8"?>
+<p:notes xmlns:a="http://schemas.openxmlformats.org/drawingml/2006/main" xmlns:p="http://schemas.openxmlformats.org/presentationml/2006/main" xmlns:r="http://schemas.openxmlformats.org/officeDocument/2006/relationships">
+  <p:cSld>
+    <p:spTree>
+      <p:nvGrpSpPr>
+        <p:cNvPr id="1" name=""/>
+        <p:cNvGrpSpPr/>
+        <p:nvPr/>
+      </p:nvGrpSpPr>
+      <p:grpSpPr>
+        <a:xfrm>
+          <a:off x="0" y="0"/>
+          <a:ext cx="0" cy="0"/>
+          <a:chOff x="0" y="0"/>
+          <a:chExt cx="0" cy="0"/>
+        </a:xfrm>
+      </p:grpSpPr>
+      <p:sp>
+        <p:nvSpPr>
+          <p:cNvPr id="2" name="Slide Image Placeholder 1"/>
+          <p:cNvSpPr>
+            <a:spLocks noGrp="1"/>
+          </p:cNvSpPr>
+          <p:nvPr>
+            <p:ph type="sldImg" idx="2"/>
+          </p:nvPr>
+        </p:nvSpPr>
+        <p:spPr/>
+      </p:sp>
+      <p:sp>
+        <p:nvSpPr>
+          <p:cNvPr id="3" name="Notes Placeholder 2"/>
+          <p:cNvSpPr>
+            <a:spLocks noGrp="1"/>
+          </p:cNvSpPr>
+          <p:nvPr>
+            <p:ph type="body" idx="3" sz="quarter"/>
+          </p:nvPr>
+        </p:nvSpPr>
+        <p:spPr/>
+        <p:txBody>
+          <a:bodyPr/>
+          <a:lstStyle/>
+          <a:p>
+            <a:r>
+              <a:t>🎨 GÖRSELLEŞTİRME ÖNERİLERİ:</a:t>
+            </a:r>
+          </a:p>
+          <a:p/>
+          <a:p>
+            <a:r>
+              <a:t>📸 Görsel: CPU, RAM ve anakart fotoğrafları</a:t>
+            </a:r>
+          </a:p>
+          <a:p>
+            <a:r>
+              <a:t>🎬 Video: Bilgisayar donanımı tanıtım videosu (1-2 dk)</a:t>
+            </a:r>
+          </a:p>
+          <a:p>
+            <a:r>
+              <a:t>💡 İnfografik: Bilgisayar bileşenleri şeması</a:t>
+            </a:r>
+          </a:p>
+          <a:p>
+            <a:r>
+              <a:t>📸 Görsel: LAN ve WAN ağ topolojileri şeması</a:t>
+            </a:r>
+          </a:p>
+          <a:p>
+            <a:r>
+              <a:t>🎬 Video: İnternet nasıl çalışır? Animasyonlu anlatım</a:t>
+            </a:r>
+          </a:p>
+          <a:p>
+            <a:r>
+              <a:t>💡 İnfografik: Ev ağı kurulumu diyagramı</a:t>
+            </a:r>
+          </a:p>
         </p:txBody>
       </p:sp>
       <p:sp>
@@ -1933,6 +3445,58 @@
               <a:t>Gösterim: Scratch'i açın, her bölümü gösterin. Öğrencilere hesap açtırın.</a:t>
             </a:r>
           </a:p>
+          <a:p/>
+          <a:p>
+            <a:r>
+              <a:t>🎨 GÖRSELLEŞTİRME ÖNERİLERİ:</a:t>
+            </a:r>
+          </a:p>
+          <a:p/>
+          <a:p>
+            <a:r>
+              <a:t>📸 Görsel: CPU, RAM ve anakart fotoğrafları</a:t>
+            </a:r>
+          </a:p>
+          <a:p>
+            <a:r>
+              <a:t>🎬 Video: Bilgisayar donanımı tanıtım videosu (1-2 dk)</a:t>
+            </a:r>
+          </a:p>
+          <a:p>
+            <a:r>
+              <a:t>💡 İnfografik: Bilgisayar bileşenleri şeması</a:t>
+            </a:r>
+          </a:p>
+          <a:p>
+            <a:r>
+              <a:t>📸 Görsel: LAN ve WAN ağ topolojileri şeması</a:t>
+            </a:r>
+          </a:p>
+          <a:p>
+            <a:r>
+              <a:t>🎬 Video: İnternet nasıl çalışır? Animasyonlu anlatım</a:t>
+            </a:r>
+          </a:p>
+          <a:p>
+            <a:r>
+              <a:t>💡 İnfografik: Ev ağı kurulumu diyagramı</a:t>
+            </a:r>
+          </a:p>
+          <a:p>
+            <a:r>
+              <a:t>📸 Görsel: Scratch arayüzü ekran görüntüsü</a:t>
+            </a:r>
+          </a:p>
+          <a:p>
+            <a:r>
+              <a:t>🎬 Video: Scratch ile basit oyun yapımı (3-5 dk)</a:t>
+            </a:r>
+          </a:p>
+          <a:p>
+            <a:r>
+              <a:t>💡 Ekran kaydı: Adım adım Scratch projesi</a:t>
+            </a:r>
+          </a:p>
         </p:txBody>
       </p:sp>
       <p:sp>
@@ -2003,6 +3567,103 @@
               <a:t>Etkinlik: Her blok kategorisinden birkaç tane gösterin</a:t>
             </a:r>
           </a:p>
+          <a:p/>
+          <a:p>
+            <a:r>
+              <a:t>🎨 GÖRSELLEŞTİRME ÖNERİLERİ:</a:t>
+            </a:r>
+          </a:p>
+          <a:p/>
+          <a:p>
+            <a:r>
+              <a:t>📸 Görsel: LAN ve WAN ağ topolojileri şeması</a:t>
+            </a:r>
+          </a:p>
+          <a:p>
+            <a:r>
+              <a:t>🎬 Video: İnternet nasıl çalışır? Animasyonlu anlatım</a:t>
+            </a:r>
+          </a:p>
+          <a:p>
+            <a:r>
+              <a:t>💡 İnfografik: Ev ağı kurulumu diyagramı</a:t>
+            </a:r>
+          </a:p>
+          <a:p>
+            <a:r>
+              <a:t>📸 Görsel: Scratch arayüzü ekran görüntüsü</a:t>
+            </a:r>
+          </a:p>
+          <a:p>
+            <a:r>
+              <a:t>🎬 Video: Scratch ile basit oyun yapımı (3-5 dk)</a:t>
+            </a:r>
+          </a:p>
+          <a:p>
+            <a:r>
+              <a:t>💡 Ekran kaydı: Adım adım Scratch projesi</a:t>
+            </a:r>
+          </a:p>
+          <a:p>
+            <a:r>
+              <a:t>📸 Görsel: Döngü mantığı şeması</a:t>
+            </a:r>
+          </a:p>
+          <a:p>
+            <a:r>
+              <a:t>🎬 Video: Döngüler Scratch'te nasıl kullanılır?</a:t>
+            </a:r>
+          </a:p>
+          <a:p>
+            <a:r>
+              <a:t>📸 Görsel: Koşullu yapılar akış diyagramı</a:t>
+            </a:r>
+          </a:p>
+          <a:p>
+            <a:r>
+              <a:t>🎬 Video: Koşullu ifadeler Scratch'te</a:t>
+            </a:r>
+          </a:p>
+          <a:p>
+            <a:r>
+              <a:t>📸 Görsel: Değişken kavramı görselleştirmesi</a:t>
+            </a:r>
+          </a:p>
+          <a:p>
+            <a:r>
+              <a:t>🎬 Video: Scratch'te değişken kullanımı</a:t>
+            </a:r>
+          </a:p>
+          <a:p>
+            <a:r>
+              <a:t>📸 Görsel: Farklı grafik türleri örnekleri</a:t>
+            </a:r>
+          </a:p>
+          <a:p>
+            <a:r>
+              <a:t>🎬 Video: Veri görselleştirme önemi</a:t>
+            </a:r>
+          </a:p>
+          <a:p>
+            <a:r>
+              <a:t>💡 İnfografik: Grafik türleri ve kullanım alanları</a:t>
+            </a:r>
+          </a:p>
+          <a:p>
+            <a:r>
+              <a:t>📸 Görsel: Temel tasarım prensipleri</a:t>
+            </a:r>
+          </a:p>
+          <a:p>
+            <a:r>
+              <a:t>🎬 Video: Dijital tasarıma giriş</a:t>
+            </a:r>
+          </a:p>
+          <a:p>
+            <a:r>
+              <a:t>💡 İnfografik: Renk teorisi ve uyumu</a:t>
+            </a:r>
+          </a:p>
         </p:txBody>
       </p:sp>
       <p:sp>
@@ -2073,6 +3734,28 @@
               <a:t>Gösterim: Sprite ekleme, silme, düzenleme işlemlerini gösterin</a:t>
             </a:r>
           </a:p>
+          <a:p/>
+          <a:p>
+            <a:r>
+              <a:t>🎨 GÖRSELLEŞTİRME ÖNERİLERİ:</a:t>
+            </a:r>
+          </a:p>
+          <a:p/>
+          <a:p>
+            <a:r>
+              <a:t>📸 Görsel: LAN ve WAN ağ topolojileri şeması</a:t>
+            </a:r>
+          </a:p>
+          <a:p>
+            <a:r>
+              <a:t>🎬 Video: İnternet nasıl çalışır? Animasyonlu anlatım</a:t>
+            </a:r>
+          </a:p>
+          <a:p>
+            <a:r>
+              <a:t>💡 İnfografik: Ev ağı kurulumu diyagramı</a:t>
+            </a:r>
+          </a:p>
         </p:txBody>
       </p:sp>
       <p:sp>
@@ -2143,6 +3826,93 @@
               <a:t>Etkinlik: Öğrencilere kare çizdirin. Sonra üçgen çizmeyi deneyin.</a:t>
             </a:r>
           </a:p>
+          <a:p/>
+          <a:p>
+            <a:r>
+              <a:t>🎨 GÖRSELLEŞTİRME ÖNERİLERİ:</a:t>
+            </a:r>
+          </a:p>
+          <a:p/>
+          <a:p>
+            <a:r>
+              <a:t>📸 Görsel: CPU, RAM ve anakart fotoğrafları</a:t>
+            </a:r>
+          </a:p>
+          <a:p>
+            <a:r>
+              <a:t>🎬 Video: Bilgisayar donanımı tanıtım videosu (1-2 dk)</a:t>
+            </a:r>
+          </a:p>
+          <a:p>
+            <a:r>
+              <a:t>💡 İnfografik: Bilgisayar bileşenleri şeması</a:t>
+            </a:r>
+          </a:p>
+          <a:p>
+            <a:r>
+              <a:t>📸 Görsel: Çeşitli giriş aygıtları (klavye, fare, mikrofon, kamera)</a:t>
+            </a:r>
+          </a:p>
+          <a:p>
+            <a:r>
+              <a:t>🎬 Video: Giriş aygıtlarının nasıl çalıştığını gösteren animasyon</a:t>
+            </a:r>
+          </a:p>
+          <a:p>
+            <a:r>
+              <a:t>📸 Görsel: LAN ve WAN ağ topolojileri şeması</a:t>
+            </a:r>
+          </a:p>
+          <a:p>
+            <a:r>
+              <a:t>🎬 Video: İnternet nasıl çalışır? Animasyonlu anlatım</a:t>
+            </a:r>
+          </a:p>
+          <a:p>
+            <a:r>
+              <a:t>💡 İnfografik: Ev ağı kurulumu diyagramı</a:t>
+            </a:r>
+          </a:p>
+          <a:p>
+            <a:r>
+              <a:t>📸 Görsel: Scratch arayüzü ekran görüntüsü</a:t>
+            </a:r>
+          </a:p>
+          <a:p>
+            <a:r>
+              <a:t>🎬 Video: Scratch ile basit oyun yapımı (3-5 dk)</a:t>
+            </a:r>
+          </a:p>
+          <a:p>
+            <a:r>
+              <a:t>💡 Ekran kaydı: Adım adım Scratch projesi</a:t>
+            </a:r>
+          </a:p>
+          <a:p>
+            <a:r>
+              <a:t>📸 Görsel: Akış şeması örnekleri</a:t>
+            </a:r>
+          </a:p>
+          <a:p>
+            <a:r>
+              <a:t>🎬 Video: Algoritma nedir? Günlük hayattan örnekler</a:t>
+            </a:r>
+          </a:p>
+          <a:p>
+            <a:r>
+              <a:t>💡 İnfografik: Akış şeması sembolleri</a:t>
+            </a:r>
+          </a:p>
+          <a:p>
+            <a:r>
+              <a:t>📸 Görsel: Döngü mantığı şeması</a:t>
+            </a:r>
+          </a:p>
+          <a:p>
+            <a:r>
+              <a:t>🎬 Video: Döngüler Scratch'te nasıl kullanılır?</a:t>
+            </a:r>
+          </a:p>
         </p:txBody>
       </p:sp>
       <p:sp>
@@ -2213,6 +3983,73 @@
               <a:t>Gösterim: Konuşma balonu, kostüm değiştirme gösterin</a:t>
             </a:r>
           </a:p>
+          <a:p/>
+          <a:p>
+            <a:r>
+              <a:t>🎨 GÖRSELLEŞTİRME ÖNERİLERİ:</a:t>
+            </a:r>
+          </a:p>
+          <a:p/>
+          <a:p>
+            <a:r>
+              <a:t>📸 Görsel: LAN ve WAN ağ topolojileri şeması</a:t>
+            </a:r>
+          </a:p>
+          <a:p>
+            <a:r>
+              <a:t>🎬 Video: İnternet nasıl çalışır? Animasyonlu anlatım</a:t>
+            </a:r>
+          </a:p>
+          <a:p>
+            <a:r>
+              <a:t>💡 İnfografik: Ev ağı kurulumu diyagramı</a:t>
+            </a:r>
+          </a:p>
+          <a:p>
+            <a:r>
+              <a:t>📸 Görsel: Scratch arayüzü ekran görüntüsü</a:t>
+            </a:r>
+          </a:p>
+          <a:p>
+            <a:r>
+              <a:t>🎬 Video: Scratch ile basit oyun yapımı (3-5 dk)</a:t>
+            </a:r>
+          </a:p>
+          <a:p>
+            <a:r>
+              <a:t>💡 Ekran kaydı: Adım adım Scratch projesi</a:t>
+            </a:r>
+          </a:p>
+          <a:p>
+            <a:r>
+              <a:t>📸 Görsel: Farklı grafik türleri örnekleri</a:t>
+            </a:r>
+          </a:p>
+          <a:p>
+            <a:r>
+              <a:t>🎬 Video: Veri görselleştirme önemi</a:t>
+            </a:r>
+          </a:p>
+          <a:p>
+            <a:r>
+              <a:t>💡 İnfografik: Grafik türleri ve kullanım alanları</a:t>
+            </a:r>
+          </a:p>
+          <a:p>
+            <a:r>
+              <a:t>📸 Görsel: Temel tasarım prensipleri</a:t>
+            </a:r>
+          </a:p>
+          <a:p>
+            <a:r>
+              <a:t>🎬 Video: Dijital tasarıma giriş</a:t>
+            </a:r>
+          </a:p>
+          <a:p>
+            <a:r>
+              <a:t>💡 İnfografik: Renk teorisi ve uyumu</a:t>
+            </a:r>
+          </a:p>
         </p:txBody>
       </p:sp>
       <p:sp>
@@ -2283,6 +4120,53 @@
               <a:t>Gösterim: Ses ekleme ve çalma</a:t>
             </a:r>
           </a:p>
+          <a:p/>
+          <a:p>
+            <a:r>
+              <a:t>🎨 GÖRSELLEŞTİRME ÖNERİLERİ:</a:t>
+            </a:r>
+          </a:p>
+          <a:p/>
+          <a:p>
+            <a:r>
+              <a:t>📸 Görsel: LAN ve WAN ağ topolojileri şeması</a:t>
+            </a:r>
+          </a:p>
+          <a:p>
+            <a:r>
+              <a:t>🎬 Video: İnternet nasıl çalışır? Animasyonlu anlatım</a:t>
+            </a:r>
+          </a:p>
+          <a:p>
+            <a:r>
+              <a:t>💡 İnfografik: Ev ağı kurulumu diyagramı</a:t>
+            </a:r>
+          </a:p>
+          <a:p>
+            <a:r>
+              <a:t>📸 Görsel: Scratch arayüzü ekran görüntüsü</a:t>
+            </a:r>
+          </a:p>
+          <a:p>
+            <a:r>
+              <a:t>🎬 Video: Scratch ile basit oyun yapımı (3-5 dk)</a:t>
+            </a:r>
+          </a:p>
+          <a:p>
+            <a:r>
+              <a:t>💡 Ekran kaydı: Adım adım Scratch projesi</a:t>
+            </a:r>
+          </a:p>
+          <a:p>
+            <a:r>
+              <a:t>📸 Görsel: Döngü mantığı şeması</a:t>
+            </a:r>
+          </a:p>
+          <a:p>
+            <a:r>
+              <a:t>🎬 Video: Döngüler Scratch'te nasıl kullanılır?</a:t>
+            </a:r>
+          </a:p>
         </p:txBody>
       </p:sp>
       <p:sp>
@@ -2351,6 +4235,83 @@
           <a:p>
             <a:r>
               <a:t>Etkinlik: Ok tuşları ile kedi hareket ettirin</a:t>
+            </a:r>
+          </a:p>
+          <a:p/>
+          <a:p>
+            <a:r>
+              <a:t>🎨 GÖRSELLEŞTİRME ÖNERİLERİ:</a:t>
+            </a:r>
+          </a:p>
+          <a:p/>
+          <a:p>
+            <a:r>
+              <a:t>📸 Görsel: CPU, RAM ve anakart fotoğrafları</a:t>
+            </a:r>
+          </a:p>
+          <a:p>
+            <a:r>
+              <a:t>🎬 Video: Bilgisayar donanımı tanıtım videosu (1-2 dk)</a:t>
+            </a:r>
+          </a:p>
+          <a:p>
+            <a:r>
+              <a:t>💡 İnfografik: Bilgisayar bileşenleri şeması</a:t>
+            </a:r>
+          </a:p>
+          <a:p>
+            <a:r>
+              <a:t>📸 Görsel: Çeşitli giriş aygıtları (klavye, fare, mikrofon, kamera)</a:t>
+            </a:r>
+          </a:p>
+          <a:p>
+            <a:r>
+              <a:t>🎬 Video: Giriş aygıtlarının nasıl çalıştığını gösteren animasyon</a:t>
+            </a:r>
+          </a:p>
+          <a:p>
+            <a:r>
+              <a:t>📸 Görsel: LAN ve WAN ağ topolojileri şeması</a:t>
+            </a:r>
+          </a:p>
+          <a:p>
+            <a:r>
+              <a:t>🎬 Video: İnternet nasıl çalışır? Animasyonlu anlatım</a:t>
+            </a:r>
+          </a:p>
+          <a:p>
+            <a:r>
+              <a:t>💡 İnfografik: Ev ağı kurulumu diyagramı</a:t>
+            </a:r>
+          </a:p>
+          <a:p>
+            <a:r>
+              <a:t>📸 Görsel: Scratch arayüzü ekran görüntüsü</a:t>
+            </a:r>
+          </a:p>
+          <a:p>
+            <a:r>
+              <a:t>🎬 Video: Scratch ile basit oyun yapımı (3-5 dk)</a:t>
+            </a:r>
+          </a:p>
+          <a:p>
+            <a:r>
+              <a:t>💡 Ekran kaydı: Adım adım Scratch projesi</a:t>
+            </a:r>
+          </a:p>
+          <a:p>
+            <a:r>
+              <a:t>📸 Görsel: Akış şeması örnekleri</a:t>
+            </a:r>
+          </a:p>
+          <a:p>
+            <a:r>
+              <a:t>🎬 Video: Algoritma nedir? Günlük hayattan örnekler</a:t>
+            </a:r>
+          </a:p>
+          <a:p>
+            <a:r>
+              <a:t>💡 İnfografik: Akış şeması sembolleri</a:t>
             </a:r>
           </a:p>
         </p:txBody>
@@ -5527,6 +7488,7 @@
               <a:defRPr sz="1900"/>
             </a:pPr>
             <a:r>
+              <a:rPr sz="1400"/>
               <a:t>Program ne zaman başlasın? Olaylar belirler!</a:t>
             </a:r>
           </a:p>
@@ -5546,6 +7508,7 @@
               <a:defRPr sz="1900" b="1"/>
             </a:pPr>
             <a:r>
+              <a:rPr sz="1400"/>
               <a:t>✅ Olay Blokları:</a:t>
             </a:r>
           </a:p>
@@ -5565,6 +7528,7 @@
               <a:defRPr sz="1900"/>
             </a:pPr>
             <a:r>
+              <a:rPr sz="1400"/>
               <a:t>🔹 'Yeşil bayrak tıklandığında':</a:t>
             </a:r>
           </a:p>
@@ -5576,6 +7540,7 @@
               <a:defRPr sz="1700"/>
             </a:pPr>
             <a:r>
+              <a:rPr sz="1400"/>
               <a:t>    • Program başlangıcı (en önemli!)</a:t>
             </a:r>
           </a:p>
@@ -5595,6 +7560,7 @@
               <a:defRPr sz="1900"/>
             </a:pPr>
             <a:r>
+              <a:rPr sz="1400"/>
               <a:t>🔹 '[Boşluk] tuşuna basıldığında':</a:t>
             </a:r>
           </a:p>
@@ -5606,6 +7572,7 @@
               <a:defRPr sz="1700"/>
             </a:pPr>
             <a:r>
+              <a:rPr sz="1400"/>
               <a:t>    • Klavye kontrolü</a:t>
             </a:r>
           </a:p>
@@ -5625,6 +7592,7 @@
               <a:defRPr sz="1900"/>
             </a:pPr>
             <a:r>
+              <a:rPr sz="1400"/>
               <a:t>🔹 'Bu sprite tıklandığında':</a:t>
             </a:r>
           </a:p>
@@ -5636,6 +7604,7 @@
               <a:defRPr sz="1700"/>
             </a:pPr>
             <a:r>
+              <a:rPr sz="1400"/>
               <a:t>    • Fare tıklama</a:t>
             </a:r>
           </a:p>
@@ -5655,6 +7624,7 @@
               <a:defRPr sz="1900"/>
             </a:pPr>
             <a:r>
+              <a:rPr sz="1400"/>
               <a:t>🔹 'Sahne ... olduğunda':</a:t>
             </a:r>
           </a:p>
@@ -5666,6 +7636,7 @@
               <a:defRPr sz="1700"/>
             </a:pPr>
             <a:r>
+              <a:rPr sz="1400"/>
               <a:t>    • Arka plan değişimi</a:t>
             </a:r>
           </a:p>
@@ -5685,6 +7656,7 @@
               <a:defRPr sz="1900"/>
             </a:pPr>
             <a:r>
+              <a:rPr sz="1400"/>
               <a:t>🔹 'Ses &gt; 10 olduğunda':</a:t>
             </a:r>
           </a:p>
@@ -5696,6 +7668,7 @@
               <a:defRPr sz="1700"/>
             </a:pPr>
             <a:r>
+              <a:rPr sz="1400"/>
               <a:t>    • Mikrofon algılama</a:t>
             </a:r>
           </a:p>
@@ -5715,6 +7688,7 @@
               <a:defRPr sz="1900" b="1"/>
             </a:pPr>
             <a:r>
+              <a:rPr sz="1400"/>
               <a:t>📌 Örnek: Tuş Kontrollü Hareket</a:t>
             </a:r>
           </a:p>
@@ -5726,6 +7700,7 @@
               <a:defRPr sz="1900"/>
             </a:pPr>
             <a:r>
+              <a:rPr sz="1400"/>
               <a:t>[Sağ ok tuşuna basıldığında]</a:t>
             </a:r>
           </a:p>
@@ -5737,6 +7712,7 @@
               <a:defRPr sz="1900"/>
             </a:pPr>
             <a:r>
+              <a:rPr sz="1400"/>
               <a:t>[10 adım git]</a:t>
             </a:r>
           </a:p>
@@ -5756,6 +7732,7 @@
               <a:defRPr sz="1900"/>
             </a:pPr>
             <a:r>
+              <a:rPr sz="1400"/>
               <a:t>[Sol ok tuşuna basıldığında]</a:t>
             </a:r>
           </a:p>
@@ -5767,6 +7744,7 @@
               <a:defRPr sz="1900"/>
             </a:pPr>
             <a:r>
+              <a:rPr sz="1400"/>
               <a:t>[-10 adım git]</a:t>
             </a:r>
           </a:p>
@@ -5786,6 +7764,7 @@
               <a:defRPr sz="1900" b="1"/>
             </a:pPr>
             <a:r>
+              <a:rPr sz="1400"/>
               <a:t>💡 Bir sprite'ta birden fazla olay olabilir!</a:t>
             </a:r>
           </a:p>
@@ -5797,6 +7776,7 @@
               <a:defRPr sz="1900"/>
             </a:pPr>
             <a:r>
+              <a:rPr sz="1400"/>
               <a:t>Her olay farklı komutlar çalıştırır.</a:t>
             </a:r>
           </a:p>
@@ -5895,6 +7875,7 @@
               <a:defRPr sz="1900"/>
             </a:pPr>
             <a:r>
+              <a:rPr sz="1400"/>
               <a:t>Aynı işi tekrar tekrar yapmak için döngüler!</a:t>
             </a:r>
           </a:p>
@@ -5914,6 +7895,7 @@
               <a:defRPr sz="1900" b="1"/>
             </a:pPr>
             <a:r>
+              <a:rPr sz="1400"/>
               <a:t>✅ Döngü Türleri:</a:t>
             </a:r>
           </a:p>
@@ -5933,6 +7915,7 @@
               <a:defRPr sz="1900"/>
             </a:pPr>
             <a:r>
+              <a:rPr sz="1400"/>
               <a:t>🔹 '[10] kez tekrarla':</a:t>
             </a:r>
           </a:p>
@@ -5944,6 +7927,7 @@
               <a:defRPr sz="1700"/>
             </a:pPr>
             <a:r>
+              <a:rPr sz="1400"/>
               <a:t>    • Belirli sayıda tekrar</a:t>
             </a:r>
           </a:p>
@@ -5963,6 +7947,7 @@
               <a:defRPr sz="1900"/>
             </a:pPr>
             <a:r>
+              <a:rPr sz="1400"/>
               <a:t>🔹 'Sürekli tekrarla (Forever)':</a:t>
             </a:r>
           </a:p>
@@ -5974,6 +7959,7 @@
               <a:defRPr sz="1700"/>
             </a:pPr>
             <a:r>
+              <a:rPr sz="1400"/>
               <a:t>    • Sonsuza kadar tekrar</a:t>
             </a:r>
           </a:p>
@@ -5993,6 +7979,7 @@
               <a:defRPr sz="1900"/>
             </a:pPr>
             <a:r>
+              <a:rPr sz="1400"/>
               <a:t>🔹 '... olana kadar tekrarla':</a:t>
             </a:r>
           </a:p>
@@ -6004,6 +7991,7 @@
               <a:defRPr sz="1700"/>
             </a:pPr>
             <a:r>
+              <a:rPr sz="1400"/>
               <a:t>    • Koşul sağlanana kadar</a:t>
             </a:r>
           </a:p>
@@ -6023,6 +8011,7 @@
               <a:defRPr sz="1900" b="1"/>
             </a:pPr>
             <a:r>
+              <a:rPr sz="1400"/>
               <a:t>📌 Örnek 1: Kare Çizme</a:t>
             </a:r>
           </a:p>
@@ -6034,6 +8023,7 @@
               <a:defRPr sz="1900"/>
             </a:pPr>
             <a:r>
+              <a:rPr sz="1400"/>
               <a:t>[4 kez tekrarla]</a:t>
             </a:r>
           </a:p>
@@ -6045,6 +8035,7 @@
               <a:defRPr sz="1700"/>
             </a:pPr>
             <a:r>
+              <a:rPr sz="1400"/>
               <a:t>    [100 adım git]</a:t>
             </a:r>
           </a:p>
@@ -6056,6 +8047,7 @@
               <a:defRPr sz="1700"/>
             </a:pPr>
             <a:r>
+              <a:rPr sz="1400"/>
               <a:t>    [90 derece sağa dön]</a:t>
             </a:r>
           </a:p>
@@ -6075,6 +8067,7 @@
               <a:defRPr sz="1900" b="1"/>
             </a:pPr>
             <a:r>
+              <a:rPr sz="1400"/>
               <a:t>📌 Örnek 2: Sürekli Hareket</a:t>
             </a:r>
           </a:p>
@@ -6086,6 +8079,7 @@
               <a:defRPr sz="1900"/>
             </a:pPr>
             <a:r>
+              <a:rPr sz="1400"/>
               <a:t>[Sürekli tekrarla]</a:t>
             </a:r>
           </a:p>
@@ -6097,6 +8091,7 @@
               <a:defRPr sz="1700"/>
             </a:pPr>
             <a:r>
+              <a:rPr sz="1400"/>
               <a:t>    [10 adım git]</a:t>
             </a:r>
           </a:p>
@@ -6108,6 +8103,7 @@
               <a:defRPr sz="1700"/>
             </a:pPr>
             <a:r>
+              <a:rPr sz="1400"/>
               <a:t>    [Kenara değdiyse, sek]</a:t>
             </a:r>
           </a:p>
@@ -6127,6 +8123,7 @@
               <a:defRPr sz="1900" b="1"/>
             </a:pPr>
             <a:r>
+              <a:rPr sz="1400"/>
               <a:t>💡 Döngüler sayesinde:</a:t>
             </a:r>
           </a:p>
@@ -6138,6 +8135,7 @@
               <a:defRPr sz="1700"/>
             </a:pPr>
             <a:r>
+              <a:rPr sz="1400"/>
               <a:t>    • Kod kısalır</a:t>
             </a:r>
           </a:p>
@@ -6149,6 +8147,7 @@
               <a:defRPr sz="1700"/>
             </a:pPr>
             <a:r>
+              <a:rPr sz="1400"/>
               <a:t>    • Daha az blok kullanırsın</a:t>
             </a:r>
           </a:p>
@@ -6160,6 +8159,7 @@
               <a:defRPr sz="1700"/>
             </a:pPr>
             <a:r>
+              <a:rPr sz="1400"/>
               <a:t>    • Programlama daha kolay!</a:t>
             </a:r>
           </a:p>
@@ -6179,6 +8179,7 @@
               <a:defRPr sz="1900" b="1"/>
             </a:pPr>
             <a:r>
+              <a:rPr sz="1400"/>
               <a:t>⚡ Döngüsüz programlama = Çok uzun kod!</a:t>
             </a:r>
           </a:p>
@@ -6277,6 +8278,7 @@
               <a:defRPr sz="1900"/>
             </a:pPr>
             <a:r>
+              <a:rPr sz="1400"/>
               <a:t>Koşul = 'Eğer ... ise, ... yap'</a:t>
             </a:r>
           </a:p>
@@ -6296,6 +8298,7 @@
               <a:defRPr sz="1900" b="1"/>
             </a:pPr>
             <a:r>
+              <a:rPr sz="1400"/>
               <a:t>✅ Koşul Blokları:</a:t>
             </a:r>
           </a:p>
@@ -6315,6 +8318,7 @@
               <a:defRPr sz="1900"/>
             </a:pPr>
             <a:r>
+              <a:rPr sz="1400"/>
               <a:t>🔹 'Eğer ... ise':</a:t>
             </a:r>
           </a:p>
@@ -6326,6 +8330,7 @@
               <a:defRPr sz="1700"/>
             </a:pPr>
             <a:r>
+              <a:rPr sz="1400"/>
               <a:t>    • Tek koşul</a:t>
             </a:r>
           </a:p>
@@ -6345,6 +8350,7 @@
               <a:defRPr sz="1900"/>
             </a:pPr>
             <a:r>
+              <a:rPr sz="1400"/>
               <a:t>🔹 'Eğer ... ise ... değilse':</a:t>
             </a:r>
           </a:p>
@@ -6356,6 +8362,7 @@
               <a:defRPr sz="1700"/>
             </a:pPr>
             <a:r>
+              <a:rPr sz="1400"/>
               <a:t>    • İki seçenek</a:t>
             </a:r>
           </a:p>
@@ -6375,6 +8382,7 @@
               <a:defRPr sz="1900"/>
             </a:pPr>
             <a:r>
+              <a:rPr sz="1400"/>
               <a:t>🔹 '... olana kadar bekle':</a:t>
             </a:r>
           </a:p>
@@ -6386,6 +8394,7 @@
               <a:defRPr sz="1700"/>
             </a:pPr>
             <a:r>
+              <a:rPr sz="1400"/>
               <a:t>    • Koşul sağlanana kadar dur</a:t>
             </a:r>
           </a:p>
@@ -6405,6 +8414,7 @@
               <a:defRPr sz="1900" b="1"/>
             </a:pPr>
             <a:r>
+              <a:rPr sz="1400"/>
               <a:t>📌 Örnek 1: Kenara Çarparsa Dön</a:t>
             </a:r>
           </a:p>
@@ -6416,6 +8426,7 @@
               <a:defRPr sz="1900"/>
             </a:pPr>
             <a:r>
+              <a:rPr sz="1400"/>
               <a:t>[Eğer kenara değiyor ise]</a:t>
             </a:r>
           </a:p>
@@ -6427,6 +8438,7 @@
               <a:defRPr sz="1700"/>
             </a:pPr>
             <a:r>
+              <a:rPr sz="1400"/>
               <a:t>    [180 derece dön]</a:t>
             </a:r>
           </a:p>
@@ -6446,6 +8458,7 @@
               <a:defRPr sz="1900" b="1"/>
             </a:pPr>
             <a:r>
+              <a:rPr sz="1400"/>
               <a:t>📌 Örnek 2: Fare Kontrolü</a:t>
             </a:r>
           </a:p>
@@ -6457,6 +8470,7 @@
               <a:defRPr sz="1900"/>
             </a:pPr>
             <a:r>
+              <a:rPr sz="1400"/>
               <a:t>[Eğer mouse işaretçisine değiyor ise]</a:t>
             </a:r>
           </a:p>
@@ -6468,6 +8482,7 @@
               <a:defRPr sz="1700"/>
             </a:pPr>
             <a:r>
+              <a:rPr sz="1400"/>
               <a:t>    [Merhaba! de]</a:t>
             </a:r>
           </a:p>
@@ -6479,6 +8494,7 @@
               <a:defRPr sz="1900"/>
             </a:pPr>
             <a:r>
+              <a:rPr sz="1400"/>
               <a:t>[Değilse]</a:t>
             </a:r>
           </a:p>
@@ -6490,6 +8506,7 @@
               <a:defRPr sz="1700"/>
             </a:pPr>
             <a:r>
+              <a:rPr sz="1400"/>
               <a:t>    [Gizle]</a:t>
             </a:r>
           </a:p>
@@ -6509,6 +8526,7 @@
               <a:defRPr sz="1900" b="1"/>
             </a:pPr>
             <a:r>
+              <a:rPr sz="1400"/>
               <a:t>📌 Örnek 3: Renk Değiştir</a:t>
             </a:r>
           </a:p>
@@ -6520,6 +8538,7 @@
               <a:defRPr sz="1900"/>
             </a:pPr>
             <a:r>
+              <a:rPr sz="1400"/>
               <a:t>[Eğer [Boşluk] tuşuna basılı ise]</a:t>
             </a:r>
           </a:p>
@@ -6531,6 +8550,7 @@
               <a:defRPr sz="1700"/>
             </a:pPr>
             <a:r>
+              <a:rPr sz="1400"/>
               <a:t>    [Renk efekti 25 değiştir]</a:t>
             </a:r>
           </a:p>
@@ -6550,6 +8570,7 @@
               <a:defRPr sz="1900" b="1"/>
             </a:pPr>
             <a:r>
+              <a:rPr sz="1400"/>
               <a:t>💡 Koşullar oyunları akıllı yapar!</a:t>
             </a:r>
           </a:p>
@@ -6561,6 +8582,7 @@
               <a:defRPr sz="1900"/>
             </a:pPr>
             <a:r>
+              <a:rPr sz="1400"/>
               <a:t>Oyun kendi karar verebilir.</a:t>
             </a:r>
           </a:p>
@@ -6659,6 +8681,7 @@
               <a:defRPr sz="1900"/>
             </a:pPr>
             <a:r>
+              <a:rPr sz="1400"/>
               <a:t>Değişken = Bilgi saklayan kutu</a:t>
             </a:r>
           </a:p>
@@ -6678,6 +8701,7 @@
               <a:defRPr sz="1900" b="1"/>
             </a:pPr>
             <a:r>
+              <a:rPr sz="1400"/>
               <a:t>✅ Değişken Nedir?</a:t>
             </a:r>
           </a:p>
@@ -6689,6 +8713,7 @@
               <a:defRPr sz="1700"/>
             </a:pPr>
             <a:r>
+              <a:rPr sz="1400"/>
               <a:t>    • Sayı saklar</a:t>
             </a:r>
           </a:p>
@@ -6700,6 +8725,7 @@
               <a:defRPr sz="1700"/>
             </a:pPr>
             <a:r>
+              <a:rPr sz="1400"/>
               <a:t>    • Metin saklar</a:t>
             </a:r>
           </a:p>
@@ -6711,6 +8737,7 @@
               <a:defRPr sz="1700"/>
             </a:pPr>
             <a:r>
+              <a:rPr sz="1400"/>
               <a:t>    • Değeri değişebilir</a:t>
             </a:r>
           </a:p>
@@ -6730,6 +8757,7 @@
               <a:defRPr sz="1900" b="1"/>
             </a:pPr>
             <a:r>
+              <a:rPr sz="1400"/>
               <a:t>✅ Değişken Blokları:</a:t>
             </a:r>
           </a:p>
@@ -6749,6 +8777,7 @@
               <a:defRPr sz="1900"/>
             </a:pPr>
             <a:r>
+              <a:rPr sz="1400"/>
               <a:t>🔹 'Değişken oluştur':</a:t>
             </a:r>
           </a:p>
@@ -6760,6 +8789,7 @@
               <a:defRPr sz="1700"/>
             </a:pPr>
             <a:r>
+              <a:rPr sz="1400"/>
               <a:t>    • Yeni değişken yap</a:t>
             </a:r>
           </a:p>
@@ -6779,6 +8809,7 @@
               <a:defRPr sz="1900"/>
             </a:pPr>
             <a:r>
+              <a:rPr sz="1400"/>
               <a:t>🔹 '[puan] değişkenini [0] yap':</a:t>
             </a:r>
           </a:p>
@@ -6790,6 +8821,7 @@
               <a:defRPr sz="1700"/>
             </a:pPr>
             <a:r>
+              <a:rPr sz="1400"/>
               <a:t>    • Başlangıç değeri</a:t>
             </a:r>
           </a:p>
@@ -6809,6 +8841,7 @@
               <a:defRPr sz="1900"/>
             </a:pPr>
             <a:r>
+              <a:rPr sz="1400"/>
               <a:t>🔹 '[puan] değişkenini [1] arttır':</a:t>
             </a:r>
           </a:p>
@@ -6820,6 +8853,7 @@
               <a:defRPr sz="1700"/>
             </a:pPr>
             <a:r>
+              <a:rPr sz="1400"/>
               <a:t>    • Değeri değiştir</a:t>
             </a:r>
           </a:p>
@@ -6839,6 +8873,7 @@
               <a:defRPr sz="1900"/>
             </a:pPr>
             <a:r>
+              <a:rPr sz="1400"/>
               <a:t>🔹 '[puan] değişkenini göster/gizle':</a:t>
             </a:r>
           </a:p>
@@ -6850,6 +8885,7 @@
               <a:defRPr sz="1700"/>
             </a:pPr>
             <a:r>
+              <a:rPr sz="1400"/>
               <a:t>    • Ekranda göster</a:t>
             </a:r>
           </a:p>
@@ -6869,6 +8905,7 @@
               <a:defRPr sz="1900" b="1"/>
             </a:pPr>
             <a:r>
+              <a:rPr sz="1400"/>
               <a:t>📌 Örnek: Basit Puan Sistemi</a:t>
             </a:r>
           </a:p>
@@ -6880,6 +8917,7 @@
               <a:defRPr sz="1900"/>
             </a:pPr>
             <a:r>
+              <a:rPr sz="1400"/>
               <a:t>[Yeşil bayrak tıklandığında]</a:t>
             </a:r>
           </a:p>
@@ -6891,6 +8929,7 @@
               <a:defRPr sz="1900"/>
             </a:pPr>
             <a:r>
+              <a:rPr sz="1400"/>
               <a:t>[puan değişkenini 0 yap]</a:t>
             </a:r>
           </a:p>
@@ -6902,6 +8941,7 @@
               <a:defRPr sz="1900"/>
             </a:pPr>
             <a:r>
+              <a:rPr sz="1400"/>
               <a:t>[Sürekli tekrarla]</a:t>
             </a:r>
           </a:p>
@@ -6913,6 +8953,7 @@
               <a:defRPr sz="1700"/>
             </a:pPr>
             <a:r>
+              <a:rPr sz="1400"/>
               <a:t>    [Eğer [Boşluk] tuşuna basılı ise]</a:t>
             </a:r>
           </a:p>
@@ -6924,6 +8965,7 @@
               <a:defRPr sz="1700"/>
             </a:pPr>
             <a:r>
+              <a:rPr sz="1400"/>
               <a:t>        [puan değişkenini 1 arttır]</a:t>
             </a:r>
           </a:p>
@@ -6943,6 +8985,7 @@
               <a:defRPr sz="1900" b="1"/>
             </a:pPr>
             <a:r>
+              <a:rPr sz="1400"/>
               <a:t>💡 Değişkenler oyunlarda çok kullanılır:</a:t>
             </a:r>
           </a:p>
@@ -6954,6 +8997,7 @@
               <a:defRPr sz="1900"/>
             </a:pPr>
             <a:r>
+              <a:rPr sz="1400"/>
               <a:t>Puan, can, seviye, zaman...</a:t>
             </a:r>
           </a:p>
@@ -7052,6 +9096,7 @@
               <a:defRPr sz="1900"/>
             </a:pPr>
             <a:r>
+              <a:rPr sz="1400"/>
               <a:t>Liste = Birden fazla değeri saklayan değişken</a:t>
             </a:r>
           </a:p>
@@ -7071,6 +9116,7 @@
               <a:defRPr sz="1900" b="1"/>
             </a:pPr>
             <a:r>
+              <a:rPr sz="1400"/>
               <a:t>✅ Liste Nedir?</a:t>
             </a:r>
           </a:p>
@@ -7082,6 +9128,7 @@
               <a:defRPr sz="1700"/>
             </a:pPr>
             <a:r>
+              <a:rPr sz="1400"/>
               <a:t>    • Çok veri saklar</a:t>
             </a:r>
           </a:p>
@@ -7093,6 +9140,7 @@
               <a:defRPr sz="1700"/>
             </a:pPr>
             <a:r>
+              <a:rPr sz="1400"/>
               <a:t>    • Sıralıdır</a:t>
             </a:r>
           </a:p>
@@ -7104,6 +9152,7 @@
               <a:defRPr sz="1700"/>
             </a:pPr>
             <a:r>
+              <a:rPr sz="1400"/>
               <a:t>    • Örnek: İsimler listesi, Puanlar listesi</a:t>
             </a:r>
           </a:p>
@@ -7123,6 +9172,7 @@
               <a:defRPr sz="1900" b="1"/>
             </a:pPr>
             <a:r>
+              <a:rPr sz="1400"/>
               <a:t>✅ Liste Blokları:</a:t>
             </a:r>
           </a:p>
@@ -7142,6 +9192,7 @@
               <a:defRPr sz="1900"/>
             </a:pPr>
             <a:r>
+              <a:rPr sz="1400"/>
               <a:t>🔹 'Liste oluştur':</a:t>
             </a:r>
           </a:p>
@@ -7153,6 +9204,7 @@
               <a:defRPr sz="1700"/>
             </a:pPr>
             <a:r>
+              <a:rPr sz="1400"/>
               <a:t>    • Yeni liste</a:t>
             </a:r>
           </a:p>
@@ -7172,6 +9224,7 @@
               <a:defRPr sz="1900"/>
             </a:pPr>
             <a:r>
+              <a:rPr sz="1400"/>
               <a:t>🔹 '[Ahmet]'i [isimler]'e ekle':</a:t>
             </a:r>
           </a:p>
@@ -7183,6 +9236,7 @@
               <a:defRPr sz="1700"/>
             </a:pPr>
             <a:r>
+              <a:rPr sz="1400"/>
               <a:t>    • Yeni eleman ekle</a:t>
             </a:r>
           </a:p>
@@ -7202,6 +9256,7 @@
               <a:defRPr sz="1900"/>
             </a:pPr>
             <a:r>
+              <a:rPr sz="1400"/>
               <a:t>🔹 '[isimler]'in [1] elemanı':</a:t>
             </a:r>
           </a:p>
@@ -7213,6 +9268,7 @@
               <a:defRPr sz="1700"/>
             </a:pPr>
             <a:r>
+              <a:rPr sz="1400"/>
               <a:t>    • Elemana eriş</a:t>
             </a:r>
           </a:p>
@@ -7232,6 +9288,7 @@
               <a:defRPr sz="1900"/>
             </a:pPr>
             <a:r>
+              <a:rPr sz="1400"/>
               <a:t>🔹 '[isimler]'in uzunluğu':</a:t>
             </a:r>
           </a:p>
@@ -7243,6 +9300,7 @@
               <a:defRPr sz="1700"/>
             </a:pPr>
             <a:r>
+              <a:rPr sz="1400"/>
               <a:t>    • Kaç eleman var?</a:t>
             </a:r>
           </a:p>
@@ -7262,6 +9320,7 @@
               <a:defRPr sz="1900"/>
             </a:pPr>
             <a:r>
+              <a:rPr sz="1400"/>
               <a:t>🔹 '[isimler] içinde [Ahmet] var mı?':</a:t>
             </a:r>
           </a:p>
@@ -7273,6 +9332,7 @@
               <a:defRPr sz="1700"/>
             </a:pPr>
             <a:r>
+              <a:rPr sz="1400"/>
               <a:t>    • Arama</a:t>
             </a:r>
           </a:p>
@@ -7292,6 +9352,7 @@
               <a:defRPr sz="1900" b="1"/>
             </a:pPr>
             <a:r>
+              <a:rPr sz="1400"/>
               <a:t>📌 Örnek: Rastgele İsim Seç</a:t>
             </a:r>
           </a:p>
@@ -7303,6 +9364,7 @@
               <a:defRPr sz="1900"/>
             </a:pPr>
             <a:r>
+              <a:rPr sz="1400"/>
               <a:t>[isimler listesini oluştur]</a:t>
             </a:r>
           </a:p>
@@ -7314,6 +9376,7 @@
               <a:defRPr sz="1900"/>
             </a:pPr>
             <a:r>
+              <a:rPr sz="1400"/>
               <a:t>[Ahmet'i ekle]</a:t>
             </a:r>
           </a:p>
@@ -7325,6 +9388,7 @@
               <a:defRPr sz="1900"/>
             </a:pPr>
             <a:r>
+              <a:rPr sz="1400"/>
               <a:t>[Mehmet'i ekle]</a:t>
             </a:r>
           </a:p>
@@ -7336,6 +9400,7 @@
               <a:defRPr sz="1900"/>
             </a:pPr>
             <a:r>
+              <a:rPr sz="1400"/>
               <a:t>[Ayşe'yi ekle]</a:t>
             </a:r>
           </a:p>
@@ -7347,6 +9412,7 @@
               <a:defRPr sz="1900"/>
             </a:pPr>
             <a:r>
+              <a:rPr sz="1400"/>
               <a:t>[Rastgele 1 ile liste uzunluğu arasında sayı seç]</a:t>
             </a:r>
           </a:p>
@@ -7358,6 +9424,7 @@
               <a:defRPr sz="1900"/>
             </a:pPr>
             <a:r>
+              <a:rPr sz="1400"/>
               <a:t>[O sıradaki ismi de]</a:t>
             </a:r>
           </a:p>
@@ -7377,6 +9444,7 @@
               <a:defRPr sz="1900" b="1"/>
             </a:pPr>
             <a:r>
+              <a:rPr sz="1400"/>
               <a:t>💡 Liste = Çok veri için kullanılır</a:t>
             </a:r>
           </a:p>
@@ -7475,6 +9543,7 @@
               <a:defRPr sz="1900"/>
             </a:pPr>
             <a:r>
+              <a:rPr sz="1400"/>
               <a:t>Operatörler = Matematik ve mantık işlemleri</a:t>
             </a:r>
           </a:p>
@@ -7494,6 +9563,7 @@
               <a:defRPr sz="1900" b="1"/>
             </a:pPr>
             <a:r>
+              <a:rPr sz="1400"/>
               <a:t>✅ Matematik Operatörleri:</a:t>
             </a:r>
           </a:p>
@@ -7505,6 +9575,7 @@
               <a:defRPr sz="1700"/>
             </a:pPr>
             <a:r>
+              <a:rPr sz="1400"/>
               <a:t>    • [ ] + [ ] (Toplama)</a:t>
             </a:r>
           </a:p>
@@ -7516,6 +9587,7 @@
               <a:defRPr sz="1700"/>
             </a:pPr>
             <a:r>
+              <a:rPr sz="1400"/>
               <a:t>    • [ ] - [ ] (Çıkarma)</a:t>
             </a:r>
           </a:p>
@@ -7527,6 +9599,7 @@
               <a:defRPr sz="1700"/>
             </a:pPr>
             <a:r>
+              <a:rPr sz="1400"/>
               <a:t>    • [ ] * [ ] (Çarpma)</a:t>
             </a:r>
           </a:p>
@@ -7538,6 +9611,7 @@
               <a:defRPr sz="1700"/>
             </a:pPr>
             <a:r>
+              <a:rPr sz="1400"/>
               <a:t>    • [ ] / [ ] (Bölme)</a:t>
             </a:r>
           </a:p>
@@ -7549,6 +9623,7 @@
               <a:defRPr sz="1700"/>
             </a:pPr>
             <a:r>
+              <a:rPr sz="1400"/>
               <a:t>    • 1 ile 10 arası rastgele sayı</a:t>
             </a:r>
           </a:p>
@@ -7568,6 +9643,7 @@
               <a:defRPr sz="1900" b="1"/>
             </a:pPr>
             <a:r>
+              <a:rPr sz="1400"/>
               <a:t>✅ Karşılaştırma:</a:t>
             </a:r>
           </a:p>
@@ -7579,6 +9655,7 @@
               <a:defRPr sz="1700"/>
             </a:pPr>
             <a:r>
+              <a:rPr sz="1400"/>
               <a:t>    • [ ] &gt; [ ] (Büyüktür)</a:t>
             </a:r>
           </a:p>
@@ -7590,6 +9667,7 @@
               <a:defRPr sz="1700"/>
             </a:pPr>
             <a:r>
+              <a:rPr sz="1400"/>
               <a:t>    • [ ] &lt; [ ] (Küçüktür)</a:t>
             </a:r>
           </a:p>
@@ -7601,6 +9679,7 @@
               <a:defRPr sz="1700"/>
             </a:pPr>
             <a:r>
+              <a:rPr sz="1400"/>
               <a:t>    • [ ] = [ ] (Eşittir)</a:t>
             </a:r>
           </a:p>
@@ -7620,6 +9699,7 @@
               <a:defRPr sz="1900" b="1"/>
             </a:pPr>
             <a:r>
+              <a:rPr sz="1400"/>
               <a:t>✅ Mantık Operatörleri:</a:t>
             </a:r>
           </a:p>
@@ -7631,6 +9711,7 @@
               <a:defRPr sz="1700"/>
             </a:pPr>
             <a:r>
+              <a:rPr sz="1400"/>
               <a:t>    • [ ] ve [ ] (AND)</a:t>
             </a:r>
           </a:p>
@@ -7642,6 +9723,7 @@
               <a:defRPr sz="1700"/>
             </a:pPr>
             <a:r>
+              <a:rPr sz="1400"/>
               <a:t>    • [ ] veya [ ] (OR)</a:t>
             </a:r>
           </a:p>
@@ -7653,6 +9735,7 @@
               <a:defRPr sz="1700"/>
             </a:pPr>
             <a:r>
+              <a:rPr sz="1400"/>
               <a:t>    • [ ] değil (NOT)</a:t>
             </a:r>
           </a:p>
@@ -7672,6 +9755,7 @@
               <a:defRPr sz="1900" b="1"/>
             </a:pPr>
             <a:r>
+              <a:rPr sz="1400"/>
               <a:t>✅ Metin Operatörleri:</a:t>
             </a:r>
           </a:p>
@@ -7683,6 +9767,7 @@
               <a:defRPr sz="1700"/>
             </a:pPr>
             <a:r>
+              <a:rPr sz="1400"/>
               <a:t>    • [ ] birleştir [ ] ('Merhaba' + 'Dünya')</a:t>
             </a:r>
           </a:p>
@@ -7694,6 +9779,7 @@
               <a:defRPr sz="1700"/>
             </a:pPr>
             <a:r>
+              <a:rPr sz="1400"/>
               <a:t>    • [ ]'in [ ] harfi</a:t>
             </a:r>
           </a:p>
@@ -7705,6 +9791,7 @@
               <a:defRPr sz="1700"/>
             </a:pPr>
             <a:r>
+              <a:rPr sz="1400"/>
               <a:t>    • [ ]'in uzunluğu</a:t>
             </a:r>
           </a:p>
@@ -7724,6 +9811,7 @@
               <a:defRPr sz="1900" b="1"/>
             </a:pPr>
             <a:r>
+              <a:rPr sz="1400"/>
               <a:t>📌 Örnek: İki Sayıyı Topla</a:t>
             </a:r>
           </a:p>
@@ -7735,6 +9823,7 @@
               <a:defRPr sz="1900"/>
             </a:pPr>
             <a:r>
+              <a:rPr sz="1400"/>
               <a:t>[Birinci sayıyı sor]</a:t>
             </a:r>
           </a:p>
@@ -7746,6 +9835,7 @@
               <a:defRPr sz="1900"/>
             </a:pPr>
             <a:r>
+              <a:rPr sz="1400"/>
               <a:t>[İkinci sayıyı sor]</a:t>
             </a:r>
           </a:p>
@@ -7757,6 +9847,7 @@
               <a:defRPr sz="1900"/>
             </a:pPr>
             <a:r>
+              <a:rPr sz="1400"/>
               <a:t>[Cevap1 + Cevap2'yi de]</a:t>
             </a:r>
           </a:p>
@@ -7855,6 +9946,7 @@
               <a:defRPr sz="1900"/>
             </a:pPr>
             <a:r>
+              <a:rPr sz="1400"/>
               <a:t>Algılama = Çevreyi algılamak</a:t>
             </a:r>
           </a:p>
@@ -7874,6 +9966,7 @@
               <a:defRPr sz="1900" b="1"/>
             </a:pPr>
             <a:r>
+              <a:rPr sz="1400"/>
               <a:t>✅ Algılama Blokları:</a:t>
             </a:r>
           </a:p>
@@ -7893,6 +9986,7 @@
               <a:defRPr sz="1900"/>
             </a:pPr>
             <a:r>
+              <a:rPr sz="1400"/>
               <a:t>🔹 '[ ] tuşuna basılı mı?':</a:t>
             </a:r>
           </a:p>
@@ -7904,6 +9998,7 @@
               <a:defRPr sz="1700"/>
             </a:pPr>
             <a:r>
+              <a:rPr sz="1400"/>
               <a:t>    • Klavye kontrolü</a:t>
             </a:r>
           </a:p>
@@ -7923,6 +10018,7 @@
               <a:defRPr sz="1900"/>
             </a:pPr>
             <a:r>
+              <a:rPr sz="1400"/>
               <a:t>🔹 'Fare tıklandı mı?':</a:t>
             </a:r>
           </a:p>
@@ -7934,6 +10030,7 @@
               <a:defRPr sz="1700"/>
             </a:pPr>
             <a:r>
+              <a:rPr sz="1400"/>
               <a:t>    • Mouse kontrolü</a:t>
             </a:r>
           </a:p>
@@ -7953,6 +10050,7 @@
               <a:defRPr sz="1900"/>
             </a:pPr>
             <a:r>
+              <a:rPr sz="1400"/>
               <a:t>🔹 'Fare x / y konumu':</a:t>
             </a:r>
           </a:p>
@@ -7964,6 +10062,7 @@
               <a:defRPr sz="1700"/>
             </a:pPr>
             <a:r>
+              <a:rPr sz="1400"/>
               <a:t>    • Fare koordinatları</a:t>
             </a:r>
           </a:p>
@@ -7983,6 +10082,7 @@
               <a:defRPr sz="1900"/>
             </a:pPr>
             <a:r>
+              <a:rPr sz="1400"/>
               <a:t>🔹 '[ ]'e değiyor mu?':</a:t>
             </a:r>
           </a:p>
@@ -7994,6 +10094,7 @@
               <a:defRPr sz="1700"/>
             </a:pPr>
             <a:r>
+              <a:rPr sz="1400"/>
               <a:t>    • Çarpışma algılama</a:t>
             </a:r>
           </a:p>
@@ -8013,6 +10114,7 @@
               <a:defRPr sz="1900"/>
             </a:pPr>
             <a:r>
+              <a:rPr sz="1400"/>
               <a:t>🔹 '[ ] rengine değiyor mu?':</a:t>
             </a:r>
           </a:p>
@@ -8024,6 +10126,7 @@
               <a:defRPr sz="1700"/>
             </a:pPr>
             <a:r>
+              <a:rPr sz="1400"/>
               <a:t>    • Renk algılama</a:t>
             </a:r>
           </a:p>
@@ -8043,6 +10146,7 @@
               <a:defRPr sz="1900"/>
             </a:pPr>
             <a:r>
+              <a:rPr sz="1400"/>
               <a:t>🔹 '[ ]'e olan uzaklık':</a:t>
             </a:r>
           </a:p>
@@ -8054,6 +10158,7 @@
               <a:defRPr sz="1700"/>
             </a:pPr>
             <a:r>
+              <a:rPr sz="1400"/>
               <a:t>    • Mesafe ölçme</a:t>
             </a:r>
           </a:p>
@@ -8073,6 +10178,7 @@
               <a:defRPr sz="1900"/>
             </a:pPr>
             <a:r>
+              <a:rPr sz="1400"/>
               <a:t>🔹 'Sor ve bekle':</a:t>
             </a:r>
           </a:p>
@@ -8084,6 +10190,7 @@
               <a:defRPr sz="1700"/>
             </a:pPr>
             <a:r>
+              <a:rPr sz="1400"/>
               <a:t>    • Kullanıcıdan input al</a:t>
             </a:r>
           </a:p>
@@ -8103,6 +10210,7 @@
               <a:defRPr sz="1900"/>
             </a:pPr>
             <a:r>
+              <a:rPr sz="1400"/>
               <a:t>🔹 'Cevap':</a:t>
             </a:r>
           </a:p>
@@ -8114,6 +10222,7 @@
               <a:defRPr sz="1700"/>
             </a:pPr>
             <a:r>
+              <a:rPr sz="1400"/>
               <a:t>    • Kullanıcının cevabı</a:t>
             </a:r>
           </a:p>
@@ -8133,6 +10242,7 @@
               <a:defRPr sz="1900" b="1"/>
             </a:pPr>
             <a:r>
+              <a:rPr sz="1400"/>
               <a:t>📌 Örnek: Çarpışma Kontrolü</a:t>
             </a:r>
           </a:p>
@@ -8144,6 +10254,7 @@
               <a:defRPr sz="1900"/>
             </a:pPr>
             <a:r>
+              <a:rPr sz="1400"/>
               <a:t>[Sürekli tekrarla]</a:t>
             </a:r>
           </a:p>
@@ -8155,6 +10266,7 @@
               <a:defRPr sz="1700"/>
             </a:pPr>
             <a:r>
+              <a:rPr sz="1400"/>
               <a:t>    [Eğer [Duvar] sprite'ına değiyor ise]</a:t>
             </a:r>
           </a:p>
@@ -8166,6 +10278,7 @@
               <a:defRPr sz="1700"/>
             </a:pPr>
             <a:r>
+              <a:rPr sz="1400"/>
               <a:t>        [Oyunu durdur]</a:t>
             </a:r>
           </a:p>
@@ -8264,6 +10377,7 @@
               <a:defRPr sz="1900"/>
             </a:pPr>
             <a:r>
+              <a:rPr sz="1400"/>
               <a:t>Fonksiyon = Kendi komutunu yarat!</a:t>
             </a:r>
           </a:p>
@@ -8283,6 +10397,7 @@
               <a:defRPr sz="1900" b="1"/>
             </a:pPr>
             <a:r>
+              <a:rPr sz="1400"/>
               <a:t>✅ Neden Kullanılır?</a:t>
             </a:r>
           </a:p>
@@ -8294,6 +10409,7 @@
               <a:defRPr sz="1700"/>
             </a:pPr>
             <a:r>
+              <a:rPr sz="1400"/>
               <a:t>    • Kod tekrarını önler</a:t>
             </a:r>
           </a:p>
@@ -8305,6 +10421,7 @@
               <a:defRPr sz="1700"/>
             </a:pPr>
             <a:r>
+              <a:rPr sz="1400"/>
               <a:t>    • Düzenli kod</a:t>
             </a:r>
           </a:p>
@@ -8316,6 +10433,7 @@
               <a:defRPr sz="1700"/>
             </a:pPr>
             <a:r>
+              <a:rPr sz="1400"/>
               <a:t>    • Karmaşık işleri basitleştirir</a:t>
             </a:r>
           </a:p>
@@ -8335,6 +10453,7 @@
               <a:defRPr sz="1900" b="1"/>
             </a:pPr>
             <a:r>
+              <a:rPr sz="1400"/>
               <a:t>✅ Nasıl Oluşturulur?</a:t>
             </a:r>
           </a:p>
@@ -8346,6 +10465,7 @@
               <a:defRPr sz="1900"/>
             </a:pPr>
             <a:r>
+              <a:rPr sz="1400"/>
               <a:t>1️⃣ 'Kendi Bloklarım' kategorisi</a:t>
             </a:r>
           </a:p>
@@ -8357,6 +10477,7 @@
               <a:defRPr sz="1900"/>
             </a:pPr>
             <a:r>
+              <a:rPr sz="1400"/>
               <a:t>2️⃣ 'Blok Oluştur' tıkla</a:t>
             </a:r>
           </a:p>
@@ -8368,6 +10489,7 @@
               <a:defRPr sz="1900"/>
             </a:pPr>
             <a:r>
+              <a:rPr sz="1400"/>
               <a:t>3️⃣ İsim ver (örn: 'kare_ciz')</a:t>
             </a:r>
           </a:p>
@@ -8379,6 +10501,7 @@
               <a:defRPr sz="1900"/>
             </a:pPr>
             <a:r>
+              <a:rPr sz="1400"/>
               <a:t>4️⃣ Bloğunu tanımla</a:t>
             </a:r>
           </a:p>
@@ -8398,6 +10521,7 @@
               <a:defRPr sz="1900" b="1"/>
             </a:pPr>
             <a:r>
+              <a:rPr sz="1400"/>
               <a:t>📌 Örnek: Kare Çizme Fonksiyonu</a:t>
             </a:r>
           </a:p>
@@ -8417,6 +10541,7 @@
               <a:defRPr sz="1900"/>
             </a:pPr>
             <a:r>
+              <a:rPr sz="1400"/>
               <a:t>[tanımla kare_ciz]</a:t>
             </a:r>
           </a:p>
@@ -8428,6 +10553,7 @@
               <a:defRPr sz="1900"/>
             </a:pPr>
             <a:r>
+              <a:rPr sz="1400"/>
               <a:t>[4 kez tekrarla]</a:t>
             </a:r>
           </a:p>
@@ -8439,6 +10565,7 @@
               <a:defRPr sz="1700"/>
             </a:pPr>
             <a:r>
+              <a:rPr sz="1400"/>
               <a:t>    [100 adım git]</a:t>
             </a:r>
           </a:p>
@@ -8450,6 +10577,7 @@
               <a:defRPr sz="1700"/>
             </a:pPr>
             <a:r>
+              <a:rPr sz="1400"/>
               <a:t>    [90 derece sağa dön]</a:t>
             </a:r>
           </a:p>
@@ -8469,6 +10597,7 @@
               <a:defRPr sz="1900"/>
             </a:pPr>
             <a:r>
+              <a:rPr sz="1400"/>
               <a:t>[Yeşil bayrak tıklandığında]</a:t>
             </a:r>
           </a:p>
@@ -8480,6 +10609,7 @@
               <a:defRPr sz="1900"/>
             </a:pPr>
             <a:r>
+              <a:rPr sz="1400"/>
               <a:t>[kare_ciz]</a:t>
             </a:r>
           </a:p>
@@ -8491,6 +10621,7 @@
               <a:defRPr sz="1900"/>
             </a:pPr>
             <a:r>
+              <a:rPr sz="1400"/>
               <a:t>[x: 100 y: 0 git]</a:t>
             </a:r>
           </a:p>
@@ -8502,6 +10633,7 @@
               <a:defRPr sz="1900"/>
             </a:pPr>
             <a:r>
+              <a:rPr sz="1400"/>
               <a:t>[kare_ciz]</a:t>
             </a:r>
           </a:p>
@@ -8521,6 +10653,7 @@
               <a:defRPr sz="1900" b="1"/>
             </a:pPr>
             <a:r>
+              <a:rPr sz="1400"/>
               <a:t>💡 Parametreli fonksiyonlar da yapabilirsin!</a:t>
             </a:r>
           </a:p>
@@ -8532,6 +10665,7 @@
               <a:defRPr sz="1900"/>
             </a:pPr>
             <a:r>
+              <a:rPr sz="1400"/>
               <a:t>Örnek: kare_ciz(boyut)</a:t>
             </a:r>
           </a:p>
@@ -8551,6 +10685,7 @@
               <a:defRPr sz="1900" b="1"/>
             </a:pPr>
             <a:r>
+              <a:rPr sz="1400"/>
               <a:t>⚡ Fonksiyonlar = Profesyonel programlama!</a:t>
             </a:r>
           </a:p>
@@ -8649,6 +10784,7 @@
               <a:defRPr sz="1900"/>
             </a:pPr>
             <a:r>
+              <a:rPr sz="1400"/>
               <a:t>İlk oyununu yap: Labirent!</a:t>
             </a:r>
           </a:p>
@@ -8668,6 +10804,7 @@
               <a:defRPr sz="1900" b="1"/>
             </a:pPr>
             <a:r>
+              <a:rPr sz="1400"/>
               <a:t>✅ Oyun Mekanik:</a:t>
             </a:r>
           </a:p>
@@ -8679,6 +10816,7 @@
               <a:defRPr sz="1700"/>
             </a:pPr>
             <a:r>
+              <a:rPr sz="1400"/>
               <a:t>    • Ok tuşları ile kontrol</a:t>
             </a:r>
           </a:p>
@@ -8690,6 +10828,7 @@
               <a:defRPr sz="1700"/>
             </a:pPr>
             <a:r>
+              <a:rPr sz="1400"/>
               <a:t>    • Duvara çarparsa kaybeder</a:t>
             </a:r>
           </a:p>
@@ -8701,6 +10840,7 @@
               <a:defRPr sz="1700"/>
             </a:pPr>
             <a:r>
+              <a:rPr sz="1400"/>
               <a:t>    • Hedefe ulaşırsa kazanır</a:t>
             </a:r>
           </a:p>
@@ -8720,6 +10860,7 @@
               <a:defRPr sz="1900" b="1"/>
             </a:pPr>
             <a:r>
+              <a:rPr sz="1400"/>
               <a:t>🎯 Adımlar:</a:t>
             </a:r>
           </a:p>
@@ -8739,6 +10880,7 @@
               <a:defRPr sz="1900"/>
             </a:pPr>
             <a:r>
+              <a:rPr sz="1400"/>
               <a:t>1️⃣ Sahne hazırla:</a:t>
             </a:r>
           </a:p>
@@ -8750,6 +10892,7 @@
               <a:defRPr sz="1700"/>
             </a:pPr>
             <a:r>
+              <a:rPr sz="1400"/>
               <a:t>    • Labirent arka planı çiz (siyah duvarlar)</a:t>
             </a:r>
           </a:p>
@@ -8769,6 +10912,7 @@
               <a:defRPr sz="1900"/>
             </a:pPr>
             <a:r>
+              <a:rPr sz="1400"/>
               <a:t>2️⃣ Sprite ekle:</a:t>
             </a:r>
           </a:p>
@@ -8780,6 +10924,7 @@
               <a:defRPr sz="1700"/>
             </a:pPr>
             <a:r>
+              <a:rPr sz="1400"/>
               <a:t>    • Oyuncu karakteri (top, kedi, vs.)</a:t>
             </a:r>
           </a:p>
@@ -8799,6 +10944,7 @@
               <a:defRPr sz="1900"/>
             </a:pPr>
             <a:r>
+              <a:rPr sz="1400"/>
               <a:t>3️⃣ Hareket kodu:</a:t>
             </a:r>
           </a:p>
@@ -8810,6 +10956,7 @@
               <a:defRPr sz="1900"/>
             </a:pPr>
             <a:r>
+              <a:rPr sz="1400"/>
               <a:t>[Sağ ok'a basılı ise → x'i 5 arttır]</a:t>
             </a:r>
           </a:p>
@@ -8821,6 +10968,7 @@
               <a:defRPr sz="1900"/>
             </a:pPr>
             <a:r>
+              <a:rPr sz="1400"/>
               <a:t>[Sol ok'a basılı ise → x'i 5 azalt]</a:t>
             </a:r>
           </a:p>
@@ -8832,6 +10980,7 @@
               <a:defRPr sz="1900"/>
             </a:pPr>
             <a:r>
+              <a:rPr sz="1400"/>
               <a:t>[Yukarı ok'a basılı ise → y'i 5 arttır]</a:t>
             </a:r>
           </a:p>
@@ -8843,6 +10992,7 @@
               <a:defRPr sz="1900"/>
             </a:pPr>
             <a:r>
+              <a:rPr sz="1400"/>
               <a:t>[Aşağı ok'a basılı ise → y'i 5 azalt]</a:t>
             </a:r>
           </a:p>
@@ -8862,6 +11012,7 @@
               <a:defRPr sz="1900"/>
             </a:pPr>
             <a:r>
+              <a:rPr sz="1400"/>
               <a:t>4️⃣ Çarpışma kontrolü:</a:t>
             </a:r>
           </a:p>
@@ -8873,6 +11024,7 @@
               <a:defRPr sz="1900"/>
             </a:pPr>
             <a:r>
+              <a:rPr sz="1400"/>
               <a:t>[Eğer siyah renge değiyor ise]</a:t>
             </a:r>
           </a:p>
@@ -8884,6 +11036,7 @@
               <a:defRPr sz="1700"/>
             </a:pPr>
             <a:r>
+              <a:rPr sz="1400"/>
               <a:t>    [Başlangıç noktasına git]</a:t>
             </a:r>
           </a:p>
@@ -8903,6 +11056,7 @@
               <a:defRPr sz="1900"/>
             </a:pPr>
             <a:r>
+              <a:rPr sz="1400"/>
               <a:t>5️⃣ Kazanma koşulu:</a:t>
             </a:r>
           </a:p>
@@ -8914,6 +11068,7 @@
               <a:defRPr sz="1900"/>
             </a:pPr>
             <a:r>
+              <a:rPr sz="1400"/>
               <a:t>[Eğer yeşil renge değiyor ise]</a:t>
             </a:r>
           </a:p>
@@ -8925,6 +11080,7 @@
               <a:defRPr sz="1700"/>
             </a:pPr>
             <a:r>
+              <a:rPr sz="1400"/>
               <a:t>    [Kazandın! de]</a:t>
             </a:r>
           </a:p>
@@ -9023,6 +11179,7 @@
               <a:defRPr sz="1900"/>
             </a:pPr>
             <a:r>
+              <a:rPr sz="1400"/>
               <a:t>Klasik oyun: Top sektir!</a:t>
             </a:r>
           </a:p>
@@ -9042,6 +11199,7 @@
               <a:defRPr sz="1900" b="1"/>
             </a:pPr>
             <a:r>
+              <a:rPr sz="1400"/>
               <a:t>✅ Oyun Mekanik:</a:t>
             </a:r>
           </a:p>
@@ -9053,6 +11211,7 @@
               <a:defRPr sz="1700"/>
             </a:pPr>
             <a:r>
+              <a:rPr sz="1400"/>
               <a:t>    • Top sürekli hareket eder</a:t>
             </a:r>
           </a:p>
@@ -9064,6 +11223,7 @@
               <a:defRPr sz="1700"/>
             </a:pPr>
             <a:r>
+              <a:rPr sz="1400"/>
               <a:t>    • Raket ile sektir</a:t>
             </a:r>
           </a:p>
@@ -9075,6 +11235,7 @@
               <a:defRPr sz="1700"/>
             </a:pPr>
             <a:r>
+              <a:rPr sz="1400"/>
               <a:t>    • Topu kaçırırsan kaybedersin</a:t>
             </a:r>
           </a:p>
@@ -9094,6 +11255,7 @@
               <a:defRPr sz="1900" b="1"/>
             </a:pPr>
             <a:r>
+              <a:rPr sz="1400"/>
               <a:t>🎯 Gerekli Sprite'lar:</a:t>
             </a:r>
           </a:p>
@@ -9105,6 +11267,7 @@
               <a:defRPr sz="1700"/>
             </a:pPr>
             <a:r>
+              <a:rPr sz="1400"/>
               <a:t>    • Top</a:t>
             </a:r>
           </a:p>
@@ -9116,6 +11279,7 @@
               <a:defRPr sz="1700"/>
             </a:pPr>
             <a:r>
+              <a:rPr sz="1400"/>
               <a:t>    • Raket</a:t>
             </a:r>
           </a:p>
@@ -9135,6 +11299,7 @@
               <a:defRPr sz="1900" b="1"/>
             </a:pPr>
             <a:r>
+              <a:rPr sz="1400"/>
               <a:t>📌 Top Kodu:</a:t>
             </a:r>
           </a:p>
@@ -9146,6 +11311,7 @@
               <a:defRPr sz="1900"/>
             </a:pPr>
             <a:r>
+              <a:rPr sz="1400"/>
               <a:t>[Yeşil bayrak tıklandığında]</a:t>
             </a:r>
           </a:p>
@@ -9157,6 +11323,7 @@
               <a:defRPr sz="1900"/>
             </a:pPr>
             <a:r>
+              <a:rPr sz="1400"/>
               <a:t>[90 derece yönel]</a:t>
             </a:r>
           </a:p>
@@ -9168,6 +11335,7 @@
               <a:defRPr sz="1900"/>
             </a:pPr>
             <a:r>
+              <a:rPr sz="1400"/>
               <a:t>[Sürekli tekrarla]</a:t>
             </a:r>
           </a:p>
@@ -9179,6 +11347,7 @@
               <a:defRPr sz="1700"/>
             </a:pPr>
             <a:r>
+              <a:rPr sz="1400"/>
               <a:t>    [10 adım git]</a:t>
             </a:r>
           </a:p>
@@ -9190,6 +11359,7 @@
               <a:defRPr sz="1700"/>
             </a:pPr>
             <a:r>
+              <a:rPr sz="1400"/>
               <a:t>    [Eğer kenara değiyor ise, sek]</a:t>
             </a:r>
           </a:p>
@@ -9201,6 +11371,7 @@
               <a:defRPr sz="1700"/>
             </a:pPr>
             <a:r>
+              <a:rPr sz="1400"/>
               <a:t>    [Eğer [Raket]'e değiyor ise]</a:t>
             </a:r>
           </a:p>
@@ -9212,6 +11383,7 @@
               <a:defRPr sz="1700"/>
             </a:pPr>
             <a:r>
+              <a:rPr sz="1400"/>
               <a:t>        [y yönünde sek]</a:t>
             </a:r>
           </a:p>
@@ -9223,6 +11395,7 @@
               <a:defRPr sz="1700"/>
             </a:pPr>
             <a:r>
+              <a:rPr sz="1400"/>
               <a:t>    [Eğer y &lt; -170 ise]</a:t>
             </a:r>
           </a:p>
@@ -9234,6 +11407,7 @@
               <a:defRPr sz="1700"/>
             </a:pPr>
             <a:r>
+              <a:rPr sz="1400"/>
               <a:t>        [Kaybettin! de]</a:t>
             </a:r>
           </a:p>
@@ -9245,6 +11419,7 @@
               <a:defRPr sz="1700"/>
             </a:pPr>
             <a:r>
+              <a:rPr sz="1400"/>
               <a:t>        [Tümünü durdur]</a:t>
             </a:r>
           </a:p>
@@ -9264,6 +11439,7 @@
               <a:defRPr sz="1900" b="1"/>
             </a:pPr>
             <a:r>
+              <a:rPr sz="1400"/>
               <a:t>📌 Raket Kodu:</a:t>
             </a:r>
           </a:p>
@@ -9275,6 +11451,7 @@
               <a:defRPr sz="1900"/>
             </a:pPr>
             <a:r>
+              <a:rPr sz="1400"/>
               <a:t>[Sürekli tekrarla]</a:t>
             </a:r>
           </a:p>
@@ -9286,6 +11463,7 @@
               <a:defRPr sz="1700"/>
             </a:pPr>
             <a:r>
+              <a:rPr sz="1400"/>
               <a:t>    [x konumunu fare x konumu yap]</a:t>
             </a:r>
           </a:p>
@@ -9305,6 +11483,7 @@
               <a:defRPr sz="1900" b="1"/>
             </a:pPr>
             <a:r>
+              <a:rPr sz="1400"/>
               <a:t>💡 Geliştirmeler:</a:t>
             </a:r>
           </a:p>
@@ -9316,6 +11495,7 @@
               <a:defRPr sz="1700"/>
             </a:pPr>
             <a:r>
+              <a:rPr sz="1400"/>
               <a:t>    • Puan sistemi ekle</a:t>
             </a:r>
           </a:p>
@@ -9327,6 +11507,7 @@
               <a:defRPr sz="1700"/>
             </a:pPr>
             <a:r>
+              <a:rPr sz="1400"/>
               <a:t>    • Hız arttır</a:t>
             </a:r>
           </a:p>
@@ -9338,6 +11519,7 @@
               <a:defRPr sz="1700"/>
             </a:pPr>
             <a:r>
+              <a:rPr sz="1400"/>
               <a:t>    • Engeller ekle</a:t>
             </a:r>
           </a:p>
@@ -9436,6 +11618,7 @@
               <a:defRPr sz="1900"/>
             </a:pPr>
             <a:r>
+              <a:rPr sz="1600"/>
               <a:t>Bu ünitede neler öğreneceğiz? (14 Hafta!)</a:t>
             </a:r>
           </a:p>
@@ -9455,6 +11638,7 @@
               <a:defRPr sz="1900" b="1"/>
             </a:pPr>
             <a:r>
+              <a:rPr sz="1600"/>
               <a:t>✅ 1. Scratch Nedir? Giriş</a:t>
             </a:r>
           </a:p>
@@ -9466,6 +11650,7 @@
               <a:defRPr sz="1900" b="1"/>
             </a:pPr>
             <a:r>
+              <a:rPr sz="1600"/>
               <a:t>✅ 2. Scratch Arayüzü</a:t>
             </a:r>
           </a:p>
@@ -9477,6 +11662,7 @@
               <a:defRPr sz="1900" b="1"/>
             </a:pPr>
             <a:r>
+              <a:rPr sz="1600"/>
               <a:t>✅ 3. Blok Türleri</a:t>
             </a:r>
           </a:p>
@@ -9488,6 +11674,7 @@
               <a:defRPr sz="1900" b="1"/>
             </a:pPr>
             <a:r>
+              <a:rPr sz="1600"/>
               <a:t>✅ 4. Sprite (Karakter) ve Sahne</a:t>
             </a:r>
           </a:p>
@@ -9499,6 +11686,7 @@
               <a:defRPr sz="1900" b="1"/>
             </a:pPr>
             <a:r>
+              <a:rPr sz="1600"/>
               <a:t>✅ 5. Hareket Blokları</a:t>
             </a:r>
           </a:p>
@@ -9510,6 +11698,7 @@
               <a:defRPr sz="1900" b="1"/>
             </a:pPr>
             <a:r>
+              <a:rPr sz="1600"/>
               <a:t>✅ 6. Görünüm Blokları</a:t>
             </a:r>
           </a:p>
@@ -9521,6 +11710,7 @@
               <a:defRPr sz="1900" b="1"/>
             </a:pPr>
             <a:r>
+              <a:rPr sz="1600"/>
               <a:t>✅ 7. Ses Blokları</a:t>
             </a:r>
           </a:p>
@@ -9532,6 +11722,7 @@
               <a:defRPr sz="1900" b="1"/>
             </a:pPr>
             <a:r>
+              <a:rPr sz="1600"/>
               <a:t>✅ 8. Olaylar (Events)</a:t>
             </a:r>
           </a:p>
@@ -9543,6 +11734,7 @@
               <a:defRPr sz="1900" b="1"/>
             </a:pPr>
             <a:r>
+              <a:rPr sz="1600"/>
               <a:t>✅ 9. Kontrol Yapıları (Döngüler, Koşullar)</a:t>
             </a:r>
           </a:p>
@@ -9554,6 +11746,7 @@
               <a:defRPr sz="1900" b="1"/>
             </a:pPr>
             <a:r>
+              <a:rPr sz="1600"/>
               <a:t>✅ 10. Değişkenler</a:t>
             </a:r>
           </a:p>
@@ -9565,6 +11758,7 @@
               <a:defRPr sz="1900" b="1"/>
             </a:pPr>
             <a:r>
+              <a:rPr sz="1600"/>
               <a:t>✅ 11. Liste Kullanımı</a:t>
             </a:r>
           </a:p>
@@ -9576,6 +11770,7 @@
               <a:defRPr sz="1900" b="1"/>
             </a:pPr>
             <a:r>
+              <a:rPr sz="1600"/>
               <a:t>✅ 12. Operatörler (Matematik, Mantık)</a:t>
             </a:r>
           </a:p>
@@ -9587,6 +11782,7 @@
               <a:defRPr sz="1900" b="1"/>
             </a:pPr>
             <a:r>
+              <a:rPr sz="1600"/>
               <a:t>✅ 13. Kendi Bloklarını Oluşturma</a:t>
             </a:r>
           </a:p>
@@ -9598,6 +11794,7 @@
               <a:defRPr sz="1900" b="1"/>
             </a:pPr>
             <a:r>
+              <a:rPr sz="1600"/>
               <a:t>✅ 14. Oyun Tasarımı Proje</a:t>
             </a:r>
           </a:p>
@@ -9617,6 +11814,7 @@
               <a:defRPr sz="1900"/>
             </a:pPr>
             <a:r>
+              <a:rPr sz="1600"/>
               <a:t>⏰ Süre: 14 Hafta</a:t>
             </a:r>
           </a:p>
@@ -9628,6 +11826,7 @@
               <a:defRPr sz="1900" b="1"/>
             </a:pPr>
             <a:r>
+              <a:rPr sz="1600"/>
               <a:t>🎯 Amaç: Kendi oyununu programlayabilmek!</a:t>
             </a:r>
           </a:p>
@@ -9726,6 +11925,7 @@
               <a:defRPr sz="1900"/>
             </a:pPr>
             <a:r>
+              <a:rPr sz="1400"/>
               <a:t>Yukarıdan düşen meyveleri yakala!</a:t>
             </a:r>
           </a:p>
@@ -9745,6 +11945,7 @@
               <a:defRPr sz="1900" b="1"/>
             </a:pPr>
             <a:r>
+              <a:rPr sz="1400"/>
               <a:t>✅ Oyun Mekanik:</a:t>
             </a:r>
           </a:p>
@@ -9756,6 +11957,7 @@
               <a:defRPr sz="1700"/>
             </a:pPr>
             <a:r>
+              <a:rPr sz="1400"/>
               <a:t>    • Meyveler yukarıdan düşer</a:t>
             </a:r>
           </a:p>
@@ -9767,6 +11969,7 @@
               <a:defRPr sz="1700"/>
             </a:pPr>
             <a:r>
+              <a:rPr sz="1400"/>
               <a:t>    • Sepet ile yakala</a:t>
             </a:r>
           </a:p>
@@ -9778,6 +11981,7 @@
               <a:defRPr sz="1700"/>
             </a:pPr>
             <a:r>
+              <a:rPr sz="1400"/>
               <a:t>    • Puan kazan!</a:t>
             </a:r>
           </a:p>
@@ -9797,6 +12001,7 @@
               <a:defRPr sz="1900" b="1"/>
             </a:pPr>
             <a:r>
+              <a:rPr sz="1400"/>
               <a:t>🎯 Sprite'lar:</a:t>
             </a:r>
           </a:p>
@@ -9808,6 +12013,7 @@
               <a:defRPr sz="1700"/>
             </a:pPr>
             <a:r>
+              <a:rPr sz="1400"/>
               <a:t>    • Sepet (oyuncu)</a:t>
             </a:r>
           </a:p>
@@ -9819,6 +12025,7 @@
               <a:defRPr sz="1700"/>
             </a:pPr>
             <a:r>
+              <a:rPr sz="1400"/>
               <a:t>    • Meyve (elma, muz, vs.)</a:t>
             </a:r>
           </a:p>
@@ -9838,6 +12045,7 @@
               <a:defRPr sz="1900" b="1"/>
             </a:pPr>
             <a:r>
+              <a:rPr sz="1400"/>
               <a:t>📌 Sepet Kodu:</a:t>
             </a:r>
           </a:p>
@@ -9849,6 +12057,7 @@
               <a:defRPr sz="1900"/>
             </a:pPr>
             <a:r>
+              <a:rPr sz="1400"/>
               <a:t>[puan değişkeni = 0]</a:t>
             </a:r>
           </a:p>
@@ -9860,6 +12069,7 @@
               <a:defRPr sz="1900"/>
             </a:pPr>
             <a:r>
+              <a:rPr sz="1400"/>
               <a:t>[Sürekli tekrarla]</a:t>
             </a:r>
           </a:p>
@@ -9871,6 +12081,7 @@
               <a:defRPr sz="1700"/>
             </a:pPr>
             <a:r>
+              <a:rPr sz="1400"/>
               <a:t>    [x = fare x]</a:t>
             </a:r>
           </a:p>
@@ -9890,6 +12101,7 @@
               <a:defRPr sz="1900" b="1"/>
             </a:pPr>
             <a:r>
+              <a:rPr sz="1400"/>
               <a:t>📌 Meyve Kodu:</a:t>
             </a:r>
           </a:p>
@@ -9901,6 +12113,7 @@
               <a:defRPr sz="1900"/>
             </a:pPr>
             <a:r>
+              <a:rPr sz="1400"/>
               <a:t>[Yeşil bayrak tıklandığında]</a:t>
             </a:r>
           </a:p>
@@ -9912,6 +12125,7 @@
               <a:defRPr sz="1900"/>
             </a:pPr>
             <a:r>
+              <a:rPr sz="1400"/>
               <a:t>[Sürekli tekrarla]</a:t>
             </a:r>
           </a:p>
@@ -9923,6 +12137,7 @@
               <a:defRPr sz="1700"/>
             </a:pPr>
             <a:r>
+              <a:rPr sz="1400"/>
               <a:t>    [Rastgele x konumuna git, y = 180]</a:t>
             </a:r>
           </a:p>
@@ -9934,6 +12149,7 @@
               <a:defRPr sz="1700"/>
             </a:pPr>
             <a:r>
+              <a:rPr sz="1400"/>
               <a:t>    [... olana kadar tekrarla: y &lt; -180]</a:t>
             </a:r>
           </a:p>
@@ -9945,6 +12161,7 @@
               <a:defRPr sz="1700"/>
             </a:pPr>
             <a:r>
+              <a:rPr sz="1400"/>
               <a:t>        [y'yi 10 azalt]</a:t>
             </a:r>
           </a:p>
@@ -9956,6 +12173,7 @@
               <a:defRPr sz="1700"/>
             </a:pPr>
             <a:r>
+              <a:rPr sz="1400"/>
               <a:t>        [Eğer [Sepet]'e değiyor ise]</a:t>
             </a:r>
           </a:p>
@@ -9967,6 +12185,7 @@
               <a:defRPr sz="1700"/>
             </a:pPr>
             <a:r>
+              <a:rPr sz="1400"/>
               <a:t>            [puan'ı 1 arttır]</a:t>
             </a:r>
           </a:p>
@@ -9978,6 +12197,7 @@
               <a:defRPr sz="1700"/>
             </a:pPr>
             <a:r>
+              <a:rPr sz="1400"/>
               <a:t>            [Bu betiği durdur]</a:t>
             </a:r>
           </a:p>
@@ -9989,6 +12209,7 @@
               <a:defRPr sz="1700"/>
             </a:pPr>
             <a:r>
+              <a:rPr sz="1400"/>
               <a:t>    [Klon oluştur]</a:t>
             </a:r>
           </a:p>
@@ -10008,6 +12229,7 @@
               <a:defRPr sz="1900" b="1"/>
             </a:pPr>
             <a:r>
+              <a:rPr sz="1400"/>
               <a:t>💡 Klonlama = Çok meyve oluştur!</a:t>
             </a:r>
           </a:p>
@@ -10027,6 +12249,7 @@
               <a:defRPr sz="1900" b="1"/>
             </a:pPr>
             <a:r>
+              <a:rPr sz="1400"/>
               <a:t>⚡ Geliştirme: Bomba ekle, kaçırırsan can kaybedersin</a:t>
             </a:r>
           </a:p>
@@ -10125,6 +12348,7 @@
               <a:defRPr sz="1900"/>
             </a:pPr>
             <a:r>
+              <a:rPr sz="1400"/>
               <a:t>Klasik Snake oyunu!</a:t>
             </a:r>
           </a:p>
@@ -10144,6 +12368,7 @@
               <a:defRPr sz="1900" b="1"/>
             </a:pPr>
             <a:r>
+              <a:rPr sz="1400"/>
               <a:t>✅ Oyun Mekanik:</a:t>
             </a:r>
           </a:p>
@@ -10155,6 +12380,7 @@
               <a:defRPr sz="1700"/>
             </a:pPr>
             <a:r>
+              <a:rPr sz="1400"/>
               <a:t>    • Yılan hareket eder</a:t>
             </a:r>
           </a:p>
@@ -10166,6 +12392,7 @@
               <a:defRPr sz="1700"/>
             </a:pPr>
             <a:r>
+              <a:rPr sz="1400"/>
               <a:t>    • Yemi ye, büyü</a:t>
             </a:r>
           </a:p>
@@ -10177,6 +12404,7 @@
               <a:defRPr sz="1700"/>
             </a:pPr>
             <a:r>
+              <a:rPr sz="1400"/>
               <a:t>    • Kendine çarparsa kaybedersin</a:t>
             </a:r>
           </a:p>
@@ -10196,6 +12424,7 @@
               <a:defRPr sz="1900" b="1"/>
             </a:pPr>
             <a:r>
+              <a:rPr sz="1400"/>
               <a:t>🎯 Bu proje biraz zor! Adım adım:</a:t>
             </a:r>
           </a:p>
@@ -10215,6 +12444,7 @@
               <a:defRPr sz="1900"/>
             </a:pPr>
             <a:r>
+              <a:rPr sz="1400"/>
               <a:t>1️⃣ Baş sprite'ı hareket ettir (ok tuşları)</a:t>
             </a:r>
           </a:p>
@@ -10234,6 +12464,7 @@
               <a:defRPr sz="1900"/>
             </a:pPr>
             <a:r>
+              <a:rPr sz="1400"/>
               <a:t>2️⃣ Her hareket sonrası:</a:t>
             </a:r>
           </a:p>
@@ -10245,6 +12476,7 @@
               <a:defRPr sz="1700"/>
             </a:pPr>
             <a:r>
+              <a:rPr sz="1400"/>
               <a:t>    • Pozisyonu listeye ekle</a:t>
             </a:r>
           </a:p>
@@ -10264,6 +12496,7 @@
               <a:defRPr sz="1900"/>
             </a:pPr>
             <a:r>
+              <a:rPr sz="1400"/>
               <a:t>3️⃣ Vücut segmentleri:</a:t>
             </a:r>
           </a:p>
@@ -10275,6 +12508,7 @@
               <a:defRPr sz="1700"/>
             </a:pPr>
             <a:r>
+              <a:rPr sz="1400"/>
               <a:t>    • Klonlar oluştur</a:t>
             </a:r>
           </a:p>
@@ -10286,6 +12520,7 @@
               <a:defRPr sz="1700"/>
             </a:pPr>
             <a:r>
+              <a:rPr sz="1400"/>
               <a:t>    • Liste'deki pozisyonları takip et</a:t>
             </a:r>
           </a:p>
@@ -10305,6 +12540,7 @@
               <a:defRPr sz="1900"/>
             </a:pPr>
             <a:r>
+              <a:rPr sz="1400"/>
               <a:t>4️⃣ Yem sistemi:</a:t>
             </a:r>
           </a:p>
@@ -10316,6 +12552,7 @@
               <a:defRPr sz="1700"/>
             </a:pPr>
             <a:r>
+              <a:rPr sz="1400"/>
               <a:t>    • Rastgele yem oluştur</a:t>
             </a:r>
           </a:p>
@@ -10327,6 +12564,7 @@
               <a:defRPr sz="1700"/>
             </a:pPr>
             <a:r>
+              <a:rPr sz="1400"/>
               <a:t>    • Yenirse puan arttır ve yılan büyüsün</a:t>
             </a:r>
           </a:p>
@@ -10346,6 +12584,7 @@
               <a:defRPr sz="1900"/>
             </a:pPr>
             <a:r>
+              <a:rPr sz="1400"/>
               <a:t>5️⃣ Kaybetme koşulu:</a:t>
             </a:r>
           </a:p>
@@ -10357,6 +12596,7 @@
               <a:defRPr sz="1700"/>
             </a:pPr>
             <a:r>
+              <a:rPr sz="1400"/>
               <a:t>    • Kendine değerse</a:t>
             </a:r>
           </a:p>
@@ -10368,6 +12608,7 @@
               <a:defRPr sz="1700"/>
             </a:pPr>
             <a:r>
+              <a:rPr sz="1400"/>
               <a:t>    • Duvara çarparsa</a:t>
             </a:r>
           </a:p>
@@ -10387,6 +12628,7 @@
               <a:defRPr sz="1900" b="1"/>
             </a:pPr>
             <a:r>
+              <a:rPr sz="1400"/>
               <a:t>💡 Bu proje ileri seviye!</a:t>
             </a:r>
           </a:p>
@@ -10398,6 +12640,7 @@
               <a:defRPr sz="1900"/>
             </a:pPr>
             <a:r>
+              <a:rPr sz="1400"/>
               <a:t>Liste ve klonlama kullanır.</a:t>
             </a:r>
           </a:p>
@@ -10496,6 +12739,7 @@
               <a:defRPr sz="1900"/>
             </a:pPr>
             <a:r>
+              <a:rPr sz="1600"/>
               <a:t>Paint benzeri çizim uygulaması!</a:t>
             </a:r>
           </a:p>
@@ -10515,6 +12759,7 @@
               <a:defRPr sz="1900" b="1"/>
             </a:pPr>
             <a:r>
+              <a:rPr sz="1600"/>
               <a:t>✅ Özellikler:</a:t>
             </a:r>
           </a:p>
@@ -10526,6 +12771,7 @@
               <a:defRPr sz="1700"/>
             </a:pPr>
             <a:r>
+              <a:rPr sz="1600"/>
               <a:t>    • Fare ile çiz</a:t>
             </a:r>
           </a:p>
@@ -10537,6 +12783,7 @@
               <a:defRPr sz="1700"/>
             </a:pPr>
             <a:r>
+              <a:rPr sz="1600"/>
               <a:t>    • Renk seç</a:t>
             </a:r>
           </a:p>
@@ -10548,6 +12795,7 @@
               <a:defRPr sz="1700"/>
             </a:pPr>
             <a:r>
+              <a:rPr sz="1600"/>
               <a:t>    • Kalınlık ayarla</a:t>
             </a:r>
           </a:p>
@@ -10559,6 +12807,7 @@
               <a:defRPr sz="1700"/>
             </a:pPr>
             <a:r>
+              <a:rPr sz="1600"/>
               <a:t>    • Temizle</a:t>
             </a:r>
           </a:p>
@@ -10578,6 +12827,7 @@
               <a:defRPr sz="1900" b="1"/>
             </a:pPr>
             <a:r>
+              <a:rPr sz="1600"/>
               <a:t>🎯 Nasıl Yapılır?</a:t>
             </a:r>
           </a:p>
@@ -10597,6 +12847,7 @@
               <a:defRPr sz="1900" b="1"/>
             </a:pPr>
             <a:r>
+              <a:rPr sz="1600"/>
               <a:t>📌 Çizim Kodu:</a:t>
             </a:r>
           </a:p>
@@ -10608,6 +12859,7 @@
               <a:defRPr sz="1900"/>
             </a:pPr>
             <a:r>
+              <a:rPr sz="1600"/>
               <a:t>[Yeşil bayrak tıklandığında]</a:t>
             </a:r>
           </a:p>
@@ -10619,6 +12871,7 @@
               <a:defRPr sz="1900"/>
             </a:pPr>
             <a:r>
+              <a:rPr sz="1600"/>
               <a:t>[Kalemi kaldır]</a:t>
             </a:r>
           </a:p>
@@ -10630,6 +12883,7 @@
               <a:defRPr sz="1900"/>
             </a:pPr>
             <a:r>
+              <a:rPr sz="1600"/>
               <a:t>[Sürekli tekrarla]</a:t>
             </a:r>
           </a:p>
@@ -10641,6 +12895,7 @@
               <a:defRPr sz="1700"/>
             </a:pPr>
             <a:r>
+              <a:rPr sz="1600"/>
               <a:t>    [Fare x, fare y konumuna git]</a:t>
             </a:r>
           </a:p>
@@ -10652,6 +12907,7 @@
               <a:defRPr sz="1700"/>
             </a:pPr>
             <a:r>
+              <a:rPr sz="1600"/>
               <a:t>    [Eğer fare tıklandı ise]</a:t>
             </a:r>
           </a:p>
@@ -10663,6 +12919,7 @@
               <a:defRPr sz="1700"/>
             </a:pPr>
             <a:r>
+              <a:rPr sz="1600"/>
               <a:t>        [Kalemi indir]</a:t>
             </a:r>
           </a:p>
@@ -10674,6 +12931,7 @@
               <a:defRPr sz="1700"/>
             </a:pPr>
             <a:r>
+              <a:rPr sz="1600"/>
               <a:t>    [Değilse]</a:t>
             </a:r>
           </a:p>
@@ -10685,6 +12943,7 @@
               <a:defRPr sz="1700"/>
             </a:pPr>
             <a:r>
+              <a:rPr sz="1600"/>
               <a:t>        [Kalemi kaldır]</a:t>
             </a:r>
           </a:p>
@@ -10704,6 +12963,7 @@
               <a:defRPr sz="1900" b="1"/>
             </a:pPr>
             <a:r>
+              <a:rPr sz="1600"/>
               <a:t>📌 Renk Değiştirme:</a:t>
             </a:r>
           </a:p>
@@ -10715,6 +12975,7 @@
               <a:defRPr sz="1900"/>
             </a:pPr>
             <a:r>
+              <a:rPr sz="1600"/>
               <a:t>[Kırmızı sprite'a tıklandığında]</a:t>
             </a:r>
           </a:p>
@@ -10726,6 +12987,7 @@
               <a:defRPr sz="1900"/>
             </a:pPr>
             <a:r>
+              <a:rPr sz="1600"/>
               <a:t>[Kalem rengini kırmızı yap]</a:t>
             </a:r>
           </a:p>
@@ -10745,6 +13007,7 @@
               <a:defRPr sz="1900" b="1"/>
             </a:pPr>
             <a:r>
+              <a:rPr sz="1600"/>
               <a:t>📌 Temizleme:</a:t>
             </a:r>
           </a:p>
@@ -10756,6 +13019,7 @@
               <a:defRPr sz="1900"/>
             </a:pPr>
             <a:r>
+              <a:rPr sz="1600"/>
               <a:t>[C tuşuna basıldığında]</a:t>
             </a:r>
           </a:p>
@@ -10767,6 +13031,7 @@
               <a:defRPr sz="1900"/>
             </a:pPr>
             <a:r>
+              <a:rPr sz="1600"/>
               <a:t>[Hepsini temizle]</a:t>
             </a:r>
           </a:p>
@@ -10786,6 +13051,7 @@
               <a:defRPr sz="1900" b="1"/>
             </a:pPr>
             <a:r>
+              <a:rPr sz="1600"/>
               <a:t>💡 Kalem uzantısı kullan!</a:t>
             </a:r>
           </a:p>
@@ -10797,6 +13063,7 @@
               <a:defRPr sz="1900"/>
             </a:pPr>
             <a:r>
+              <a:rPr sz="1600"/>
               <a:t>Ek → Kalem</a:t>
             </a:r>
           </a:p>
@@ -10895,6 +13162,7 @@
               <a:defRPr sz="1900"/>
             </a:pPr>
             <a:r>
+              <a:rPr sz="1600"/>
               <a:t>İnteraktif soru-cevap oyunu!</a:t>
             </a:r>
           </a:p>
@@ -10914,6 +13182,7 @@
               <a:defRPr sz="1900" b="1"/>
             </a:pPr>
             <a:r>
+              <a:rPr sz="1600"/>
               <a:t>✅ Oyun Mekanik:</a:t>
             </a:r>
           </a:p>
@@ -10925,6 +13194,7 @@
               <a:defRPr sz="1700"/>
             </a:pPr>
             <a:r>
+              <a:rPr sz="1600"/>
               <a:t>    • Soru sor</a:t>
             </a:r>
           </a:p>
@@ -10936,6 +13206,7 @@
               <a:defRPr sz="1700"/>
             </a:pPr>
             <a:r>
+              <a:rPr sz="1600"/>
               <a:t>    • Cevap al</a:t>
             </a:r>
           </a:p>
@@ -10947,6 +13218,7 @@
               <a:defRPr sz="1700"/>
             </a:pPr>
             <a:r>
+              <a:rPr sz="1600"/>
               <a:t>    • Doğru/Yanlış kontrol et</a:t>
             </a:r>
           </a:p>
@@ -10958,6 +13230,7 @@
               <a:defRPr sz="1700"/>
             </a:pPr>
             <a:r>
+              <a:rPr sz="1600"/>
               <a:t>    • Puan ver</a:t>
             </a:r>
           </a:p>
@@ -10977,6 +13250,7 @@
               <a:defRPr sz="1900" b="1"/>
             </a:pPr>
             <a:r>
+              <a:rPr sz="1600"/>
               <a:t>📌 Basit Quiz Kodu:</a:t>
             </a:r>
           </a:p>
@@ -10988,6 +13262,7 @@
               <a:defRPr sz="1900"/>
             </a:pPr>
             <a:r>
+              <a:rPr sz="1600"/>
               <a:t>[puan = 0]</a:t>
             </a:r>
           </a:p>
@@ -11007,6 +13282,7 @@
               <a:defRPr sz="1900"/>
             </a:pPr>
             <a:r>
+              <a:rPr sz="1600"/>
               <a:t>[Türkiye'nin başkenti? sor ve bekle]</a:t>
             </a:r>
           </a:p>
@@ -11018,6 +13294,7 @@
               <a:defRPr sz="1900"/>
             </a:pPr>
             <a:r>
+              <a:rPr sz="1600"/>
               <a:t>[Eğer cevap = Ankara ise]</a:t>
             </a:r>
           </a:p>
@@ -11029,6 +13306,7 @@
               <a:defRPr sz="1700"/>
             </a:pPr>
             <a:r>
+              <a:rPr sz="1600"/>
               <a:t>    [Doğru! de]</a:t>
             </a:r>
           </a:p>
@@ -11040,6 +13318,7 @@
               <a:defRPr sz="1700"/>
             </a:pPr>
             <a:r>
+              <a:rPr sz="1600"/>
               <a:t>    [puan'ı 1 arttır]</a:t>
             </a:r>
           </a:p>
@@ -11051,6 +13330,7 @@
               <a:defRPr sz="1900"/>
             </a:pPr>
             <a:r>
+              <a:rPr sz="1600"/>
               <a:t>[Değilse]</a:t>
             </a:r>
           </a:p>
@@ -11062,6 +13342,7 @@
               <a:defRPr sz="1700"/>
             </a:pPr>
             <a:r>
+              <a:rPr sz="1600"/>
               <a:t>    [Yanlış! de]</a:t>
             </a:r>
           </a:p>
@@ -11081,6 +13362,7 @@
               <a:defRPr sz="1900"/>
             </a:pPr>
             <a:r>
+              <a:rPr sz="1600"/>
               <a:t>[2+2 kaç? sor ve bekle]</a:t>
             </a:r>
           </a:p>
@@ -11092,6 +13374,7 @@
               <a:defRPr sz="1900"/>
             </a:pPr>
             <a:r>
+              <a:rPr sz="1600"/>
               <a:t>[Eğer cevap = 4 ise]</a:t>
             </a:r>
           </a:p>
@@ -11103,6 +13386,7 @@
               <a:defRPr sz="1700"/>
             </a:pPr>
             <a:r>
+              <a:rPr sz="1600"/>
               <a:t>    [Doğru! de]</a:t>
             </a:r>
           </a:p>
@@ -11114,6 +13398,7 @@
               <a:defRPr sz="1700"/>
             </a:pPr>
             <a:r>
+              <a:rPr sz="1600"/>
               <a:t>    [puan'ı 1 arttır]</a:t>
             </a:r>
           </a:p>
@@ -11133,6 +13418,7 @@
               <a:defRPr sz="1900"/>
             </a:pPr>
             <a:r>
+              <a:rPr sz="1600"/>
               <a:t>[Puanın: ... puan de]</a:t>
             </a:r>
           </a:p>
@@ -11152,6 +13438,7 @@
               <a:defRPr sz="1900" b="1"/>
             </a:pPr>
             <a:r>
+              <a:rPr sz="1600"/>
               <a:t>💡 Geliştirme:</a:t>
             </a:r>
           </a:p>
@@ -11163,6 +13450,7 @@
               <a:defRPr sz="1700"/>
             </a:pPr>
             <a:r>
+              <a:rPr sz="1600"/>
               <a:t>    • Soruları listeye koy</a:t>
             </a:r>
           </a:p>
@@ -11174,6 +13462,7 @@
               <a:defRPr sz="1700"/>
             </a:pPr>
             <a:r>
+              <a:rPr sz="1600"/>
               <a:t>    • Şıklı sorular yap</a:t>
             </a:r>
           </a:p>
@@ -11185,6 +13474,7 @@
               <a:defRPr sz="1700"/>
             </a:pPr>
             <a:r>
+              <a:rPr sz="1600"/>
               <a:t>    • Zamanlayıcı ekle</a:t>
             </a:r>
           </a:p>
@@ -11283,6 +13573,7 @@
               <a:defRPr sz="1900"/>
             </a:pPr>
             <a:r>
+              <a:rPr sz="1400"/>
               <a:t>Oyununu müzik ve ses efektleri ile canlandır!</a:t>
             </a:r>
           </a:p>
@@ -11302,6 +13593,7 @@
               <a:defRPr sz="1900" b="1"/>
             </a:pPr>
             <a:r>
+              <a:rPr sz="1400"/>
               <a:t>✅ Müzik Ekleme:</a:t>
             </a:r>
           </a:p>
@@ -11313,6 +13605,7 @@
               <a:defRPr sz="1700"/>
             </a:pPr>
             <a:r>
+              <a:rPr sz="1400"/>
               <a:t>    • Sesler sekmesi</a:t>
             </a:r>
           </a:p>
@@ -11324,6 +13617,7 @@
               <a:defRPr sz="1700"/>
             </a:pPr>
             <a:r>
+              <a:rPr sz="1400"/>
               <a:t>    • Kütüphaneden müzik seç</a:t>
             </a:r>
           </a:p>
@@ -11335,6 +13629,7 @@
               <a:defRPr sz="1700"/>
             </a:pPr>
             <a:r>
+              <a:rPr sz="1400"/>
               <a:t>    • Loop (döngü) yap</a:t>
             </a:r>
           </a:p>
@@ -11354,6 +13649,7 @@
               <a:defRPr sz="1900" b="1"/>
             </a:pPr>
             <a:r>
+              <a:rPr sz="1400"/>
               <a:t>📌 Arka Plan Müziği:</a:t>
             </a:r>
           </a:p>
@@ -11365,6 +13661,7 @@
               <a:defRPr sz="1900"/>
             </a:pPr>
             <a:r>
+              <a:rPr sz="1400"/>
               <a:t>[Yeşil bayrak tıklandığında]</a:t>
             </a:r>
           </a:p>
@@ -11376,6 +13673,7 @@
               <a:defRPr sz="1900"/>
             </a:pPr>
             <a:r>
+              <a:rPr sz="1400"/>
               <a:t>[Sürekli tekrarla]</a:t>
             </a:r>
           </a:p>
@@ -11387,6 +13685,7 @@
               <a:defRPr sz="1700"/>
             </a:pPr>
             <a:r>
+              <a:rPr sz="1400"/>
               <a:t>    [... müziğini çal ve bekle]</a:t>
             </a:r>
           </a:p>
@@ -11406,6 +13705,7 @@
               <a:defRPr sz="1900" b="1"/>
             </a:pPr>
             <a:r>
+              <a:rPr sz="1400"/>
               <a:t>✅ Ses Efektleri:</a:t>
             </a:r>
           </a:p>
@@ -11417,6 +13717,7 @@
               <a:defRPr sz="1700"/>
             </a:pPr>
             <a:r>
+              <a:rPr sz="1400"/>
               <a:t>    • Zıplama sesi</a:t>
             </a:r>
           </a:p>
@@ -11428,6 +13729,7 @@
               <a:defRPr sz="1700"/>
             </a:pPr>
             <a:r>
+              <a:rPr sz="1400"/>
               <a:t>    • Puan kazanma sesi</a:t>
             </a:r>
           </a:p>
@@ -11439,6 +13741,7 @@
               <a:defRPr sz="1700"/>
             </a:pPr>
             <a:r>
+              <a:rPr sz="1400"/>
               <a:t>    • Kaybetme sesi</a:t>
             </a:r>
           </a:p>
@@ -11458,6 +13761,7 @@
               <a:defRPr sz="1900" b="1"/>
             </a:pPr>
             <a:r>
+              <a:rPr sz="1400"/>
               <a:t>📌 Örnek:</a:t>
             </a:r>
           </a:p>
@@ -11469,6 +13773,7 @@
               <a:defRPr sz="1900"/>
             </a:pPr>
             <a:r>
+              <a:rPr sz="1400"/>
               <a:t>[Eğer [Elma]'ya değiyor ise]</a:t>
             </a:r>
           </a:p>
@@ -11480,6 +13785,7 @@
               <a:defRPr sz="1700"/>
             </a:pPr>
             <a:r>
+              <a:rPr sz="1400"/>
               <a:t>    [Chomp sesini çal]</a:t>
             </a:r>
           </a:p>
@@ -11491,6 +13797,7 @@
               <a:defRPr sz="1700"/>
             </a:pPr>
             <a:r>
+              <a:rPr sz="1400"/>
               <a:t>    [puan'ı 1 arttır]</a:t>
             </a:r>
           </a:p>
@@ -11510,6 +13817,7 @@
               <a:defRPr sz="1900" b="1"/>
             </a:pPr>
             <a:r>
+              <a:rPr sz="1400"/>
               <a:t>💡 Kendi Ses Kaydı:</a:t>
             </a:r>
           </a:p>
@@ -11521,6 +13829,7 @@
               <a:defRPr sz="1700"/>
             </a:pPr>
             <a:r>
+              <a:rPr sz="1400"/>
               <a:t>    • Mikrofon simgesine tıkla</a:t>
             </a:r>
           </a:p>
@@ -11532,6 +13841,7 @@
               <a:defRPr sz="1700"/>
             </a:pPr>
             <a:r>
+              <a:rPr sz="1400"/>
               <a:t>    • Ses kaydet</a:t>
             </a:r>
           </a:p>
@@ -11543,6 +13853,7 @@
               <a:defRPr sz="1700"/>
             </a:pPr>
             <a:r>
+              <a:rPr sz="1400"/>
               <a:t>    • Oyunda kullan</a:t>
             </a:r>
           </a:p>
@@ -11562,6 +13873,7 @@
               <a:defRPr sz="1900"/>
             </a:pPr>
             <a:r>
+              <a:rPr sz="1400"/>
               <a:t>🎶 Müzik oyunu daha eğlenceli yapar!</a:t>
             </a:r>
           </a:p>
@@ -11573,6 +13885,7 @@
               <a:defRPr sz="1900"/>
             </a:pPr>
             <a:r>
+              <a:rPr sz="1400"/>
               <a:t>Ancak çok fazla ses kullanma, rahatsız edebilir.</a:t>
             </a:r>
           </a:p>
@@ -11671,6 +13984,7 @@
               <a:defRPr sz="1900"/>
             </a:pPr>
             <a:r>
+              <a:rPr sz="1400"/>
               <a:t>Projen hazır! Şimdi paylaşma zamanı!</a:t>
             </a:r>
           </a:p>
@@ -11690,6 +14004,7 @@
               <a:defRPr sz="1900" b="1"/>
             </a:pPr>
             <a:r>
+              <a:rPr sz="1400"/>
               <a:t>✅ Scratch'te Paylaşma:</a:t>
             </a:r>
           </a:p>
@@ -11709,6 +14024,7 @@
               <a:defRPr sz="1900"/>
             </a:pPr>
             <a:r>
+              <a:rPr sz="1400"/>
               <a:t>1️⃣ Hesabına giriş yap:</a:t>
             </a:r>
           </a:p>
@@ -11720,6 +14036,7 @@
               <a:defRPr sz="1700"/>
             </a:pPr>
             <a:r>
+              <a:rPr sz="1400"/>
               <a:t>    • scratch.mit.edu</a:t>
             </a:r>
           </a:p>
@@ -11739,6 +14056,7 @@
               <a:defRPr sz="1900"/>
             </a:pPr>
             <a:r>
+              <a:rPr sz="1400"/>
               <a:t>2️⃣ Paylaş butonuna tıkla:</a:t>
             </a:r>
           </a:p>
@@ -11750,6 +14068,7 @@
               <a:defRPr sz="1700"/>
             </a:pPr>
             <a:r>
+              <a:rPr sz="1400"/>
               <a:t>    • Sağ üstteki turuncu buton</a:t>
             </a:r>
           </a:p>
@@ -11769,6 +14088,7 @@
               <a:defRPr sz="1900"/>
             </a:pPr>
             <a:r>
+              <a:rPr sz="1400"/>
               <a:t>3️⃣ Bilgileri doldur:</a:t>
             </a:r>
           </a:p>
@@ -11780,6 +14100,7 @@
               <a:defRPr sz="1700"/>
             </a:pPr>
             <a:r>
+              <a:rPr sz="1400"/>
               <a:t>    • Proje adı</a:t>
             </a:r>
           </a:p>
@@ -11791,6 +14112,7 @@
               <a:defRPr sz="1700"/>
             </a:pPr>
             <a:r>
+              <a:rPr sz="1400"/>
               <a:t>    • Açıklama</a:t>
             </a:r>
           </a:p>
@@ -11802,6 +14124,7 @@
               <a:defRPr sz="1700"/>
             </a:pPr>
             <a:r>
+              <a:rPr sz="1400"/>
               <a:t>    • Nasıl oynanır?</a:t>
             </a:r>
           </a:p>
@@ -11821,6 +14144,7 @@
               <a:defRPr sz="1900"/>
             </a:pPr>
             <a:r>
+              <a:rPr sz="1400"/>
               <a:t>4️⃣ Link'i kopyala:</a:t>
             </a:r>
           </a:p>
@@ -11832,6 +14156,7 @@
               <a:defRPr sz="1700"/>
             </a:pPr>
             <a:r>
+              <a:rPr sz="1400"/>
               <a:t>    • Arkadaşlarınla paylaş!</a:t>
             </a:r>
           </a:p>
@@ -11851,6 +14176,7 @@
               <a:defRPr sz="1900" b="1"/>
             </a:pPr>
             <a:r>
+              <a:rPr sz="1400"/>
               <a:t>✅ Scratch Topluluğu:</a:t>
             </a:r>
           </a:p>
@@ -11862,6 +14188,7 @@
               <a:defRPr sz="1700"/>
             </a:pPr>
             <a:r>
+              <a:rPr sz="1400"/>
               <a:t>    • Başkalarının projelerini gör</a:t>
             </a:r>
           </a:p>
@@ -11873,6 +14200,7 @@
               <a:defRPr sz="1700"/>
             </a:pPr>
             <a:r>
+              <a:rPr sz="1400"/>
               <a:t>    • Beğen, yorum yap</a:t>
             </a:r>
           </a:p>
@@ -11884,6 +14212,7 @@
               <a:defRPr sz="1700"/>
             </a:pPr>
             <a:r>
+              <a:rPr sz="1400"/>
               <a:t>    • Remix yap (değiştir)</a:t>
             </a:r>
           </a:p>
@@ -11903,6 +14232,7 @@
               <a:defRPr sz="1900" b="1"/>
             </a:pPr>
             <a:r>
+              <a:rPr sz="1400"/>
               <a:t>💡 Remix Kültürü:</a:t>
             </a:r>
           </a:p>
@@ -11914,6 +14244,7 @@
               <a:defRPr sz="1900"/>
             </a:pPr>
             <a:r>
+              <a:rPr sz="1400"/>
               <a:t>Scratch'te remix yapmak teşvik edilir!</a:t>
             </a:r>
           </a:p>
@@ -11925,6 +14256,7 @@
               <a:defRPr sz="1900"/>
             </a:pPr>
             <a:r>
+              <a:rPr sz="1400"/>
               <a:t>Başkasının projesini al, geliştir, paylaş.</a:t>
             </a:r>
           </a:p>
@@ -11944,6 +14276,7 @@
               <a:defRPr sz="1900"/>
             </a:pPr>
             <a:r>
+              <a:rPr sz="1400"/>
               <a:t>⚠️ Dikkat:</a:t>
             </a:r>
           </a:p>
@@ -11955,6 +14288,7 @@
               <a:defRPr sz="1700"/>
             </a:pPr>
             <a:r>
+              <a:rPr sz="1400"/>
               <a:t>    • Saygılı ol</a:t>
             </a:r>
           </a:p>
@@ -11966,6 +14300,7 @@
               <a:defRPr sz="1700"/>
             </a:pPr>
             <a:r>
+              <a:rPr sz="1400"/>
               <a:t>    • Kredi ver (kim yaptıysa belirt)</a:t>
             </a:r>
           </a:p>
@@ -12064,6 +14399,7 @@
               <a:defRPr sz="1900"/>
             </a:pPr>
             <a:r>
+              <a:rPr sz="1600"/>
               <a:t>Şimdi kendi oyununu tasarla!</a:t>
             </a:r>
           </a:p>
@@ -12083,6 +14419,7 @@
               <a:defRPr sz="1900" b="1"/>
             </a:pPr>
             <a:r>
+              <a:rPr sz="1600"/>
               <a:t>🎯 Proje Gereksinimleri:</a:t>
             </a:r>
           </a:p>
@@ -12102,6 +14439,7 @@
               <a:defRPr sz="1900" b="1"/>
             </a:pPr>
             <a:r>
+              <a:rPr sz="1600"/>
               <a:t>✅ Zorunlu Özellikler:</a:t>
             </a:r>
           </a:p>
@@ -12113,6 +14451,7 @@
               <a:defRPr sz="1700"/>
             </a:pPr>
             <a:r>
+              <a:rPr sz="1600"/>
               <a:t>    • En az 2 sprite</a:t>
             </a:r>
           </a:p>
@@ -12124,6 +14463,7 @@
               <a:defRPr sz="1700"/>
             </a:pPr>
             <a:r>
+              <a:rPr sz="1600"/>
               <a:t>    • Kullanıcı kontrolü (klavye/fare)</a:t>
             </a:r>
           </a:p>
@@ -12135,6 +14475,7 @@
               <a:defRPr sz="1700"/>
             </a:pPr>
             <a:r>
+              <a:rPr sz="1600"/>
               <a:t>    • Puan sistemi</a:t>
             </a:r>
           </a:p>
@@ -12146,6 +14487,7 @@
               <a:defRPr sz="1700"/>
             </a:pPr>
             <a:r>
+              <a:rPr sz="1600"/>
               <a:t>    • Ses efektleri</a:t>
             </a:r>
           </a:p>
@@ -12157,6 +14499,7 @@
               <a:defRPr sz="1700"/>
             </a:pPr>
             <a:r>
+              <a:rPr sz="1600"/>
               <a:t>    • Başlangıç ve bitiş ekranı</a:t>
             </a:r>
           </a:p>
@@ -12176,6 +14519,7 @@
               <a:defRPr sz="1900" b="1"/>
             </a:pPr>
             <a:r>
+              <a:rPr sz="1600"/>
               <a:t>✅ Kullanılması Gereken Bloklar:</a:t>
             </a:r>
           </a:p>
@@ -12187,6 +14531,7 @@
               <a:defRPr sz="1700"/>
             </a:pPr>
             <a:r>
+              <a:rPr sz="1600"/>
               <a:t>    • Döngüler</a:t>
             </a:r>
           </a:p>
@@ -12198,6 +14543,7 @@
               <a:defRPr sz="1700"/>
             </a:pPr>
             <a:r>
+              <a:rPr sz="1600"/>
               <a:t>    • Koşullar</a:t>
             </a:r>
           </a:p>
@@ -12209,6 +14555,7 @@
               <a:defRPr sz="1700"/>
             </a:pPr>
             <a:r>
+              <a:rPr sz="1600"/>
               <a:t>    • Değişkenler</a:t>
             </a:r>
           </a:p>
@@ -12220,6 +14567,7 @@
               <a:defRPr sz="1700"/>
             </a:pPr>
             <a:r>
+              <a:rPr sz="1600"/>
               <a:t>    • Olaylar</a:t>
             </a:r>
           </a:p>
@@ -12239,6 +14587,7 @@
               <a:defRPr sz="1900" b="1"/>
             </a:pPr>
             <a:r>
+              <a:rPr sz="1600"/>
               <a:t>💡 Proje Fikirleri:</a:t>
             </a:r>
           </a:p>
@@ -12250,6 +14599,7 @@
               <a:defRPr sz="1700"/>
             </a:pPr>
             <a:r>
+              <a:rPr sz="1600"/>
               <a:t>    • Platform oyunu</a:t>
             </a:r>
           </a:p>
@@ -12261,6 +14611,7 @@
               <a:defRPr sz="1700"/>
             </a:pPr>
             <a:r>
+              <a:rPr sz="1600"/>
               <a:t>    • Yarış oyunu</a:t>
             </a:r>
           </a:p>
@@ -12272,6 +14623,7 @@
               <a:defRPr sz="1700"/>
             </a:pPr>
             <a:r>
+              <a:rPr sz="1600"/>
               <a:t>    • Bulmaca oyunu</a:t>
             </a:r>
           </a:p>
@@ -12283,6 +14635,7 @@
               <a:defRPr sz="1700"/>
             </a:pPr>
             <a:r>
+              <a:rPr sz="1600"/>
               <a:t>    • Simülasyon</a:t>
             </a:r>
           </a:p>
@@ -12294,6 +14647,7 @@
               <a:defRPr sz="1700"/>
             </a:pPr>
             <a:r>
+              <a:rPr sz="1600"/>
               <a:t>    • Hikaye anlatımı</a:t>
             </a:r>
           </a:p>
@@ -12313,6 +14667,7 @@
               <a:defRPr sz="1900"/>
             </a:pPr>
             <a:r>
+              <a:rPr sz="1600"/>
               <a:t>📅 Süreç:</a:t>
             </a:r>
           </a:p>
@@ -12324,6 +14679,7 @@
               <a:defRPr sz="1900"/>
             </a:pPr>
             <a:r>
+              <a:rPr sz="1600"/>
               <a:t>1️⃣ Fikir (1 gün)</a:t>
             </a:r>
           </a:p>
@@ -12335,6 +14691,7 @@
               <a:defRPr sz="1900"/>
             </a:pPr>
             <a:r>
+              <a:rPr sz="1600"/>
               <a:t>2️⃣ Planlama (1 gün)</a:t>
             </a:r>
           </a:p>
@@ -12346,6 +14703,7 @@
               <a:defRPr sz="1900"/>
             </a:pPr>
             <a:r>
+              <a:rPr sz="1600"/>
               <a:t>3️⃣ Kodlama (1 hafta)</a:t>
             </a:r>
           </a:p>
@@ -12357,6 +14715,7 @@
               <a:defRPr sz="1900"/>
             </a:pPr>
             <a:r>
+              <a:rPr sz="1600"/>
               <a:t>4️⃣ Test (1 gün)</a:t>
             </a:r>
           </a:p>
@@ -12368,6 +14727,7 @@
               <a:defRPr sz="1900"/>
             </a:pPr>
             <a:r>
+              <a:rPr sz="1600"/>
               <a:t>5️⃣ Sunum (1 gün)</a:t>
             </a:r>
           </a:p>
@@ -12466,6 +14826,7 @@
               <a:defRPr sz="1900"/>
             </a:pPr>
             <a:r>
+              <a:rPr sz="1400"/>
               <a:t>Bu ünitede neler öğrendik? (Çok şey!)</a:t>
             </a:r>
           </a:p>
@@ -12485,6 +14846,7 @@
               <a:defRPr sz="1900" b="1"/>
             </a:pPr>
             <a:r>
+              <a:rPr sz="1400"/>
               <a:t>✅ Scratch temelleri ve arayüz</a:t>
             </a:r>
           </a:p>
@@ -12496,6 +14858,7 @@
               <a:defRPr sz="1900" b="1"/>
             </a:pPr>
             <a:r>
+              <a:rPr sz="1400"/>
               <a:t>✅ Sprite, sahne, koordinat sistemi</a:t>
             </a:r>
           </a:p>
@@ -12507,6 +14870,7 @@
               <a:defRPr sz="1900" b="1"/>
             </a:pPr>
             <a:r>
+              <a:rPr sz="1400"/>
               <a:t>✅ Hareket, görünüm, ses blokları</a:t>
             </a:r>
           </a:p>
@@ -12518,6 +14882,7 @@
               <a:defRPr sz="1900" b="1"/>
             </a:pPr>
             <a:r>
+              <a:rPr sz="1400"/>
               <a:t>✅ Olaylar ve kullanıcı etkileşimi</a:t>
             </a:r>
           </a:p>
@@ -12529,6 +14894,7 @@
               <a:defRPr sz="1900" b="1"/>
             </a:pPr>
             <a:r>
+              <a:rPr sz="1400"/>
               <a:t>✅ Döngüler (tekrar) ve koşullar (if-else)</a:t>
             </a:r>
           </a:p>
@@ -12540,6 +14906,7 @@
               <a:defRPr sz="1900" b="1"/>
             </a:pPr>
             <a:r>
+              <a:rPr sz="1400"/>
               <a:t>✅ Değişkenler ve listeler</a:t>
             </a:r>
           </a:p>
@@ -12551,6 +14918,7 @@
               <a:defRPr sz="1900" b="1"/>
             </a:pPr>
             <a:r>
+              <a:rPr sz="1400"/>
               <a:t>✅ Operatörler (matematik, mantık)</a:t>
             </a:r>
           </a:p>
@@ -12562,6 +14930,7 @@
               <a:defRPr sz="1900" b="1"/>
             </a:pPr>
             <a:r>
+              <a:rPr sz="1400"/>
               <a:t>✅ Algılama (çarpışma, tuş kontrolü)</a:t>
             </a:r>
           </a:p>
@@ -12573,6 +14942,7 @@
               <a:defRPr sz="1900" b="1"/>
             </a:pPr>
             <a:r>
+              <a:rPr sz="1400"/>
               <a:t>✅ Kendi bloklarını oluşturma</a:t>
             </a:r>
           </a:p>
@@ -12584,6 +14954,7 @@
               <a:defRPr sz="1900" b="1"/>
             </a:pPr>
             <a:r>
+              <a:rPr sz="1400"/>
               <a:t>✅ 6 farklı proje (labirent, top sektirme, meyve yakalama, yılan, çizim, quiz)</a:t>
             </a:r>
           </a:p>
@@ -12595,6 +14966,7 @@
               <a:defRPr sz="1900" b="1"/>
             </a:pPr>
             <a:r>
+              <a:rPr sz="1400"/>
               <a:t>✅ Müzik ve ses efektleri</a:t>
             </a:r>
           </a:p>
@@ -12606,6 +14978,7 @@
               <a:defRPr sz="1900" b="1"/>
             </a:pPr>
             <a:r>
+              <a:rPr sz="1400"/>
               <a:t>✅ Proje paylaşma</a:t>
             </a:r>
           </a:p>
@@ -12625,6 +14998,7 @@
               <a:defRPr sz="1900" b="1"/>
             </a:pPr>
             <a:r>
+              <a:rPr sz="1400"/>
               <a:t>💡 Anahtar Mesaj:</a:t>
             </a:r>
           </a:p>
@@ -12636,6 +15010,7 @@
               <a:defRPr sz="1900"/>
             </a:pPr>
             <a:r>
+              <a:rPr sz="1400"/>
               <a:t>Artık kendi oyunlarını programlayabilirsin!</a:t>
             </a:r>
           </a:p>
@@ -12647,6 +15022,7 @@
               <a:defRPr sz="1900"/>
             </a:pPr>
             <a:r>
+              <a:rPr sz="1400"/>
               <a:t>Hayal gücün sınır!</a:t>
             </a:r>
           </a:p>
@@ -12666,6 +15042,7 @@
               <a:defRPr sz="1900" b="1"/>
             </a:pPr>
             <a:r>
+              <a:rPr sz="1400"/>
               <a:t>🎯 Sen artık bir Scratch programcısısın!</a:t>
             </a:r>
           </a:p>
@@ -12677,6 +15054,7 @@
               <a:defRPr sz="1900"/>
             </a:pPr>
             <a:r>
+              <a:rPr sz="1400"/>
               <a:t>🎮 Kendi oyununu yap ve dünyaya göster!</a:t>
             </a:r>
           </a:p>
@@ -12775,6 +15153,7 @@
               <a:defRPr sz="1900"/>
             </a:pPr>
             <a:r>
+              <a:rPr sz="1400"/>
               <a:t>🎥 İzlenecek Videolar:</a:t>
             </a:r>
           </a:p>
@@ -12786,6 +15165,7 @@
               <a:defRPr sz="1700"/>
             </a:pPr>
             <a:r>
+              <a:rPr sz="1400"/>
               <a:t>    • 'Scratch Tutorials' - YouTube</a:t>
             </a:r>
           </a:p>
@@ -12797,6 +15177,7 @@
               <a:defRPr sz="1700"/>
             </a:pPr>
             <a:r>
+              <a:rPr sz="1400"/>
               <a:t>    • 'Griffpatch' kanalı - İleri seviye</a:t>
             </a:r>
           </a:p>
@@ -12808,6 +15189,7 @@
               <a:defRPr sz="1700"/>
             </a:pPr>
             <a:r>
+              <a:rPr sz="1400"/>
               <a:t>    • 'Scratch Team' resmi kanalı</a:t>
             </a:r>
           </a:p>
@@ -12827,6 +15209,7 @@
               <a:defRPr sz="1900"/>
             </a:pPr>
             <a:r>
+              <a:rPr sz="1400"/>
               <a:t>🌐 Keşfedilecek Siteler:</a:t>
             </a:r>
           </a:p>
@@ -12838,6 +15221,7 @@
               <a:defRPr sz="1700"/>
             </a:pPr>
             <a:r>
+              <a:rPr sz="1400"/>
               <a:t>    • https://scratch.mit.edu - Ana site</a:t>
             </a:r>
           </a:p>
@@ -12849,6 +15233,7 @@
               <a:defRPr sz="1700"/>
             </a:pPr>
             <a:r>
+              <a:rPr sz="1400"/>
               <a:t>    • https://scratch.mit.edu/explore - Projeler</a:t>
             </a:r>
           </a:p>
@@ -12860,6 +15245,7 @@
               <a:defRPr sz="1700"/>
             </a:pPr>
             <a:r>
+              <a:rPr sz="1400"/>
               <a:t>    • https://en.scratch-wiki.info - Detaylı bilgi</a:t>
             </a:r>
           </a:p>
@@ -12879,6 +15265,7 @@
               <a:defRPr sz="1900"/>
             </a:pPr>
             <a:r>
+              <a:rPr sz="1400"/>
               <a:t>📖 Yapılacak Projeler:</a:t>
             </a:r>
           </a:p>
@@ -12890,6 +15277,7 @@
               <a:defRPr sz="1700"/>
             </a:pPr>
             <a:r>
+              <a:rPr sz="1400"/>
               <a:t>    • Flappy Bird benzeri oyun</a:t>
             </a:r>
           </a:p>
@@ -12901,6 +15289,7 @@
               <a:defRPr sz="1700"/>
             </a:pPr>
             <a:r>
+              <a:rPr sz="1400"/>
               <a:t>    • Kendi kahramanınla RPG oyunu</a:t>
             </a:r>
           </a:p>
@@ -12912,6 +15301,7 @@
               <a:defRPr sz="1700"/>
             </a:pPr>
             <a:r>
+              <a:rPr sz="1400"/>
               <a:t>    • Müzik yapma uygulaması</a:t>
             </a:r>
           </a:p>
@@ -12923,6 +15313,7 @@
               <a:defRPr sz="1700"/>
             </a:pPr>
             <a:r>
+              <a:rPr sz="1400"/>
               <a:t>    • Matematik oyunu</a:t>
             </a:r>
           </a:p>
@@ -12942,6 +15333,7 @@
               <a:defRPr sz="1900"/>
             </a:pPr>
             <a:r>
+              <a:rPr sz="1400"/>
               <a:t>⬆️ İleri Seviye:</a:t>
             </a:r>
           </a:p>
@@ -12953,6 +15345,7 @@
               <a:defRPr sz="1700"/>
             </a:pPr>
             <a:r>
+              <a:rPr sz="1400"/>
               <a:t>    • Klonlama tekniği</a:t>
             </a:r>
           </a:p>
@@ -12964,6 +15357,7 @@
               <a:defRPr sz="1700"/>
             </a:pPr>
             <a:r>
+              <a:rPr sz="1400"/>
               <a:t>    • Bulut değişkenleri (çok oyunculu)</a:t>
             </a:r>
           </a:p>
@@ -12975,6 +15369,7 @@
               <a:defRPr sz="1700"/>
             </a:pPr>
             <a:r>
+              <a:rPr sz="1400"/>
               <a:t>    • Video algılama uzantısı</a:t>
             </a:r>
           </a:p>
@@ -12986,6 +15381,7 @@
               <a:defRPr sz="1700"/>
             </a:pPr>
             <a:r>
+              <a:rPr sz="1400"/>
               <a:t>    • Scratch'ten sonra: Python, JavaScript</a:t>
             </a:r>
           </a:p>
@@ -13005,6 +15401,7 @@
               <a:defRPr sz="1900" b="1"/>
             </a:pPr>
             <a:r>
+              <a:rPr sz="1400"/>
               <a:t>💡 Programlamaya devam et!</a:t>
             </a:r>
           </a:p>
@@ -13016,6 +15413,7 @@
               <a:defRPr sz="1900"/>
             </a:pPr>
             <a:r>
+              <a:rPr sz="1400"/>
               <a:t>Her gün biraz kod yaz, her gün gelişirsin!</a:t>
             </a:r>
           </a:p>
@@ -13210,6 +15608,7 @@
               <a:defRPr sz="1900"/>
             </a:pPr>
             <a:r>
+              <a:rPr sz="1400"/>
               <a:t>Scratch = Çocuklar için görsel programlama dili</a:t>
             </a:r>
           </a:p>
@@ -13229,6 +15628,7 @@
               <a:defRPr sz="1900" b="1"/>
             </a:pPr>
             <a:r>
+              <a:rPr sz="1400"/>
               <a:t>✅ Özellikler:</a:t>
             </a:r>
           </a:p>
@@ -13240,6 +15640,7 @@
               <a:defRPr sz="1700"/>
             </a:pPr>
             <a:r>
+              <a:rPr sz="1400"/>
               <a:t>    • Ücretsiz</a:t>
             </a:r>
           </a:p>
@@ -13251,6 +15652,7 @@
               <a:defRPr sz="1700"/>
             </a:pPr>
             <a:r>
+              <a:rPr sz="1400"/>
               <a:t>    • Kod yazmadan programlama</a:t>
             </a:r>
           </a:p>
@@ -13262,6 +15664,7 @@
               <a:defRPr sz="1700"/>
             </a:pPr>
             <a:r>
+              <a:rPr sz="1400"/>
               <a:t>    • Blokları sürükle-bırak</a:t>
             </a:r>
           </a:p>
@@ -13273,6 +15676,7 @@
               <a:defRPr sz="1700"/>
             </a:pPr>
             <a:r>
+              <a:rPr sz="1400"/>
               <a:t>    • Oyun, animasyon, hikaye yap</a:t>
             </a:r>
           </a:p>
@@ -13292,6 +15696,7 @@
               <a:defRPr sz="1900" b="1"/>
             </a:pPr>
             <a:r>
+              <a:rPr sz="1400"/>
               <a:t>📌 Kim Yaptı?</a:t>
             </a:r>
           </a:p>
@@ -13303,6 +15708,7 @@
               <a:defRPr sz="1700"/>
             </a:pPr>
             <a:r>
+              <a:rPr sz="1400"/>
               <a:t>    • MIT (Massachusetts Institute of Technology)</a:t>
             </a:r>
           </a:p>
@@ -13314,6 +15720,7 @@
               <a:defRPr sz="1700"/>
             </a:pPr>
             <a:r>
+              <a:rPr sz="1400"/>
               <a:t>    • 2007'de yayınlandı</a:t>
             </a:r>
           </a:p>
@@ -13325,6 +15732,7 @@
               <a:defRPr sz="1700"/>
             </a:pPr>
             <a:r>
+              <a:rPr sz="1400"/>
               <a:t>    • Milyonlarca kullanıcı</a:t>
             </a:r>
           </a:p>
@@ -13344,6 +15752,7 @@
               <a:defRPr sz="1900"/>
             </a:pPr>
             <a:r>
+              <a:rPr sz="1400"/>
               <a:t>🌐 Nasıl Kullanılır?</a:t>
             </a:r>
           </a:p>
@@ -13355,6 +15764,7 @@
               <a:defRPr sz="1700"/>
             </a:pPr>
             <a:r>
+              <a:rPr sz="1400"/>
               <a:t>    • scratch.mit.edu</a:t>
             </a:r>
           </a:p>
@@ -13366,6 +15776,7 @@
               <a:defRPr sz="1700"/>
             </a:pPr>
             <a:r>
+              <a:rPr sz="1400"/>
               <a:t>    • Tarayıcıdan kullan</a:t>
             </a:r>
           </a:p>
@@ -13377,6 +15788,7 @@
               <a:defRPr sz="1700"/>
             </a:pPr>
             <a:r>
+              <a:rPr sz="1400"/>
               <a:t>    • Ücretsiz hesap aç</a:t>
             </a:r>
           </a:p>
@@ -13396,6 +15808,7 @@
               <a:defRPr sz="1900" b="1"/>
             </a:pPr>
             <a:r>
+              <a:rPr sz="1400"/>
               <a:t>💡 Scratch neden harika?</a:t>
             </a:r>
           </a:p>
@@ -13407,6 +15820,7 @@
               <a:defRPr sz="1700"/>
             </a:pPr>
             <a:r>
+              <a:rPr sz="1400"/>
               <a:t>    • Eğlenceli</a:t>
             </a:r>
           </a:p>
@@ -13418,6 +15832,7 @@
               <a:defRPr sz="1700"/>
             </a:pPr>
             <a:r>
+              <a:rPr sz="1400"/>
               <a:t>    • Yaratıcılığı geliştirir</a:t>
             </a:r>
           </a:p>
@@ -13429,6 +15844,7 @@
               <a:defRPr sz="1700"/>
             </a:pPr>
             <a:r>
+              <a:rPr sz="1400"/>
               <a:t>    • Programlama mantığını öğretir</a:t>
             </a:r>
           </a:p>
@@ -13440,6 +15856,7 @@
               <a:defRPr sz="1700"/>
             </a:pPr>
             <a:r>
+              <a:rPr sz="1400"/>
               <a:t>    • Kod yazmadan algoritma öğrenirsin!</a:t>
             </a:r>
           </a:p>
@@ -13538,6 +15955,7 @@
               <a:defRPr sz="1900"/>
             </a:pPr>
             <a:r>
+              <a:rPr sz="1600"/>
               <a:t>Scratch'i açtığında karşına 4 bölüm çıkar:</a:t>
             </a:r>
           </a:p>
@@ -13557,6 +15975,7 @@
               <a:defRPr sz="1900" b="1"/>
             </a:pPr>
             <a:r>
+              <a:rPr sz="1600"/>
               <a:t>✅ 1. Blok Paleti (Sol):</a:t>
             </a:r>
           </a:p>
@@ -13568,6 +15987,7 @@
               <a:defRPr sz="1700"/>
             </a:pPr>
             <a:r>
+              <a:rPr sz="1600"/>
               <a:t>    • Hareket, Görünüm, Ses...</a:t>
             </a:r>
           </a:p>
@@ -13579,6 +15999,7 @@
               <a:defRPr sz="1700"/>
             </a:pPr>
             <a:r>
+              <a:rPr sz="1600"/>
               <a:t>    • Tüm bloklar burada</a:t>
             </a:r>
           </a:p>
@@ -13598,6 +16019,7 @@
               <a:defRPr sz="1900" b="1"/>
             </a:pPr>
             <a:r>
+              <a:rPr sz="1600"/>
               <a:t>✅ 2. Kod Alanı (Orta):</a:t>
             </a:r>
           </a:p>
@@ -13609,6 +16031,7 @@
               <a:defRPr sz="1700"/>
             </a:pPr>
             <a:r>
+              <a:rPr sz="1600"/>
               <a:t>    • Blokları buraya sürüklersin</a:t>
             </a:r>
           </a:p>
@@ -13620,6 +16043,7 @@
               <a:defRPr sz="1700"/>
             </a:pPr>
             <a:r>
+              <a:rPr sz="1600"/>
               <a:t>    • Programını yazarsın</a:t>
             </a:r>
           </a:p>
@@ -13639,6 +16063,7 @@
               <a:defRPr sz="1900" b="1"/>
             </a:pPr>
             <a:r>
+              <a:rPr sz="1600"/>
               <a:t>✅ 3. Sahne (Sağ Üst):</a:t>
             </a:r>
           </a:p>
@@ -13650,6 +16075,7 @@
               <a:defRPr sz="1700"/>
             </a:pPr>
             <a:r>
+              <a:rPr sz="1600"/>
               <a:t>    • Projenin çalıştığı yer</a:t>
             </a:r>
           </a:p>
@@ -13661,6 +16087,7 @@
               <a:defRPr sz="1700"/>
             </a:pPr>
             <a:r>
+              <a:rPr sz="1600"/>
               <a:t>    • 480x360 piksel</a:t>
             </a:r>
           </a:p>
@@ -13672,6 +16099,7 @@
               <a:defRPr sz="1700"/>
             </a:pPr>
             <a:r>
+              <a:rPr sz="1600"/>
               <a:t>    • Yeşil bayrak = Başlat</a:t>
             </a:r>
           </a:p>
@@ -13683,6 +16111,7 @@
               <a:defRPr sz="1700"/>
             </a:pPr>
             <a:r>
+              <a:rPr sz="1600"/>
               <a:t>    • Kırmızı dur = Durdur</a:t>
             </a:r>
           </a:p>
@@ -13702,6 +16131,7 @@
               <a:defRPr sz="1900" b="1"/>
             </a:pPr>
             <a:r>
+              <a:rPr sz="1600"/>
               <a:t>✅ 4. Sprite Listesi (Sağ Alt):</a:t>
             </a:r>
           </a:p>
@@ -13713,6 +16143,7 @@
               <a:defRPr sz="1700"/>
             </a:pPr>
             <a:r>
+              <a:rPr sz="1600"/>
               <a:t>    • Karakterlerin listesi</a:t>
             </a:r>
           </a:p>
@@ -13724,6 +16155,7 @@
               <a:defRPr sz="1700"/>
             </a:pPr>
             <a:r>
+              <a:rPr sz="1600"/>
               <a:t>    • Yeni sprite ekle</a:t>
             </a:r>
           </a:p>
@@ -13735,6 +16167,7 @@
               <a:defRPr sz="1700"/>
             </a:pPr>
             <a:r>
+              <a:rPr sz="1600"/>
               <a:t>    • Sahne arka planı</a:t>
             </a:r>
           </a:p>
@@ -13754,6 +16187,7 @@
               <a:defRPr sz="1900" b="1"/>
             </a:pPr>
             <a:r>
+              <a:rPr sz="1600"/>
               <a:t>💡 Her şey sürükle-bırak ile yapılır!</a:t>
             </a:r>
           </a:p>
@@ -13765,6 +16199,7 @@
               <a:defRPr sz="1900"/>
             </a:pPr>
             <a:r>
+              <a:rPr sz="1600"/>
               <a:t>Hiç kod yazmana gerek yok.</a:t>
             </a:r>
           </a:p>
@@ -13863,6 +16298,7 @@
               <a:defRPr sz="1900"/>
             </a:pPr>
             <a:r>
+              <a:rPr sz="1600"/>
               <a:t>Scratch'te 9 farklı blok kategorisi var:</a:t>
             </a:r>
           </a:p>
@@ -13882,6 +16318,7 @@
               <a:defRPr sz="1900"/>
             </a:pPr>
             <a:r>
+              <a:rPr sz="1600"/>
               <a:t>🔵 Hareket: Sprite'ı hareket ettir</a:t>
             </a:r>
           </a:p>
@@ -13893,6 +16330,7 @@
               <a:defRPr sz="1900"/>
             </a:pPr>
             <a:r>
+              <a:rPr sz="1600"/>
               <a:t>🟣 Görünüm: Gizle, göster, konuş</a:t>
             </a:r>
           </a:p>
@@ -13904,6 +16342,7 @@
               <a:defRPr sz="1900"/>
             </a:pPr>
             <a:r>
+              <a:rPr sz="1600"/>
               <a:t>🟡 Ses: Müzik, ses efektleri</a:t>
             </a:r>
           </a:p>
@@ -13915,6 +16354,7 @@
               <a:defRPr sz="1900"/>
             </a:pPr>
             <a:r>
+              <a:rPr sz="1600"/>
               <a:t>🔵 Olaylar: Başlangıç, tıklama</a:t>
             </a:r>
           </a:p>
@@ -13926,6 +16366,7 @@
               <a:defRPr sz="1900"/>
             </a:pPr>
             <a:r>
+              <a:rPr sz="1600"/>
               <a:t>🟠 Kontrol: Döngüler, koşullar</a:t>
             </a:r>
           </a:p>
@@ -13937,6 +16378,7 @@
               <a:defRPr sz="1900"/>
             </a:pPr>
             <a:r>
+              <a:rPr sz="1600"/>
               <a:t>🟢 Algılama: Dokunma, mesafe</a:t>
             </a:r>
           </a:p>
@@ -13948,6 +16390,7 @@
               <a:defRPr sz="1900"/>
             </a:pPr>
             <a:r>
+              <a:rPr sz="1600"/>
               <a:t>🔵 Operatörler: Matematik, karşılaştırma</a:t>
             </a:r>
           </a:p>
@@ -13959,6 +16402,7 @@
               <a:defRPr sz="1900"/>
             </a:pPr>
             <a:r>
+              <a:rPr sz="1600"/>
               <a:t>🔴 Değişkenler: Veri saklama</a:t>
             </a:r>
           </a:p>
@@ -13970,6 +16414,7 @@
               <a:defRPr sz="1900"/>
             </a:pPr>
             <a:r>
+              <a:rPr sz="1600"/>
               <a:t>🟣 Kendi Bloklarım: Fonksiyonlar</a:t>
             </a:r>
           </a:p>
@@ -13989,6 +16434,7 @@
               <a:defRPr sz="1900" b="1"/>
             </a:pPr>
             <a:r>
+              <a:rPr sz="1600"/>
               <a:t>📌 Blok Şekilleri:</a:t>
             </a:r>
           </a:p>
@@ -14000,6 +16446,7 @@
               <a:defRPr sz="1700"/>
             </a:pPr>
             <a:r>
+              <a:rPr sz="1600"/>
               <a:t>    • Yuvarlak = Değer döndürür</a:t>
             </a:r>
           </a:p>
@@ -14011,6 +16458,7 @@
               <a:defRPr sz="1700"/>
             </a:pPr>
             <a:r>
+              <a:rPr sz="1600"/>
               <a:t>    • Altıgen = Koşul (doğru/yanlış)</a:t>
             </a:r>
           </a:p>
@@ -14022,6 +16470,7 @@
               <a:defRPr sz="1700"/>
             </a:pPr>
             <a:r>
+              <a:rPr sz="1600"/>
               <a:t>    • Dikdörtgen = Komut</a:t>
             </a:r>
           </a:p>
@@ -14033,6 +16482,7 @@
               <a:defRPr sz="1700"/>
             </a:pPr>
             <a:r>
+              <a:rPr sz="1600"/>
               <a:t>    • Şapka = Başlangıç bloğu</a:t>
             </a:r>
           </a:p>
@@ -14052,6 +16502,7 @@
               <a:defRPr sz="1900" b="1"/>
             </a:pPr>
             <a:r>
+              <a:rPr sz="1600"/>
               <a:t>💡 Bloklar LEGO gibi birbirine kenetlenir!</a:t>
             </a:r>
           </a:p>
@@ -14150,6 +16601,7 @@
               <a:defRPr sz="1900"/>
             </a:pPr>
             <a:r>
+              <a:rPr sz="1400"/>
               <a:t>Sprite = Karakterler, nesneler</a:t>
             </a:r>
           </a:p>
@@ -14161,6 +16613,7 @@
               <a:defRPr sz="1900"/>
             </a:pPr>
             <a:r>
+              <a:rPr sz="1400"/>
               <a:t>Sahne = Arka plan</a:t>
             </a:r>
           </a:p>
@@ -14180,6 +16633,7 @@
               <a:defRPr sz="1900" b="1"/>
             </a:pPr>
             <a:r>
+              <a:rPr sz="1400"/>
               <a:t>✅ Sprite Ekleme:</a:t>
             </a:r>
           </a:p>
@@ -14191,6 +16645,7 @@
               <a:defRPr sz="1700"/>
             </a:pPr>
             <a:r>
+              <a:rPr sz="1400"/>
               <a:t>    • Sprite kütüphanesinden seç</a:t>
             </a:r>
           </a:p>
@@ -14202,6 +16657,7 @@
               <a:defRPr sz="1700"/>
             </a:pPr>
             <a:r>
+              <a:rPr sz="1400"/>
               <a:t>    • Kendi çizdiğin sprite</a:t>
             </a:r>
           </a:p>
@@ -14213,6 +16669,7 @@
               <a:defRPr sz="1700"/>
             </a:pPr>
             <a:r>
+              <a:rPr sz="1400"/>
               <a:t>    • Fotoğraf yükle</a:t>
             </a:r>
           </a:p>
@@ -14224,6 +16681,7 @@
               <a:defRPr sz="1700"/>
             </a:pPr>
             <a:r>
+              <a:rPr sz="1400"/>
               <a:t>    • Sürpriz sprite (rastgele)</a:t>
             </a:r>
           </a:p>
@@ -14243,6 +16701,7 @@
               <a:defRPr sz="1900" b="1"/>
             </a:pPr>
             <a:r>
+              <a:rPr sz="1400"/>
               <a:t>✅ Sprite Özellikleri:</a:t>
             </a:r>
           </a:p>
@@ -14254,6 +16713,7 @@
               <a:defRPr sz="1700"/>
             </a:pPr>
             <a:r>
+              <a:rPr sz="1400"/>
               <a:t>    • İsim</a:t>
             </a:r>
           </a:p>
@@ -14265,6 +16725,7 @@
               <a:defRPr sz="1700"/>
             </a:pPr>
             <a:r>
+              <a:rPr sz="1400"/>
               <a:t>    • Konum (x, y)</a:t>
             </a:r>
           </a:p>
@@ -14276,6 +16737,7 @@
               <a:defRPr sz="1700"/>
             </a:pPr>
             <a:r>
+              <a:rPr sz="1400"/>
               <a:t>    • Yön (derece)</a:t>
             </a:r>
           </a:p>
@@ -14287,6 +16749,7 @@
               <a:defRPr sz="1700"/>
             </a:pPr>
             <a:r>
+              <a:rPr sz="1400"/>
               <a:t>    • Boyut (%)</a:t>
             </a:r>
           </a:p>
@@ -14298,6 +16761,7 @@
               <a:defRPr sz="1700"/>
             </a:pPr>
             <a:r>
+              <a:rPr sz="1400"/>
               <a:t>    • Görünürlük</a:t>
             </a:r>
           </a:p>
@@ -14317,6 +16781,7 @@
               <a:defRPr sz="1900" b="1"/>
             </a:pPr>
             <a:r>
+              <a:rPr sz="1400"/>
               <a:t>✅ Sahne (Arka Plan):</a:t>
             </a:r>
           </a:p>
@@ -14328,6 +16793,7 @@
               <a:defRPr sz="1700"/>
             </a:pPr>
             <a:r>
+              <a:rPr sz="1400"/>
               <a:t>    • Sahne'ye tıkla</a:t>
             </a:r>
           </a:p>
@@ -14339,6 +16805,7 @@
               <a:defRPr sz="1700"/>
             </a:pPr>
             <a:r>
+              <a:rPr sz="1400"/>
               <a:t>    • Arka plan ekle</a:t>
             </a:r>
           </a:p>
@@ -14350,6 +16817,7 @@
               <a:defRPr sz="1700"/>
             </a:pPr>
             <a:r>
+              <a:rPr sz="1400"/>
               <a:t>    • Kütüphaneden seç veya çiz</a:t>
             </a:r>
           </a:p>
@@ -14369,6 +16837,7 @@
               <a:defRPr sz="1900" b="1"/>
             </a:pPr>
             <a:r>
+              <a:rPr sz="1400"/>
               <a:t>📌 Koordinat Sistemi:</a:t>
             </a:r>
           </a:p>
@@ -14380,6 +16849,7 @@
               <a:defRPr sz="1700"/>
             </a:pPr>
             <a:r>
+              <a:rPr sz="1400"/>
               <a:t>    • Merkez: (0, 0)</a:t>
             </a:r>
           </a:p>
@@ -14391,6 +16861,7 @@
               <a:defRPr sz="1700"/>
             </a:pPr>
             <a:r>
+              <a:rPr sz="1400"/>
               <a:t>    • Sağ: + x</a:t>
             </a:r>
           </a:p>
@@ -14402,6 +16873,7 @@
               <a:defRPr sz="1700"/>
             </a:pPr>
             <a:r>
+              <a:rPr sz="1400"/>
               <a:t>    • Sol: - x</a:t>
             </a:r>
           </a:p>
@@ -14413,6 +16885,7 @@
               <a:defRPr sz="1700"/>
             </a:pPr>
             <a:r>
+              <a:rPr sz="1400"/>
               <a:t>    • Yukarı: + y</a:t>
             </a:r>
           </a:p>
@@ -14424,6 +16897,7 @@
               <a:defRPr sz="1700"/>
             </a:pPr>
             <a:r>
+              <a:rPr sz="1400"/>
               <a:t>    • Aşağı: - y</a:t>
             </a:r>
           </a:p>
@@ -14443,6 +16917,7 @@
               <a:defRPr sz="1900" b="1"/>
             </a:pPr>
             <a:r>
+              <a:rPr sz="1400"/>
               <a:t>💡 Bir projede birden fazla sprite olabilir!</a:t>
             </a:r>
           </a:p>
@@ -14541,6 +17016,7 @@
               <a:defRPr sz="1900"/>
             </a:pPr>
             <a:r>
+              <a:rPr sz="1400"/>
               <a:t>Sprite'ları hareket ettirmek için kullanılır</a:t>
             </a:r>
           </a:p>
@@ -14560,6 +17036,7 @@
               <a:defRPr sz="1900" b="1"/>
             </a:pPr>
             <a:r>
+              <a:rPr sz="1400"/>
               <a:t>✅ Temel Hareket Blokları:</a:t>
             </a:r>
           </a:p>
@@ -14579,6 +17056,7 @@
               <a:defRPr sz="1900"/>
             </a:pPr>
             <a:r>
+              <a:rPr sz="1400"/>
               <a:t>🔹 '10 adım git':</a:t>
             </a:r>
           </a:p>
@@ -14590,6 +17068,7 @@
               <a:defRPr sz="1700"/>
             </a:pPr>
             <a:r>
+              <a:rPr sz="1400"/>
               <a:t>    • İleri doğru hareket</a:t>
             </a:r>
           </a:p>
@@ -14609,6 +17088,7 @@
               <a:defRPr sz="1900"/>
             </a:pPr>
             <a:r>
+              <a:rPr sz="1400"/>
               <a:t>🔹 'Sağa/Sola dön (15 derece)':</a:t>
             </a:r>
           </a:p>
@@ -14620,6 +17100,7 @@
               <a:defRPr sz="1700"/>
             </a:pPr>
             <a:r>
+              <a:rPr sz="1400"/>
               <a:t>    • Dönme</a:t>
             </a:r>
           </a:p>
@@ -14639,6 +17120,7 @@
               <a:defRPr sz="1900"/>
             </a:pPr>
             <a:r>
+              <a:rPr sz="1400"/>
               <a:t>🔹 'x: 0 y: 0 git':</a:t>
             </a:r>
           </a:p>
@@ -14650,6 +17132,7 @@
               <a:defRPr sz="1700"/>
             </a:pPr>
             <a:r>
+              <a:rPr sz="1400"/>
               <a:t>    • Belirli koordinata git</a:t>
             </a:r>
           </a:p>
@@ -14669,6 +17152,7 @@
               <a:defRPr sz="1900"/>
             </a:pPr>
             <a:r>
+              <a:rPr sz="1400"/>
               <a:t>🔹 'Mouse işaretçisine git':</a:t>
             </a:r>
           </a:p>
@@ -14680,6 +17164,7 @@
               <a:defRPr sz="1700"/>
             </a:pPr>
             <a:r>
+              <a:rPr sz="1400"/>
               <a:t>    • Fareye doğru git</a:t>
             </a:r>
           </a:p>
@@ -14699,6 +17184,7 @@
               <a:defRPr sz="1900"/>
             </a:pPr>
             <a:r>
+              <a:rPr sz="1400"/>
               <a:t>🔹 '1 saniyede x: 0 y: 0 kay':</a:t>
             </a:r>
           </a:p>
@@ -14710,6 +17196,7 @@
               <a:defRPr sz="1700"/>
             </a:pPr>
             <a:r>
+              <a:rPr sz="1400"/>
               <a:t>    • Animasyonlu hareket</a:t>
             </a:r>
           </a:p>
@@ -14729,6 +17216,7 @@
               <a:defRPr sz="1900"/>
             </a:pPr>
             <a:r>
+              <a:rPr sz="1400"/>
               <a:t>🔹 '90 derece yönel':</a:t>
             </a:r>
           </a:p>
@@ -14740,6 +17228,7 @@
               <a:defRPr sz="1700"/>
             </a:pPr>
             <a:r>
+              <a:rPr sz="1400"/>
               <a:t>    • Belirli yöne bak (0=Yukarı, 90=Sağ, 180=Aşağı, -90=Sol)</a:t>
             </a:r>
           </a:p>
@@ -14759,6 +17248,7 @@
               <a:defRPr sz="1900" b="1"/>
             </a:pPr>
             <a:r>
+              <a:rPr sz="1400"/>
               <a:t>📌 İlk Programımız:</a:t>
             </a:r>
           </a:p>
@@ -14770,6 +17260,7 @@
               <a:defRPr sz="1900"/>
             </a:pPr>
             <a:r>
+              <a:rPr sz="1400"/>
               <a:t>[Yeşil bayrak tıklandığında]</a:t>
             </a:r>
           </a:p>
@@ -14781,6 +17272,7 @@
               <a:defRPr sz="1900"/>
             </a:pPr>
             <a:r>
+              <a:rPr sz="1400"/>
               <a:t>[10 kez tekrarla]</a:t>
             </a:r>
           </a:p>
@@ -14792,6 +17284,7 @@
               <a:defRPr sz="1700"/>
             </a:pPr>
             <a:r>
+              <a:rPr sz="1400"/>
               <a:t>    [10 adım git]</a:t>
             </a:r>
           </a:p>
@@ -14803,6 +17296,7 @@
               <a:defRPr sz="1700"/>
             </a:pPr>
             <a:r>
+              <a:rPr sz="1400"/>
               <a:t>    [15 derece sağa dön]</a:t>
             </a:r>
           </a:p>
@@ -14822,6 +17316,7 @@
               <a:defRPr sz="1900" b="1"/>
             </a:pPr>
             <a:r>
+              <a:rPr sz="1400"/>
               <a:t>💡 Bu bir kare çizer!</a:t>
             </a:r>
           </a:p>
@@ -14920,6 +17415,7 @@
               <a:defRPr sz="1900"/>
             </a:pPr>
             <a:r>
+              <a:rPr sz="1400"/>
               <a:t>Sprite'ın nasıl göründüğünü değiştirmek için</a:t>
             </a:r>
           </a:p>
@@ -14939,6 +17435,7 @@
               <a:defRPr sz="1900" b="1"/>
             </a:pPr>
             <a:r>
+              <a:rPr sz="1400"/>
               <a:t>✅ Temel Görünüm Blokları:</a:t>
             </a:r>
           </a:p>
@@ -14958,6 +17455,7 @@
               <a:defRPr sz="1900"/>
             </a:pPr>
             <a:r>
+              <a:rPr sz="1400"/>
               <a:t>🔹 '... de 2 saniye (Merhaba!)':</a:t>
             </a:r>
           </a:p>
@@ -14969,6 +17467,7 @@
               <a:defRPr sz="1700"/>
             </a:pPr>
             <a:r>
+              <a:rPr sz="1400"/>
               <a:t>    • Konuşma balonu</a:t>
             </a:r>
           </a:p>
@@ -14988,6 +17487,7 @@
               <a:defRPr sz="1900"/>
             </a:pPr>
             <a:r>
+              <a:rPr sz="1400"/>
               <a:t>🔹 'Göster / Gizle':</a:t>
             </a:r>
           </a:p>
@@ -14999,6 +17499,7 @@
               <a:defRPr sz="1700"/>
             </a:pPr>
             <a:r>
+              <a:rPr sz="1400"/>
               <a:t>    • Sprite'ı görünür/görünmez yap</a:t>
             </a:r>
           </a:p>
@@ -15018,6 +17519,7 @@
               <a:defRPr sz="1900"/>
             </a:pPr>
             <a:r>
+              <a:rPr sz="1400"/>
               <a:t>🔹 'Kostümü ... yap':</a:t>
             </a:r>
           </a:p>
@@ -15029,6 +17531,7 @@
               <a:defRPr sz="1700"/>
             </a:pPr>
             <a:r>
+              <a:rPr sz="1400"/>
               <a:t>    • Görünümü değiştir (animasyon)</a:t>
             </a:r>
           </a:p>
@@ -15048,6 +17551,7 @@
               <a:defRPr sz="1900"/>
             </a:pPr>
             <a:r>
+              <a:rPr sz="1400"/>
               <a:t>🔹 'Boyutu %100 yap':</a:t>
             </a:r>
           </a:p>
@@ -15059,6 +17563,7 @@
               <a:defRPr sz="1700"/>
             </a:pPr>
             <a:r>
+              <a:rPr sz="1400"/>
               <a:t>    • Büyüt/küçült</a:t>
             </a:r>
           </a:p>
@@ -15078,6 +17583,7 @@
               <a:defRPr sz="1900"/>
             </a:pPr>
             <a:r>
+              <a:rPr sz="1400"/>
               <a:t>🔹 'Renk efekti 25 değiştir':</a:t>
             </a:r>
           </a:p>
@@ -15089,6 +17595,7 @@
               <a:defRPr sz="1700"/>
             </a:pPr>
             <a:r>
+              <a:rPr sz="1400"/>
               <a:t>    • Renkli efektler</a:t>
             </a:r>
           </a:p>
@@ -15108,6 +17615,7 @@
               <a:defRPr sz="1900"/>
             </a:pPr>
             <a:r>
+              <a:rPr sz="1400"/>
               <a:t>🔹 'Grafik efektlerini temizle':</a:t>
             </a:r>
           </a:p>
@@ -15119,6 +17627,7 @@
               <a:defRPr sz="1700"/>
             </a:pPr>
             <a:r>
+              <a:rPr sz="1400"/>
               <a:t>    • Efektleri sıfırla</a:t>
             </a:r>
           </a:p>
@@ -15138,6 +17647,7 @@
               <a:defRPr sz="1900"/>
             </a:pPr>
             <a:r>
+              <a:rPr sz="1400"/>
               <a:t>🔹 'En öne/En arkaya gel':</a:t>
             </a:r>
           </a:p>
@@ -15149,6 +17659,7 @@
               <a:defRPr sz="1700"/>
             </a:pPr>
             <a:r>
+              <a:rPr sz="1400"/>
               <a:t>    • Katman sıralaması</a:t>
             </a:r>
           </a:p>
@@ -15168,6 +17679,7 @@
               <a:defRPr sz="1900" b="1"/>
             </a:pPr>
             <a:r>
+              <a:rPr sz="1400"/>
               <a:t>📌 Örnek: Konuşan Kedi</a:t>
             </a:r>
           </a:p>
@@ -15179,6 +17691,7 @@
               <a:defRPr sz="1900"/>
             </a:pPr>
             <a:r>
+              <a:rPr sz="1400"/>
               <a:t>[Yeşil bayrak tıklandığında]</a:t>
             </a:r>
           </a:p>
@@ -15190,6 +17703,7 @@
               <a:defRPr sz="1900"/>
             </a:pPr>
             <a:r>
+              <a:rPr sz="1400"/>
               <a:t>[Merhaba! de 2 saniye]</a:t>
             </a:r>
           </a:p>
@@ -15201,6 +17715,7 @@
               <a:defRPr sz="1900"/>
             </a:pPr>
             <a:r>
+              <a:rPr sz="1400"/>
               <a:t>[Nasılsın? de 2 saniye]</a:t>
             </a:r>
           </a:p>
@@ -15220,6 +17735,7 @@
               <a:defRPr sz="1900" b="1"/>
             </a:pPr>
             <a:r>
+              <a:rPr sz="1400"/>
               <a:t>💡 Kostüm değiştirerek animasyon yapabilirsin!</a:t>
             </a:r>
           </a:p>
@@ -15318,6 +17834,7 @@
               <a:defRPr sz="1900"/>
             </a:pPr>
             <a:r>
+              <a:rPr sz="1400"/>
               <a:t>Oyununa ses ekle!</a:t>
             </a:r>
           </a:p>
@@ -15337,6 +17854,7 @@
               <a:defRPr sz="1900" b="1"/>
             </a:pPr>
             <a:r>
+              <a:rPr sz="1400"/>
               <a:t>✅ Ses Blokları:</a:t>
             </a:r>
           </a:p>
@@ -15356,6 +17874,7 @@
               <a:defRPr sz="1900"/>
             </a:pPr>
             <a:r>
+              <a:rPr sz="1400"/>
               <a:t>🔹 '... sesini çal':</a:t>
             </a:r>
           </a:p>
@@ -15367,6 +17886,7 @@
               <a:defRPr sz="1700"/>
             </a:pPr>
             <a:r>
+              <a:rPr sz="1400"/>
               <a:t>    • Ses efekti çal</a:t>
             </a:r>
           </a:p>
@@ -15386,6 +17906,7 @@
               <a:defRPr sz="1900"/>
             </a:pPr>
             <a:r>
+              <a:rPr sz="1400"/>
               <a:t>🔹 '... sesini çal ve bekle':</a:t>
             </a:r>
           </a:p>
@@ -15397,6 +17918,7 @@
               <a:defRPr sz="1700"/>
             </a:pPr>
             <a:r>
+              <a:rPr sz="1400"/>
               <a:t>    • Ses bitene kadar bekle</a:t>
             </a:r>
           </a:p>
@@ -15416,6 +17938,7 @@
               <a:defRPr sz="1900"/>
             </a:pPr>
             <a:r>
+              <a:rPr sz="1400"/>
               <a:t>🔹 'Tüm sesleri durdur':</a:t>
             </a:r>
           </a:p>
@@ -15427,6 +17950,7 @@
               <a:defRPr sz="1700"/>
             </a:pPr>
             <a:r>
+              <a:rPr sz="1400"/>
               <a:t>    • Sesleri kapat</a:t>
             </a:r>
           </a:p>
@@ -15446,6 +17970,7 @@
               <a:defRPr sz="1900"/>
             </a:pPr>
             <a:r>
+              <a:rPr sz="1400"/>
               <a:t>🔹 'Ses efekti ... 25 değiştir':</a:t>
             </a:r>
           </a:p>
@@ -15457,6 +17982,7 @@
               <a:defRPr sz="1700"/>
             </a:pPr>
             <a:r>
+              <a:rPr sz="1400"/>
               <a:t>    • Ses efektleri (pitch, echo)</a:t>
             </a:r>
           </a:p>
@@ -15476,6 +18002,7 @@
               <a:defRPr sz="1900"/>
             </a:pPr>
             <a:r>
+              <a:rPr sz="1400"/>
               <a:t>🔹 'Ses %100 yap':</a:t>
             </a:r>
           </a:p>
@@ -15487,6 +18014,7 @@
               <a:defRPr sz="1700"/>
             </a:pPr>
             <a:r>
+              <a:rPr sz="1400"/>
               <a:t>    • Ses seviyesi</a:t>
             </a:r>
           </a:p>
@@ -15506,6 +18034,7 @@
               <a:defRPr sz="1900" b="1"/>
             </a:pPr>
             <a:r>
+              <a:rPr sz="1400"/>
               <a:t>✅ Ses Ekleme:</a:t>
             </a:r>
           </a:p>
@@ -15517,6 +18046,7 @@
               <a:defRPr sz="1700"/>
             </a:pPr>
             <a:r>
+              <a:rPr sz="1400"/>
               <a:t>    • Sesler sekmesi</a:t>
             </a:r>
           </a:p>
@@ -15528,6 +18058,7 @@
               <a:defRPr sz="1700"/>
             </a:pPr>
             <a:r>
+              <a:rPr sz="1400"/>
               <a:t>    • Kütüphaneden seç</a:t>
             </a:r>
           </a:p>
@@ -15539,6 +18070,7 @@
               <a:defRPr sz="1700"/>
             </a:pPr>
             <a:r>
+              <a:rPr sz="1400"/>
               <a:t>    • Kendi sesini kaydet</a:t>
             </a:r>
           </a:p>
@@ -15550,6 +18082,7 @@
               <a:defRPr sz="1700"/>
             </a:pPr>
             <a:r>
+              <a:rPr sz="1400"/>
               <a:t>    • Dosyadan yükle</a:t>
             </a:r>
           </a:p>
@@ -15569,6 +18102,7 @@
               <a:defRPr sz="1900" b="1"/>
             </a:pPr>
             <a:r>
+              <a:rPr sz="1400"/>
               <a:t>📌 Örnek: Müzikli Kedi</a:t>
             </a:r>
           </a:p>
@@ -15580,6 +18114,7 @@
               <a:defRPr sz="1900"/>
             </a:pPr>
             <a:r>
+              <a:rPr sz="1400"/>
               <a:t>[Yeşil bayrak tıklandığında]</a:t>
             </a:r>
           </a:p>
@@ -15591,6 +18126,7 @@
               <a:defRPr sz="1900"/>
             </a:pPr>
             <a:r>
+              <a:rPr sz="1400"/>
               <a:t>[Miyav sesini çal]</a:t>
             </a:r>
           </a:p>
@@ -15602,6 +18138,7 @@
               <a:defRPr sz="1900"/>
             </a:pPr>
             <a:r>
+              <a:rPr sz="1400"/>
               <a:t>[2 saniye bekle]</a:t>
             </a:r>
           </a:p>
@@ -15613,6 +18150,7 @@
               <a:defRPr sz="1900"/>
             </a:pPr>
             <a:r>
+              <a:rPr sz="1400"/>
               <a:t>[Miyav sesini tekrar çal]</a:t>
             </a:r>
           </a:p>
@@ -15632,6 +18170,7 @@
               <a:defRPr sz="1900" b="1"/>
             </a:pPr>
             <a:r>
+              <a:rPr sz="1400"/>
               <a:t>💡 Ses oyununu canlı yapar!</a:t>
             </a:r>
           </a:p>
